--- a/docs/admin/bed_control_evolution_presentation.pptx
+++ b/docs/admin/bed_control_evolution_presentation.pptx
@@ -3444,7 +3444,7 @@
                 <a:ea typeface="Calibri" pitchFamily="34" charset="-122"/>
                 <a:cs typeface="Calibri" pitchFamily="34" charset="-120"/>
               </a:rPr>
-              <a:t>稼働率1% = 年間1,113万円 = 営業利益の31%</a:t>
+              <a:t>稼働率1% = 年間1,113万円 = 年間黒字額の31%</a:t>
             </a:r>
             <a:endParaRPr lang="en-US" sz="1600" dirty="0"/>
           </a:p>
@@ -5146,7 +5146,7 @@
                 <a:ea typeface="Calibri" pitchFamily="34" charset="-122"/>
                 <a:cs typeface="Calibri" pitchFamily="34" charset="-120"/>
               </a:rPr>
-              <a:t>= 営業利益 3,550万円 の 31% 相当</a:t>
+              <a:t>= 年間黒字額 3,550万円 の 31% 相当</a:t>
             </a:r>
             <a:endParaRPr lang="en-US" sz="1800" dirty="0"/>
           </a:p>
@@ -5185,7 +5185,7 @@
                 <a:ea typeface="Georgia" pitchFamily="34" charset="-122"/>
                 <a:cs typeface="Georgia" pitchFamily="34" charset="-120"/>
               </a:rPr>
-              <a:t>たった1%の改善が、営業利益の約3分の1に匹敵する。</a:t>
+              <a:t>たった1%の改善が、年間黒字額の約3分の1に匹敵する。</a:t>
             </a:r>
             <a:endParaRPr lang="en-US" sz="1400" dirty="0"/>
           </a:p>
@@ -5487,7 +5487,7 @@
                 <a:ea typeface="Calibri" pitchFamily="34" charset="-122"/>
                 <a:cs typeface="Calibri" pitchFamily="34" charset="-120"/>
               </a:rPr>
-              <a:t>営業利益</a:t>
+              <a:t>年間黒字額</a:t>
             </a:r>
             <a:endParaRPr lang="en-US" sz="1200" dirty="0"/>
           </a:p>
@@ -5612,7 +5612,7 @@
                 <a:ea typeface="Calibri" pitchFamily="34" charset="-122"/>
                 <a:cs typeface="Calibri" pitchFamily="34" charset="-120"/>
               </a:rPr>
-              <a:t>営業利益率</a:t>
+              <a:t>黒字率</a:t>
             </a:r>
             <a:endParaRPr lang="en-US" sz="1200" dirty="0"/>
           </a:p>
@@ -6337,7 +6337,7 @@
                 <a:ea typeface="Calibri" pitchFamily="34" charset="-122"/>
                 <a:cs typeface="Calibri" pitchFamily="34" charset="-120"/>
               </a:rPr>
-              <a:t> （営業利益の31%相当）</a:t>
+              <a:t> （年間黒字額の31%相当）</a:t>
             </a:r>
             <a:endParaRPr lang="en-US" sz="1600" dirty="0"/>
           </a:p>
@@ -7087,7 +7087,7 @@
                 <a:ea typeface="Calibri" pitchFamily="34" charset="-122"/>
                 <a:cs typeface="Calibri" pitchFamily="34" charset="-120"/>
               </a:rPr>
-              <a:t>（営業利益の16%相当）</a:t>
+              <a:t>（年間黒字額の16%相当）</a:t>
             </a:r>
             <a:endParaRPr lang="en-US" sz="1200" dirty="0"/>
           </a:p>
@@ -7727,7 +7727,7 @@
                 <a:ea typeface="Calibri" pitchFamily="34" charset="-122"/>
                 <a:cs typeface="Calibri" pitchFamily="34" charset="-120"/>
               </a:rPr>
-              <a:t>営業利益の何%か</a:t>
+              <a:t>年間黒字額の何%か</a:t>
             </a:r>
             <a:endParaRPr lang="en-US" sz="1100" dirty="0"/>
           </a:p>
@@ -9304,7 +9304,7 @@
                 <a:ea typeface="Georgia" pitchFamily="34" charset="-122"/>
                 <a:cs typeface="Georgia" pitchFamily="34" charset="-120"/>
               </a:rPr>
-              <a:t>個別は小さくても、積み重ねれば営業利益の 63% に相当する改善余地がある。</a:t>
+              <a:t>個別は小さくても、積み重ねれば年間黒字額の 63% に相当する改善余地がある。</a:t>
             </a:r>
             <a:endParaRPr lang="en-US" sz="1400" dirty="0"/>
           </a:p>

--- a/docs/admin/bed_control_evolution_presentation.pptx
+++ b/docs/admin/bed_control_evolution_presentation.pptx
@@ -3444,7 +3444,7 @@
                 <a:ea typeface="Calibri" pitchFamily="34" charset="-122"/>
                 <a:cs typeface="Calibri" pitchFamily="34" charset="-120"/>
               </a:rPr>
-              <a:t>稼働率1% = 年間1,113万円 = 年間黒字額の31%</a:t>
+              <a:t>稼働率1% = 年間1,046万円</a:t>
             </a:r>
             <a:endParaRPr lang="en-US" sz="1600" dirty="0"/>
           </a:p>
@@ -5093,7 +5093,7 @@
                 <a:ea typeface="Arial Black" pitchFamily="34" charset="-122"/>
                 <a:cs typeface="Arial Black" pitchFamily="34" charset="-120"/>
               </a:rPr>
-              <a:t>1,113</a:t>
+              <a:t>1,046</a:t>
             </a:r>
             <a:pPr algn="ctr" indent="0" marL="0">
               <a:buNone/>
@@ -5146,7 +5146,7 @@
                 <a:ea typeface="Calibri" pitchFamily="34" charset="-122"/>
                 <a:cs typeface="Calibri" pitchFamily="34" charset="-120"/>
               </a:rPr>
-              <a:t>= 年間黒字額 3,550万円 の 31% 相当</a:t>
+              <a:t>= 年間黒字額 3,550万円 の 29% 相当</a:t>
             </a:r>
             <a:endParaRPr lang="en-US" sz="1800" dirty="0"/>
           </a:p>
@@ -6085,7 +6085,7 @@
                 <a:ea typeface="Calibri" pitchFamily="34" charset="-122"/>
                 <a:cs typeface="Calibri" pitchFamily="34" charset="-120"/>
               </a:rPr>
-              <a:t>稼働率目標 90% まで、あと 1%。 その 1% = 年間 1,113万円。</a:t>
+              <a:t>稼働率目標 90% まで、あと 1%。 その 1% = 年間 1,046万円。</a:t>
             </a:r>
             <a:endParaRPr lang="en-US" sz="1600" dirty="0"/>
           </a:p>
@@ -6323,7 +6323,7 @@
                 <a:ea typeface="Calibri" pitchFamily="34" charset="-122"/>
                 <a:cs typeface="Calibri" pitchFamily="34" charset="-120"/>
               </a:rPr>
-              <a:t>+1,113万円</a:t>
+              <a:t>+1,046万円</a:t>
             </a:r>
             <a:pPr algn="ctr" indent="0" marL="0">
               <a:buNone/>
@@ -6337,7 +6337,7 @@
                 <a:ea typeface="Calibri" pitchFamily="34" charset="-122"/>
                 <a:cs typeface="Calibri" pitchFamily="34" charset="-120"/>
               </a:rPr>
-              <a:t> （年間黒字額の31%相当）</a:t>
+              <a:t> （年間黒字額の29%相当）</a:t>
             </a:r>
             <a:endParaRPr lang="en-US" sz="1600" dirty="0"/>
           </a:p>

--- a/docs/admin/bed_control_evolution_presentation.pptx
+++ b/docs/admin/bed_control_evolution_presentation.pptx
@@ -4,6 +4,9 @@
   <p:sldMasterIdLst>
     <p:sldMasterId id="2147483648" r:id="rId1"/>
   </p:sldMasterIdLst>
+  <p:notesMasterIdLst>
+    <p:notesMasterId r:id="rId13"/>
+  </p:notesMasterIdLst>
   <p:sldIdLst>
     <p:sldId id="256" r:id="rId2"/>
     <p:sldId id="257" r:id="rId3"/>
@@ -17,10 +20,7 @@
     <p:sldId id="265" r:id="rId11"/>
     <p:sldId id="266" r:id="rId12"/>
   </p:sldIdLst>
-  <p:notesMasterIdLst>
-    <p:notesMasterId r:id="rId13"/>
-  </p:notesMasterIdLst>
-  <p:sldSz cx="9144000" cy="5143500"/>
+  <p:sldSz cx="9144000" cy="5143500" type="screen16x9"/>
   <p:notesSz cx="5143500" cy="9144000"/>
   <p:defaultTextStyle>
     <a:lvl1pPr marL="0" algn="l" defTabSz="914400" rtl="0" eaLnBrk="1" latinLnBrk="0" hangingPunct="1">
@@ -114,13 +114,20 @@
       </a:defRPr>
     </a:lvl9pPr>
   </p:defaultTextStyle>
+  <p:extLst>
+    <p:ext uri="{EFAFB233-063F-42B5-8137-9DF3F51BA10A}">
+      <p15:sldGuideLst xmlns:p15="http://schemas.microsoft.com/office/powerpoint/2012/main"/>
+    </p:ext>
+  </p:extLst>
 </p:presentation>
 </file>
 
 <file path=ppt/charts/chart1.xml><?xml version="1.0" encoding="utf-8"?>
-<c:chartSpace xmlns:c="http://schemas.openxmlformats.org/drawingml/2006/chart" xmlns:a="http://schemas.openxmlformats.org/drawingml/2006/main" xmlns:r="http://schemas.openxmlformats.org/officeDocument/2006/relationships">
+<c:chartSpace xmlns:c="http://schemas.openxmlformats.org/drawingml/2006/chart" xmlns:a="http://schemas.openxmlformats.org/drawingml/2006/main" xmlns:r="http://schemas.openxmlformats.org/officeDocument/2006/relationships" xmlns:c16r2="http://schemas.microsoft.com/office/drawing/2015/06/chart">
   <c:date1904 val="0"/>
+  <c:lang val="ja-JP"/>
   <c:roundedCorners val="1"/>
+  <c:style val="2"/>
   <c:chart>
     <c:autoTitleDeleted val="1"/>
     <c:plotArea>
@@ -152,18 +159,26 @@
           <c:invertIfNegative val="0"/>
           <c:dLbls>
             <c:numFmt formatCode="#,##0" sourceLinked="0"/>
+            <c:spPr>
+              <a:noFill/>
+              <a:ln>
+                <a:noFill/>
+              </a:ln>
+              <a:effectLst/>
+            </c:spPr>
             <c:txPr>
               <a:bodyPr/>
               <a:lstStyle/>
               <a:p>
                 <a:pPr>
-                  <a:defRPr b="0" i="0" strike="noStrike" sz="1400" u="none">
+                  <a:defRPr sz="1400" b="0" i="0" u="none" strike="noStrike">
                     <a:solidFill>
                       <a:srgbClr val="F59E0B"/>
                     </a:solidFill>
                     <a:latin typeface="Arial"/>
                   </a:defRPr>
                 </a:pPr>
+                <a:endParaRPr lang="ja-JP"/>
               </a:p>
             </c:txPr>
             <c:showLegendKey val="0"/>
@@ -173,32 +188,35 @@
             <c:showPercent val="0"/>
             <c:showBubbleSize val="0"/>
             <c:showLeaderLines val="0"/>
+            <c:extLst>
+              <c:ext xmlns:c15="http://schemas.microsoft.com/office/drawing/2012/chart" uri="{CE6537A1-D6FC-4f65-9D91-7224C49458BB}">
+                <c15:showLeaderLines val="0"/>
+              </c:ext>
+            </c:extLst>
           </c:dLbls>
           <c:cat>
-            <c:multiLvlStrRef>
+            <c:strRef>
               <c:f>Sheet1!$A$2:$A$5</c:f>
-              <c:multiLvlStrCache>
+              <c:strCache>
                 <c:ptCount val="4"/>
-                <c:lvl>
-                  <c:pt idx="0">
-                    <c:v>退院曜日
+                <c:pt idx="0">
+                  <c:v>退院曜日
 平準化</c:v>
-                  </c:pt>
-                  <c:pt idx="1">
-                    <c:v>空床ラグ
+                </c:pt>
+                <c:pt idx="1">
+                  <c:v>空床ラグ
 短縮</c:v>
-                  </c:pt>
-                  <c:pt idx="2">
-                    <c:v>入院創出
+                </c:pt>
+                <c:pt idx="2">
+                  <c:v>入院創出
 強化</c:v>
-                  </c:pt>
-                  <c:pt idx="3">
-                    <c:v>在院日数
+                </c:pt>
+                <c:pt idx="3">
+                  <c:v>在院日数
 適正化</c:v>
-                  </c:pt>
-                </c:lvl>
-              </c:multiLvlStrCache>
-            </c:multiLvlStrRef>
+                </c:pt>
+              </c:strCache>
+            </c:strRef>
           </c:cat>
           <c:val>
             <c:numRef>
@@ -221,36 +239,23 @@
               </c:numCache>
             </c:numRef>
           </c:val>
+          <c:extLst>
+            <c:ext xmlns:c16="http://schemas.microsoft.com/office/drawing/2014/chart" uri="{C3380CC4-5D6E-409C-BE32-E72D297353CC}">
+              <c16:uniqueId val="{00000000-B7F6-F94F-BCA7-A6362B17FA79}"/>
+            </c:ext>
+          </c:extLst>
         </c:ser>
         <c:dLbls>
-          <c:numFmt formatCode="#,##0" sourceLinked="0"/>
-          <c:txPr>
-            <a:bodyPr/>
-            <a:lstStyle/>
-            <a:p>
-              <a:pPr>
-                <a:defRPr b="0" i="0" strike="noStrike" sz="1400" u="none">
-                  <a:solidFill>
-                    <a:srgbClr val="F59E0B"/>
-                  </a:solidFill>
-                  <a:latin typeface="Arial"/>
-                </a:defRPr>
-              </a:pPr>
-            </a:p>
-          </c:txPr>
           <c:showLegendKey val="0"/>
           <c:showVal val="1"/>
           <c:showCatName val="0"/>
           <c:showSerName val="0"/>
           <c:showPercent val="0"/>
           <c:showBubbleSize val="0"/>
-          <c:showLeaderLines val="0"/>
         </c:dLbls>
         <c:gapWidth val="150"/>
-        <c:overlap val="0"/>
         <c:axId val="2094734554"/>
         <c:axId val="2094734552"/>
-        <c:axId val="2094734556"/>
       </c:barChart>
       <c:catAx>
         <c:axId val="2094734554"/>
@@ -291,6 +296,7 @@
         <c:crosses val="autoZero"/>
         <c:auto val="1"/>
         <c:lblAlgn val="ctr"/>
+        <c:lblOffset val="100"/>
         <c:noMultiLvlLbl val="1"/>
       </c:catAx>
       <c:valAx>
@@ -353,6 +359,7 @@
     </c:plotArea>
     <c:plotVisOnly val="1"/>
     <c:dispBlanksAs val="span"/>
+    <c:showDLblsOverMax val="1"/>
   </c:chart>
   <c:spPr>
     <a:solidFill>
@@ -391,241 +398,17 @@
           <a:chExt cx="0" cy="0"/>
         </a:xfrm>
       </p:grpSpPr>
-      <p:sp>
-        <p:nvSpPr>
-          <p:cNvPr id="2" name="Header Placeholder 1"/>
-          <p:cNvSpPr>
-            <a:spLocks noGrp="1"/>
-          </p:cNvSpPr>
-          <p:nvPr>
-            <p:ph type="hdr" sz="quarter"/>
-          </p:nvPr>
-        </p:nvSpPr>
-        <p:spPr>
-          <a:xfrm>
-            <a:off x="0" y="0"/>
-            <a:ext cx="2971800" cy="458788"/>
-          </a:xfrm>
-          <a:prstGeom prst="rect">
-            <a:avLst/>
-          </a:prstGeom>
-        </p:spPr>
-        <p:txBody>
-          <a:bodyPr vert="horz" lIns="91440" tIns="45720" rIns="91440" bIns="45720" rtlCol="0"/>
-          <a:lstStyle>
-            <a:lvl1pPr algn="l">
-              <a:defRPr sz="1200"/>
-            </a:lvl1pPr>
-          </a:lstStyle>
-          <a:p>
-            <a:endParaRPr lang="en-US"/>
-          </a:p>
-        </p:txBody>
-      </p:sp>
-      <p:sp>
-        <p:nvSpPr>
-          <p:cNvPr id="3" name="Date Placeholder 2"/>
-          <p:cNvSpPr>
-            <a:spLocks noGrp="1"/>
-          </p:cNvSpPr>
-          <p:nvPr>
-            <p:ph type="dt" idx="1"/>
-          </p:nvPr>
-        </p:nvSpPr>
-        <p:spPr>
-          <a:xfrm>
-            <a:off x="3884613" y="0"/>
-            <a:ext cx="2971800" cy="458788"/>
-          </a:xfrm>
-          <a:prstGeom prst="rect">
-            <a:avLst/>
-          </a:prstGeom>
-        </p:spPr>
-        <p:txBody>
-          <a:bodyPr vert="horz" lIns="91440" tIns="45720" rIns="91440" bIns="45720" rtlCol="0"/>
-          <a:lstStyle>
-            <a:lvl1pPr algn="r">
-              <a:defRPr sz="1200"/>
-            </a:lvl1pPr>
-          </a:lstStyle>
-          <a:p>
-            <a:fld id="{5282F153-3F37-0F45-9E97-73ACFA13230C}" type="datetimeFigureOut">
-              <a:rPr lang="en-US"/>
-              <a:t>7/23/19</a:t>
-            </a:fld>
-            <a:endParaRPr lang="en-US"/>
-          </a:p>
-        </p:txBody>
-      </p:sp>
-      <p:sp>
-        <p:nvSpPr>
-          <p:cNvPr id="4" name="Slide Image Placeholder 3"/>
-          <p:cNvSpPr>
-            <a:spLocks noGrp="1" noRot="1" noChangeAspect="1"/>
-          </p:cNvSpPr>
-          <p:nvPr>
-            <p:ph type="sldImg" idx="2"/>
-          </p:nvPr>
-        </p:nvSpPr>
-        <p:spPr>
-          <a:xfrm>
-            <a:off x="685800" y="1143000"/>
-            <a:ext cx="5486400" cy="3086100"/>
-          </a:xfrm>
-          <a:prstGeom prst="rect">
-            <a:avLst/>
-          </a:prstGeom>
-          <a:noFill/>
-          <a:ln w="12700">
-            <a:solidFill>
-              <a:prstClr val="black"/>
-            </a:solidFill>
-          </a:ln>
-        </p:spPr>
-        <p:txBody>
-          <a:bodyPr vert="horz" lIns="91440" tIns="45720" rIns="91440" bIns="45720" rtlCol="0" anchor="ctr"/>
-          <a:lstStyle/>
-          <a:p>
-            <a:endParaRPr lang="en-US"/>
-          </a:p>
-        </p:txBody>
-      </p:sp>
-      <p:sp>
-        <p:nvSpPr>
-          <p:cNvPr id="5" name="Notes Placeholder 4"/>
-          <p:cNvSpPr>
-            <a:spLocks noGrp="1"/>
-          </p:cNvSpPr>
-          <p:nvPr>
-            <p:ph type="body" sz="quarter" idx="3"/>
-          </p:nvPr>
-        </p:nvSpPr>
-        <p:spPr>
-          <a:xfrm>
-            <a:off x="685800" y="4400550"/>
-            <a:ext cx="5486400" cy="3600450"/>
-          </a:xfrm>
-          <a:prstGeom prst="rect">
-            <a:avLst/>
-          </a:prstGeom>
-        </p:spPr>
-        <p:txBody>
-          <a:bodyPr vert="horz" lIns="91440" tIns="45720" rIns="91440" bIns="45720" rtlCol="0"/>
-          <a:lstStyle/>
-          <a:p>
-            <a:pPr lvl="0"/>
-            <a:r>
-              <a:rPr lang="en-US"/>
-              <a:t>Click to edit Master text styles</a:t>
-            </a:r>
-          </a:p>
-          <a:p>
-            <a:pPr lvl="1"/>
-            <a:r>
-              <a:rPr lang="en-US"/>
-              <a:t>Second level</a:t>
-            </a:r>
-          </a:p>
-          <a:p>
-            <a:pPr lvl="2"/>
-            <a:r>
-              <a:rPr lang="en-US"/>
-              <a:t>Third level</a:t>
-            </a:r>
-          </a:p>
-          <a:p>
-            <a:pPr lvl="3"/>
-            <a:r>
-              <a:rPr lang="en-US"/>
-              <a:t>Fourth level</a:t>
-            </a:r>
-          </a:p>
-          <a:p>
-            <a:pPr lvl="4"/>
-            <a:r>
-              <a:rPr lang="en-US"/>
-              <a:t>Fifth level</a:t>
-            </a:r>
-          </a:p>
-        </p:txBody>
-      </p:sp>
-      <p:sp>
-        <p:nvSpPr>
-          <p:cNvPr id="6" name="Footer Placeholder 5"/>
-          <p:cNvSpPr>
-            <a:spLocks noGrp="1"/>
-          </p:cNvSpPr>
-          <p:nvPr>
-            <p:ph type="ftr" sz="quarter" idx="4"/>
-          </p:nvPr>
-        </p:nvSpPr>
-        <p:spPr>
-          <a:xfrm>
-            <a:off x="0" y="8685213"/>
-            <a:ext cx="2971800" cy="458787"/>
-          </a:xfrm>
-          <a:prstGeom prst="rect">
-            <a:avLst/>
-          </a:prstGeom>
-        </p:spPr>
-        <p:txBody>
-          <a:bodyPr vert="horz" lIns="91440" tIns="45720" rIns="91440" bIns="45720" rtlCol="0" anchor="b"/>
-          <a:lstStyle>
-            <a:lvl1pPr algn="l">
-              <a:defRPr sz="1200"/>
-            </a:lvl1pPr>
-          </a:lstStyle>
-          <a:p>
-            <a:endParaRPr lang="en-US"/>
-          </a:p>
-        </p:txBody>
-      </p:sp>
-      <p:sp>
-        <p:nvSpPr>
-          <p:cNvPr id="7" name="Slide Number Placeholder 6"/>
-          <p:cNvSpPr>
-            <a:spLocks noGrp="1"/>
-          </p:cNvSpPr>
-          <p:nvPr>
-            <p:ph type="sldNum" sz="quarter" idx="5"/>
-          </p:nvPr>
-        </p:nvSpPr>
-        <p:spPr>
-          <a:xfrm>
-            <a:off x="3884613" y="8685213"/>
-            <a:ext cx="2971800" cy="458787"/>
-          </a:xfrm>
-          <a:prstGeom prst="rect">
-            <a:avLst/>
-          </a:prstGeom>
-        </p:spPr>
-        <p:txBody>
-          <a:bodyPr vert="horz" lIns="91440" tIns="45720" rIns="91440" bIns="45720" rtlCol="0" anchor="b"/>
-          <a:lstStyle>
-            <a:lvl1pPr algn="r">
-              <a:defRPr sz="1200"/>
-            </a:lvl1pPr>
-          </a:lstStyle>
-          <a:p>
-            <a:fld id="{CE5E9CC1-C706-0F49-92D6-E571CC5EEA8F}" type="slidenum">
-              <a:rPr lang="en-US"/>
-              <a:t>‹#›</a:t>
-            </a:fld>
-            <a:endParaRPr lang="en-US"/>
-          </a:p>
-        </p:txBody>
-      </p:sp>
     </p:spTree>
     <p:extLst>
       <p:ext uri="{BB962C8B-B14F-4D97-AF65-F5344CB8AC3E}">
-        <p14:creationId xmlns:p14="http://schemas.microsoft.com/office/powerpoint/2010/main" val="1024086991"/>
+        <p14:creationId xmlns:p14="http://schemas.microsoft.com/office/powerpoint/2010/main" val="601273038"/>
       </p:ext>
     </p:extLst>
   </p:cSld>
   <p:clrMap bg1="lt1" tx1="dk1" bg2="lt2" tx2="dk2" accent1="accent1" accent2="accent2" accent3="accent3" accent4="accent4" accent5="accent5" accent6="accent6" hlink="hlink" folHlink="folHlink"/>
   <p:notesStyle>
     <a:lvl1pPr marL="0" algn="l" defTabSz="914400" rtl="0" eaLnBrk="1" latinLnBrk="0" hangingPunct="1">
-      <a:defRPr sz="1200" kern="1200">
+      <a:defRPr kumimoji="1" sz="1200" kern="1200">
         <a:solidFill>
           <a:schemeClr val="tx1"/>
         </a:solidFill>
@@ -635,7 +418,7 @@
       </a:defRPr>
     </a:lvl1pPr>
     <a:lvl2pPr marL="457200" algn="l" defTabSz="914400" rtl="0" eaLnBrk="1" latinLnBrk="0" hangingPunct="1">
-      <a:defRPr sz="1200" kern="1200">
+      <a:defRPr kumimoji="1" sz="1200" kern="1200">
         <a:solidFill>
           <a:schemeClr val="tx1"/>
         </a:solidFill>
@@ -645,7 +428,7 @@
       </a:defRPr>
     </a:lvl2pPr>
     <a:lvl3pPr marL="914400" algn="l" defTabSz="914400" rtl="0" eaLnBrk="1" latinLnBrk="0" hangingPunct="1">
-      <a:defRPr sz="1200" kern="1200">
+      <a:defRPr kumimoji="1" sz="1200" kern="1200">
         <a:solidFill>
           <a:schemeClr val="tx1"/>
         </a:solidFill>
@@ -655,7 +438,7 @@
       </a:defRPr>
     </a:lvl3pPr>
     <a:lvl4pPr marL="1371600" algn="l" defTabSz="914400" rtl="0" eaLnBrk="1" latinLnBrk="0" hangingPunct="1">
-      <a:defRPr sz="1200" kern="1200">
+      <a:defRPr kumimoji="1" sz="1200" kern="1200">
         <a:solidFill>
           <a:schemeClr val="tx1"/>
         </a:solidFill>
@@ -665,7 +448,7 @@
       </a:defRPr>
     </a:lvl4pPr>
     <a:lvl5pPr marL="1828800" algn="l" defTabSz="914400" rtl="0" eaLnBrk="1" latinLnBrk="0" hangingPunct="1">
-      <a:defRPr sz="1200" kern="1200">
+      <a:defRPr kumimoji="1" sz="1200" kern="1200">
         <a:solidFill>
           <a:schemeClr val="tx1"/>
         </a:solidFill>
@@ -675,7 +458,7 @@
       </a:defRPr>
     </a:lvl5pPr>
     <a:lvl6pPr marL="2286000" algn="l" defTabSz="914400" rtl="0" eaLnBrk="1" latinLnBrk="0" hangingPunct="1">
-      <a:defRPr sz="1200" kern="1200">
+      <a:defRPr kumimoji="1" sz="1200" kern="1200">
         <a:solidFill>
           <a:schemeClr val="tx1"/>
         </a:solidFill>
@@ -685,7 +468,7 @@
       </a:defRPr>
     </a:lvl6pPr>
     <a:lvl7pPr marL="2743200" algn="l" defTabSz="914400" rtl="0" eaLnBrk="1" latinLnBrk="0" hangingPunct="1">
-      <a:defRPr sz="1200" kern="1200">
+      <a:defRPr kumimoji="1" sz="1200" kern="1200">
         <a:solidFill>
           <a:schemeClr val="tx1"/>
         </a:solidFill>
@@ -695,7 +478,7 @@
       </a:defRPr>
     </a:lvl7pPr>
     <a:lvl8pPr marL="3200400" algn="l" defTabSz="914400" rtl="0" eaLnBrk="1" latinLnBrk="0" hangingPunct="1">
-      <a:defRPr sz="1200" kern="1200">
+      <a:defRPr kumimoji="1" sz="1200" kern="1200">
         <a:solidFill>
           <a:schemeClr val="tx1"/>
         </a:solidFill>
@@ -705,7 +488,7 @@
       </a:defRPr>
     </a:lvl8pPr>
     <a:lvl9pPr marL="3657600" algn="l" defTabSz="914400" rtl="0" eaLnBrk="1" latinLnBrk="0" hangingPunct="1">
-      <a:defRPr sz="1200" kern="1200">
+      <a:defRPr kumimoji="1" sz="1200" kern="1200">
         <a:solidFill>
           <a:schemeClr val="tx1"/>
         </a:solidFill>
@@ -762,10 +545,6 @@
           <a:bodyPr/>
           <a:lstStyle/>
           <a:p>
-            <a:r>
-              <a:rPr lang="en-US" dirty="0"/>
-              <a:t/>
-            </a:r>
             <a:endParaRPr lang="en-US" dirty="0"/>
           </a:p>
         </p:txBody>
@@ -850,10 +629,6 @@
           <a:bodyPr/>
           <a:lstStyle/>
           <a:p>
-            <a:r>
-              <a:rPr lang="en-US" dirty="0"/>
-              <a:t/>
-            </a:r>
             <a:endParaRPr lang="en-US" dirty="0"/>
           </a:p>
         </p:txBody>
@@ -938,10 +713,6 @@
           <a:bodyPr/>
           <a:lstStyle/>
           <a:p>
-            <a:r>
-              <a:rPr lang="en-US" dirty="0"/>
-              <a:t/>
-            </a:r>
             <a:endParaRPr lang="en-US" dirty="0"/>
           </a:p>
         </p:txBody>
@@ -1026,10 +797,6 @@
           <a:bodyPr/>
           <a:lstStyle/>
           <a:p>
-            <a:r>
-              <a:rPr lang="en-US" dirty="0"/>
-              <a:t/>
-            </a:r>
             <a:endParaRPr lang="en-US" dirty="0"/>
           </a:p>
         </p:txBody>
@@ -1114,10 +881,6 @@
           <a:bodyPr/>
           <a:lstStyle/>
           <a:p>
-            <a:r>
-              <a:rPr lang="en-US" dirty="0"/>
-              <a:t/>
-            </a:r>
             <a:endParaRPr lang="en-US" dirty="0"/>
           </a:p>
         </p:txBody>
@@ -1202,10 +965,6 @@
           <a:bodyPr/>
           <a:lstStyle/>
           <a:p>
-            <a:r>
-              <a:rPr lang="en-US" dirty="0"/>
-              <a:t/>
-            </a:r>
             <a:endParaRPr lang="en-US" dirty="0"/>
           </a:p>
         </p:txBody>
@@ -1290,10 +1049,6 @@
           <a:bodyPr/>
           <a:lstStyle/>
           <a:p>
-            <a:r>
-              <a:rPr lang="en-US" dirty="0"/>
-              <a:t/>
-            </a:r>
             <a:endParaRPr lang="en-US" dirty="0"/>
           </a:p>
         </p:txBody>
@@ -1378,10 +1133,6 @@
           <a:bodyPr/>
           <a:lstStyle/>
           <a:p>
-            <a:r>
-              <a:rPr lang="en-US" dirty="0"/>
-              <a:t/>
-            </a:r>
             <a:endParaRPr lang="en-US" dirty="0"/>
           </a:p>
         </p:txBody>
@@ -1466,10 +1217,6 @@
           <a:bodyPr/>
           <a:lstStyle/>
           <a:p>
-            <a:r>
-              <a:rPr lang="en-US" dirty="0"/>
-              <a:t/>
-            </a:r>
             <a:endParaRPr lang="en-US" dirty="0"/>
           </a:p>
         </p:txBody>
@@ -1554,10 +1301,6 @@
           <a:bodyPr/>
           <a:lstStyle/>
           <a:p>
-            <a:r>
-              <a:rPr lang="en-US" dirty="0"/>
-              <a:t/>
-            </a:r>
             <a:endParaRPr lang="en-US" dirty="0"/>
           </a:p>
         </p:txBody>
@@ -1642,10 +1385,6 @@
           <a:bodyPr/>
           <a:lstStyle/>
           <a:p>
-            <a:r>
-              <a:rPr lang="en-US" dirty="0"/>
-              <a:t/>
-            </a:r>
             <a:endParaRPr lang="en-US" dirty="0"/>
           </a:p>
         </p:txBody>
@@ -1719,6 +1458,11 @@
 <file path=ppt/slideMasters/slideMaster1.xml><?xml version="1.0" encoding="utf-8"?>
 <p:sldMaster xmlns:a="http://schemas.openxmlformats.org/drawingml/2006/main" xmlns:r="http://schemas.openxmlformats.org/officeDocument/2006/relationships" xmlns:p="http://schemas.openxmlformats.org/presentationml/2006/main">
   <p:cSld>
+    <p:bg>
+      <p:bgRef idx="1001">
+        <a:schemeClr val="bg1"/>
+      </p:bgRef>
+    </p:bg>
     <p:spTree>
       <p:nvGrpSpPr>
         <p:cNvPr id="1" name=""/>
@@ -2001,6 +1745,7 @@
         <a:solidFill>
           <a:srgbClr val="1A2744"/>
         </a:solidFill>
+        <a:effectLst/>
       </p:bgPr>
     </p:bg>
     <p:spTree>
@@ -2036,6 +1781,13 @@
           </a:solidFill>
           <a:ln/>
         </p:spPr>
+        <p:txBody>
+          <a:bodyPr/>
+          <a:lstStyle/>
+          <a:p>
+            <a:endParaRPr lang="ja-JP" altLang="en-US"/>
+          </a:p>
+        </p:txBody>
       </p:sp>
       <p:sp>
         <p:nvSpPr>
@@ -2058,7 +1810,7 @@
           <a:bodyPr wrap="square" rtlCol="0" anchor="ctr"/>
           <a:lstStyle/>
           <a:p>
-            <a:pPr indent="0" marL="0">
+            <a:pPr marL="0" indent="0">
               <a:lnSpc>
                 <a:spcPct val="120000"/>
               </a:lnSpc>
@@ -2078,7 +1830,7 @@
             <a:endParaRPr lang="en-US" sz="4000" dirty="0"/>
           </a:p>
           <a:p>
-            <a:pPr indent="0" marL="0">
+            <a:pPr marL="0" indent="0">
               <a:lnSpc>
                 <a:spcPct val="120000"/>
               </a:lnSpc>
@@ -2118,6 +1870,13 @@
           </a:solidFill>
           <a:ln/>
         </p:spPr>
+        <p:txBody>
+          <a:bodyPr/>
+          <a:lstStyle/>
+          <a:p>
+            <a:endParaRPr lang="ja-JP" altLang="en-US"/>
+          </a:p>
+        </p:txBody>
       </p:sp>
       <p:sp>
         <p:nvSpPr>
@@ -2140,7 +1899,7 @@
           <a:bodyPr wrap="square" rtlCol="0" anchor="ctr"/>
           <a:lstStyle/>
           <a:p>
-            <a:pPr indent="0" marL="0">
+            <a:pPr marL="0" indent="0">
               <a:buNone/>
             </a:pPr>
             <a:r>
@@ -2152,7 +1911,7 @@
                 <a:ea typeface="Georgia" pitchFamily="34" charset="-122"/>
                 <a:cs typeface="Georgia" pitchFamily="34" charset="-120"/>
               </a:rPr>
-              <a:t>精神論から、数字へ。</a:t>
+              <a:t>数字が見えれば、現場が変わる。</a:t>
             </a:r>
             <a:endParaRPr lang="en-US" sz="2800" dirty="0"/>
           </a:p>
@@ -2179,7 +1938,7 @@
           <a:bodyPr wrap="square" rtlCol="0" anchor="ctr"/>
           <a:lstStyle/>
           <a:p>
-            <a:pPr indent="0" marL="0">
+            <a:pPr marL="0" indent="0">
               <a:buNone/>
             </a:pPr>
             <a:r>
@@ -2213,6 +1972,7 @@
         <a:solidFill>
           <a:srgbClr val="F8FAFC"/>
         </a:solidFill>
+        <a:effectLst/>
       </p:bgPr>
     </p:bg>
     <p:spTree>
@@ -2250,7 +2010,7 @@
           <a:bodyPr wrap="square" lIns="0" tIns="0" rIns="0" bIns="0" rtlCol="0" anchor="ctr"/>
           <a:lstStyle/>
           <a:p>
-            <a:pPr indent="0" marL="0">
+            <a:pPr marL="0" indent="0">
               <a:buNone/>
             </a:pPr>
             <a:r>
@@ -2287,6 +2047,13 @@
           </a:solidFill>
           <a:ln/>
         </p:spPr>
+        <p:txBody>
+          <a:bodyPr/>
+          <a:lstStyle/>
+          <a:p>
+            <a:endParaRPr lang="ja-JP" altLang="en-US"/>
+          </a:p>
+        </p:txBody>
       </p:sp>
       <p:sp>
         <p:nvSpPr>
@@ -2307,13 +2074,20 @@
           </a:solidFill>
           <a:ln/>
           <a:effectLst>
-            <a:outerShdw sx="100000" sy="100000" kx="0" ky="0" algn="bl" rotWithShape="0" blurRad="101600" dist="25400" dir="8100000">
+            <a:outerShdw blurRad="101600" dist="25400" dir="8100000" algn="bl" rotWithShape="0">
               <a:srgbClr val="000000">
                 <a:alpha val="12000"/>
               </a:srgbClr>
             </a:outerShdw>
           </a:effectLst>
         </p:spPr>
+        <p:txBody>
+          <a:bodyPr/>
+          <a:lstStyle/>
+          <a:p>
+            <a:endParaRPr lang="ja-JP" altLang="en-US"/>
+          </a:p>
+        </p:txBody>
       </p:sp>
       <p:sp>
         <p:nvSpPr>
@@ -2334,6 +2108,13 @@
           </a:solidFill>
           <a:ln/>
         </p:spPr>
+        <p:txBody>
+          <a:bodyPr/>
+          <a:lstStyle/>
+          <a:p>
+            <a:endParaRPr lang="ja-JP" altLang="en-US"/>
+          </a:p>
+        </p:txBody>
       </p:sp>
       <p:sp>
         <p:nvSpPr>
@@ -2356,7 +2137,7 @@
           <a:bodyPr wrap="square" rtlCol="0" anchor="ctr"/>
           <a:lstStyle/>
           <a:p>
-            <a:pPr indent="0" marL="0">
+            <a:pPr marL="0" indent="0">
               <a:buNone/>
             </a:pPr>
             <a:r>
@@ -2457,6 +2238,17 @@
             </a:r>
             <a:endParaRPr lang="en-US" sz="1200" dirty="0"/>
           </a:p>
+          <a:p>
+            <a:r>
+              <a:rPr sz="1000" i="1">
+                <a:solidFill>
+                  <a:srgbClr val="F59E0B"/>
+                </a:solidFill>
+                <a:latin typeface="Calibri"/>
+              </a:rPr>
+              <a:t>例: 『金曜退院を20%削減したら？』『救急受入を月5件増やしたら？』</a:t>
+            </a:r>
+          </a:p>
         </p:txBody>
       </p:sp>
       <p:sp>
@@ -2478,13 +2270,20 @@
           </a:solidFill>
           <a:ln/>
           <a:effectLst>
-            <a:outerShdw sx="100000" sy="100000" kx="0" ky="0" algn="bl" rotWithShape="0" blurRad="101600" dist="25400" dir="8100000">
+            <a:outerShdw blurRad="101600" dist="25400" dir="8100000" algn="bl" rotWithShape="0">
               <a:srgbClr val="000000">
                 <a:alpha val="12000"/>
               </a:srgbClr>
             </a:outerShdw>
           </a:effectLst>
         </p:spPr>
+        <p:txBody>
+          <a:bodyPr/>
+          <a:lstStyle/>
+          <a:p>
+            <a:endParaRPr lang="ja-JP" altLang="en-US"/>
+          </a:p>
+        </p:txBody>
       </p:sp>
       <p:sp>
         <p:nvSpPr>
@@ -2505,6 +2304,13 @@
           </a:solidFill>
           <a:ln/>
         </p:spPr>
+        <p:txBody>
+          <a:bodyPr/>
+          <a:lstStyle/>
+          <a:p>
+            <a:endParaRPr lang="ja-JP" altLang="en-US"/>
+          </a:p>
+        </p:txBody>
       </p:sp>
       <p:sp>
         <p:nvSpPr>
@@ -2527,7 +2333,7 @@
           <a:bodyPr wrap="square" rtlCol="0" anchor="ctr"/>
           <a:lstStyle/>
           <a:p>
-            <a:pPr indent="0" marL="0">
+            <a:pPr marL="0" indent="0">
               <a:buNone/>
             </a:pPr>
             <a:r>
@@ -2628,6 +2434,17 @@
             </a:r>
             <a:endParaRPr lang="en-US" sz="1200" dirty="0"/>
           </a:p>
+          <a:p>
+            <a:r>
+              <a:rPr sz="1000" i="1">
+                <a:solidFill>
+                  <a:srgbClr val="F59E0B"/>
+                </a:solidFill>
+                <a:latin typeface="Calibri"/>
+              </a:rPr>
+              <a:t>例: 経営会議で『稼働率+1%プラン』を提案 → 根拠データ付きPDFを配布</a:t>
+            </a:r>
+          </a:p>
         </p:txBody>
       </p:sp>
       <p:sp>
@@ -2651,7 +2468,7 @@
           <a:bodyPr wrap="square" rtlCol="0" anchor="ctr"/>
           <a:lstStyle/>
           <a:p>
-            <a:pPr indent="0" marL="0">
+            <a:pPr marL="0" indent="0">
               <a:buNone/>
             </a:pPr>
             <a:r>
@@ -2688,13 +2505,20 @@
           </a:solidFill>
           <a:ln/>
           <a:effectLst>
-            <a:outerShdw sx="100000" sy="100000" kx="0" ky="0" algn="bl" rotWithShape="0" blurRad="101600" dist="25400" dir="8100000">
+            <a:outerShdw blurRad="101600" dist="25400" dir="8100000" algn="bl" rotWithShape="0">
               <a:srgbClr val="000000">
                 <a:alpha val="12000"/>
               </a:srgbClr>
             </a:outerShdw>
           </a:effectLst>
         </p:spPr>
+        <p:txBody>
+          <a:bodyPr/>
+          <a:lstStyle/>
+          <a:p>
+            <a:endParaRPr lang="ja-JP" altLang="en-US"/>
+          </a:p>
+        </p:txBody>
       </p:sp>
       <p:sp>
         <p:nvSpPr>
@@ -2715,6 +2539,13 @@
           </a:solidFill>
           <a:ln/>
         </p:spPr>
+        <p:txBody>
+          <a:bodyPr/>
+          <a:lstStyle/>
+          <a:p>
+            <a:endParaRPr lang="ja-JP" altLang="en-US"/>
+          </a:p>
+        </p:txBody>
       </p:sp>
       <p:sp>
         <p:nvSpPr>
@@ -2737,7 +2568,7 @@
           <a:bodyPr wrap="square" rtlCol="0" anchor="ctr"/>
           <a:lstStyle/>
           <a:p>
-            <a:pPr algn="ctr" indent="0" marL="0">
+            <a:pPr marL="0" indent="0" algn="ctr">
               <a:buNone/>
             </a:pPr>
             <a:r>
@@ -2776,7 +2607,7 @@
           <a:bodyPr wrap="square" rtlCol="0" anchor="ctr"/>
           <a:lstStyle/>
           <a:p>
-            <a:pPr algn="ctr" indent="0" marL="0">
+            <a:pPr marL="0" indent="0" algn="ctr">
               <a:lnSpc>
                 <a:spcPct val="130000"/>
               </a:lnSpc>
@@ -2796,7 +2627,7 @@
             <a:endParaRPr lang="en-US" sz="1100" dirty="0"/>
           </a:p>
           <a:p>
-            <a:pPr algn="ctr" indent="0" marL="0">
+            <a:pPr marL="0" indent="0" algn="ctr">
               <a:lnSpc>
                 <a:spcPct val="130000"/>
               </a:lnSpc>
@@ -2836,13 +2667,20 @@
           </a:solidFill>
           <a:ln/>
           <a:effectLst>
-            <a:outerShdw sx="100000" sy="100000" kx="0" ky="0" algn="bl" rotWithShape="0" blurRad="101600" dist="25400" dir="8100000">
+            <a:outerShdw blurRad="101600" dist="25400" dir="8100000" algn="bl" rotWithShape="0">
               <a:srgbClr val="000000">
                 <a:alpha val="12000"/>
               </a:srgbClr>
             </a:outerShdw>
           </a:effectLst>
         </p:spPr>
+        <p:txBody>
+          <a:bodyPr/>
+          <a:lstStyle/>
+          <a:p>
+            <a:endParaRPr lang="ja-JP" altLang="en-US"/>
+          </a:p>
+        </p:txBody>
       </p:sp>
       <p:sp>
         <p:nvSpPr>
@@ -2863,6 +2701,13 @@
           </a:solidFill>
           <a:ln/>
         </p:spPr>
+        <p:txBody>
+          <a:bodyPr/>
+          <a:lstStyle/>
+          <a:p>
+            <a:endParaRPr lang="ja-JP" altLang="en-US"/>
+          </a:p>
+        </p:txBody>
       </p:sp>
       <p:sp>
         <p:nvSpPr>
@@ -2885,7 +2730,7 @@
           <a:bodyPr wrap="square" rtlCol="0" anchor="ctr"/>
           <a:lstStyle/>
           <a:p>
-            <a:pPr algn="ctr" indent="0" marL="0">
+            <a:pPr marL="0" indent="0" algn="ctr">
               <a:buNone/>
             </a:pPr>
             <a:r>
@@ -2924,7 +2769,7 @@
           <a:bodyPr wrap="square" rtlCol="0" anchor="ctr"/>
           <a:lstStyle/>
           <a:p>
-            <a:pPr algn="ctr" indent="0" marL="0">
+            <a:pPr marL="0" indent="0" algn="ctr">
               <a:lnSpc>
                 <a:spcPct val="130000"/>
               </a:lnSpc>
@@ -2944,7 +2789,7 @@
             <a:endParaRPr lang="en-US" sz="1100" dirty="0"/>
           </a:p>
           <a:p>
-            <a:pPr algn="ctr" indent="0" marL="0">
+            <a:pPr marL="0" indent="0" algn="ctr">
               <a:lnSpc>
                 <a:spcPct val="130000"/>
               </a:lnSpc>
@@ -2984,13 +2829,20 @@
           </a:solidFill>
           <a:ln/>
           <a:effectLst>
-            <a:outerShdw sx="100000" sy="100000" kx="0" ky="0" algn="bl" rotWithShape="0" blurRad="101600" dist="25400" dir="8100000">
+            <a:outerShdw blurRad="101600" dist="25400" dir="8100000" algn="bl" rotWithShape="0">
               <a:srgbClr val="000000">
                 <a:alpha val="12000"/>
               </a:srgbClr>
             </a:outerShdw>
           </a:effectLst>
         </p:spPr>
+        <p:txBody>
+          <a:bodyPr/>
+          <a:lstStyle/>
+          <a:p>
+            <a:endParaRPr lang="ja-JP" altLang="en-US"/>
+          </a:p>
+        </p:txBody>
       </p:sp>
       <p:sp>
         <p:nvSpPr>
@@ -3011,6 +2863,13 @@
           </a:solidFill>
           <a:ln/>
         </p:spPr>
+        <p:txBody>
+          <a:bodyPr/>
+          <a:lstStyle/>
+          <a:p>
+            <a:endParaRPr lang="ja-JP" altLang="en-US"/>
+          </a:p>
+        </p:txBody>
       </p:sp>
       <p:sp>
         <p:nvSpPr>
@@ -3033,7 +2892,7 @@
           <a:bodyPr wrap="square" rtlCol="0" anchor="ctr"/>
           <a:lstStyle/>
           <a:p>
-            <a:pPr algn="ctr" indent="0" marL="0">
+            <a:pPr marL="0" indent="0" algn="ctr">
               <a:buNone/>
             </a:pPr>
             <a:r>
@@ -3072,7 +2931,7 @@
           <a:bodyPr wrap="square" rtlCol="0" anchor="ctr"/>
           <a:lstStyle/>
           <a:p>
-            <a:pPr algn="ctr" indent="0" marL="0">
+            <a:pPr marL="0" indent="0" algn="ctr">
               <a:lnSpc>
                 <a:spcPct val="130000"/>
               </a:lnSpc>
@@ -3092,7 +2951,7 @@
             <a:endParaRPr lang="en-US" sz="1100" dirty="0"/>
           </a:p>
           <a:p>
-            <a:pPr algn="ctr" indent="0" marL="0">
+            <a:pPr marL="0" indent="0" algn="ctr">
               <a:lnSpc>
                 <a:spcPct val="130000"/>
               </a:lnSpc>
@@ -3132,13 +2991,20 @@
           </a:solidFill>
           <a:ln/>
           <a:effectLst>
-            <a:outerShdw sx="100000" sy="100000" kx="0" ky="0" algn="bl" rotWithShape="0" blurRad="101600" dist="25400" dir="8100000">
+            <a:outerShdw blurRad="101600" dist="25400" dir="8100000" algn="bl" rotWithShape="0">
               <a:srgbClr val="000000">
                 <a:alpha val="12000"/>
               </a:srgbClr>
             </a:outerShdw>
           </a:effectLst>
         </p:spPr>
+        <p:txBody>
+          <a:bodyPr/>
+          <a:lstStyle/>
+          <a:p>
+            <a:endParaRPr lang="ja-JP" altLang="en-US"/>
+          </a:p>
+        </p:txBody>
       </p:sp>
       <p:sp>
         <p:nvSpPr>
@@ -3159,6 +3025,13 @@
           </a:solidFill>
           <a:ln/>
         </p:spPr>
+        <p:txBody>
+          <a:bodyPr/>
+          <a:lstStyle/>
+          <a:p>
+            <a:endParaRPr lang="ja-JP" altLang="en-US"/>
+          </a:p>
+        </p:txBody>
       </p:sp>
       <p:sp>
         <p:nvSpPr>
@@ -3181,7 +3054,7 @@
           <a:bodyPr wrap="square" rtlCol="0" anchor="ctr"/>
           <a:lstStyle/>
           <a:p>
-            <a:pPr algn="ctr" indent="0" marL="0">
+            <a:pPr marL="0" indent="0" algn="ctr">
               <a:buNone/>
             </a:pPr>
             <a:r>
@@ -3220,7 +3093,7 @@
           <a:bodyPr wrap="square" rtlCol="0" anchor="ctr"/>
           <a:lstStyle/>
           <a:p>
-            <a:pPr algn="ctr" indent="0" marL="0">
+            <a:pPr marL="0" indent="0" algn="ctr">
               <a:lnSpc>
                 <a:spcPct val="130000"/>
               </a:lnSpc>
@@ -3240,7 +3113,7 @@
             <a:endParaRPr lang="en-US" sz="1100" dirty="0"/>
           </a:p>
           <a:p>
-            <a:pPr algn="ctr" indent="0" marL="0">
+            <a:pPr marL="0" indent="0" algn="ctr">
               <a:lnSpc>
                 <a:spcPct val="130000"/>
               </a:lnSpc>
@@ -3277,6 +3150,7 @@
         <a:solidFill>
           <a:srgbClr val="1A2744"/>
         </a:solidFill>
+        <a:effectLst/>
       </p:bgPr>
     </p:bg>
     <p:spTree>
@@ -3312,6 +3186,13 @@
           </a:solidFill>
           <a:ln/>
         </p:spPr>
+        <p:txBody>
+          <a:bodyPr/>
+          <a:lstStyle/>
+          <a:p>
+            <a:endParaRPr lang="ja-JP" altLang="en-US"/>
+          </a:p>
+        </p:txBody>
       </p:sp>
       <p:sp>
         <p:nvSpPr>
@@ -3334,7 +3215,7 @@
           <a:bodyPr wrap="square" rtlCol="0" anchor="ctr"/>
           <a:lstStyle/>
           <a:p>
-            <a:pPr indent="0" marL="0">
+            <a:pPr marL="0" indent="0">
               <a:buNone/>
             </a:pPr>
             <a:r>
@@ -3346,7 +3227,7 @@
                 <a:ea typeface="Arial Black" pitchFamily="34" charset="-122"/>
                 <a:cs typeface="Arial Black" pitchFamily="34" charset="-120"/>
               </a:rPr>
-              <a:t>精神論を、数字に変える。</a:t>
+              <a:t>数字が見えれば、現場が変わる。</a:t>
             </a:r>
             <a:endParaRPr lang="en-US" sz="3600" dirty="0"/>
           </a:p>
@@ -3360,7 +3241,7 @@
         </p:nvSpPr>
         <p:spPr>
           <a:xfrm>
-            <a:off x="731520" y="1463040"/>
+            <a:off x="731520" y="1213040"/>
             <a:ext cx="7680960" cy="548640"/>
           </a:xfrm>
           <a:prstGeom prst="rect">
@@ -3373,7 +3254,7 @@
           <a:bodyPr wrap="square" rtlCol="0" anchor="ctr"/>
           <a:lstStyle/>
           <a:p>
-            <a:pPr indent="0" marL="0">
+            <a:pPr marL="0" indent="0">
               <a:buNone/>
             </a:pPr>
             <a:r>
@@ -3399,7 +3280,7 @@
         </p:nvSpPr>
         <p:spPr>
           <a:xfrm>
-            <a:off x="731520" y="2286000"/>
+            <a:off x="731520" y="2036000"/>
             <a:ext cx="109728" cy="109728"/>
           </a:xfrm>
           <a:prstGeom prst="rect">
@@ -3410,6 +3291,13 @@
           </a:solidFill>
           <a:ln/>
         </p:spPr>
+        <p:txBody>
+          <a:bodyPr/>
+          <a:lstStyle/>
+          <a:p>
+            <a:endParaRPr lang="ja-JP" altLang="en-US"/>
+          </a:p>
+        </p:txBody>
       </p:sp>
       <p:sp>
         <p:nvSpPr>
@@ -3419,7 +3307,7 @@
         </p:nvSpPr>
         <p:spPr>
           <a:xfrm>
-            <a:off x="1051560" y="2194560"/>
+            <a:off x="1051560" y="1944560"/>
             <a:ext cx="6858000" cy="411480"/>
           </a:xfrm>
           <a:prstGeom prst="rect">
@@ -3432,7 +3320,7 @@
           <a:bodyPr wrap="square" rtlCol="0" anchor="ctr"/>
           <a:lstStyle/>
           <a:p>
-            <a:pPr indent="0" marL="0">
+            <a:pPr marL="0" indent="0">
               <a:buNone/>
             </a:pPr>
             <a:r>
@@ -3458,7 +3346,7 @@
         </p:nvSpPr>
         <p:spPr>
           <a:xfrm>
-            <a:off x="731520" y="2788920"/>
+            <a:off x="731520" y="2538920"/>
             <a:ext cx="109728" cy="109728"/>
           </a:xfrm>
           <a:prstGeom prst="rect">
@@ -3469,6 +3357,13 @@
           </a:solidFill>
           <a:ln/>
         </p:spPr>
+        <p:txBody>
+          <a:bodyPr/>
+          <a:lstStyle/>
+          <a:p>
+            <a:endParaRPr lang="ja-JP" altLang="en-US"/>
+          </a:p>
+        </p:txBody>
       </p:sp>
       <p:sp>
         <p:nvSpPr>
@@ -3478,7 +3373,7 @@
         </p:nvSpPr>
         <p:spPr>
           <a:xfrm>
-            <a:off x="1051560" y="2697480"/>
+            <a:off x="1051560" y="2447480"/>
             <a:ext cx="6858000" cy="411480"/>
           </a:xfrm>
           <a:prstGeom prst="rect">
@@ -3491,7 +3386,7 @@
           <a:bodyPr wrap="square" rtlCol="0" anchor="ctr"/>
           <a:lstStyle/>
           <a:p>
-            <a:pPr indent="0" marL="0">
+            <a:pPr marL="0" indent="0">
               <a:buNone/>
             </a:pPr>
             <a:r>
@@ -3517,7 +3412,7 @@
         </p:nvSpPr>
         <p:spPr>
           <a:xfrm>
-            <a:off x="731520" y="3291840"/>
+            <a:off x="731520" y="3041840"/>
             <a:ext cx="109728" cy="109728"/>
           </a:xfrm>
           <a:prstGeom prst="rect">
@@ -3528,6 +3423,13 @@
           </a:solidFill>
           <a:ln/>
         </p:spPr>
+        <p:txBody>
+          <a:bodyPr/>
+          <a:lstStyle/>
+          <a:p>
+            <a:endParaRPr lang="ja-JP" altLang="en-US"/>
+          </a:p>
+        </p:txBody>
       </p:sp>
       <p:sp>
         <p:nvSpPr>
@@ -3537,7 +3439,7 @@
         </p:nvSpPr>
         <p:spPr>
           <a:xfrm>
-            <a:off x="1051560" y="3200400"/>
+            <a:off x="1051560" y="2950400"/>
             <a:ext cx="6858000" cy="411480"/>
           </a:xfrm>
           <a:prstGeom prst="rect">
@@ -3550,7 +3452,7 @@
           <a:bodyPr wrap="square" rtlCol="0" anchor="ctr"/>
           <a:lstStyle/>
           <a:p>
-            <a:pPr indent="0" marL="0">
+            <a:pPr marL="0" indent="0">
               <a:buNone/>
             </a:pPr>
             <a:r>
@@ -3576,7 +3478,7 @@
         </p:nvSpPr>
         <p:spPr>
           <a:xfrm>
-            <a:off x="731520" y="3794760"/>
+            <a:off x="731520" y="3544760"/>
             <a:ext cx="109728" cy="109728"/>
           </a:xfrm>
           <a:prstGeom prst="rect">
@@ -3587,6 +3489,13 @@
           </a:solidFill>
           <a:ln/>
         </p:spPr>
+        <p:txBody>
+          <a:bodyPr/>
+          <a:lstStyle/>
+          <a:p>
+            <a:endParaRPr lang="ja-JP" altLang="en-US"/>
+          </a:p>
+        </p:txBody>
       </p:sp>
       <p:sp>
         <p:nvSpPr>
@@ -3596,7 +3505,7 @@
         </p:nvSpPr>
         <p:spPr>
           <a:xfrm>
-            <a:off x="1051560" y="3703320"/>
+            <a:off x="1051560" y="3453320"/>
             <a:ext cx="6858000" cy="411480"/>
           </a:xfrm>
           <a:prstGeom prst="rect">
@@ -3609,7 +3518,7 @@
           <a:bodyPr wrap="square" rtlCol="0" anchor="ctr"/>
           <a:lstStyle/>
           <a:p>
-            <a:pPr indent="0" marL="0">
+            <a:pPr marL="0" indent="0">
               <a:buNone/>
             </a:pPr>
             <a:r>
@@ -3635,7 +3544,7 @@
         </p:nvSpPr>
         <p:spPr>
           <a:xfrm>
-            <a:off x="731520" y="4297680"/>
+            <a:off x="731520" y="4047680"/>
             <a:ext cx="109728" cy="109728"/>
           </a:xfrm>
           <a:prstGeom prst="rect">
@@ -3646,6 +3555,13 @@
           </a:solidFill>
           <a:ln/>
         </p:spPr>
+        <p:txBody>
+          <a:bodyPr/>
+          <a:lstStyle/>
+          <a:p>
+            <a:endParaRPr lang="ja-JP" altLang="en-US"/>
+          </a:p>
+        </p:txBody>
       </p:sp>
       <p:sp>
         <p:nvSpPr>
@@ -3655,7 +3571,7 @@
         </p:nvSpPr>
         <p:spPr>
           <a:xfrm>
-            <a:off x="1051560" y="4206240"/>
+            <a:off x="1051560" y="3956240"/>
             <a:ext cx="6858000" cy="411480"/>
           </a:xfrm>
           <a:prstGeom prst="rect">
@@ -3668,7 +3584,7 @@
           <a:bodyPr wrap="square" rtlCol="0" anchor="ctr"/>
           <a:lstStyle/>
           <a:p>
-            <a:pPr indent="0" marL="0">
+            <a:pPr marL="0" indent="0">
               <a:buNone/>
             </a:pPr>
             <a:r>
@@ -3705,6 +3621,13 @@
           </a:solidFill>
           <a:ln/>
         </p:spPr>
+        <p:txBody>
+          <a:bodyPr/>
+          <a:lstStyle/>
+          <a:p>
+            <a:endParaRPr lang="ja-JP" altLang="en-US"/>
+          </a:p>
+        </p:txBody>
       </p:sp>
       <p:sp>
         <p:nvSpPr>
@@ -3727,7 +3650,7 @@
           <a:bodyPr wrap="square" rtlCol="0" anchor="ctr"/>
           <a:lstStyle/>
           <a:p>
-            <a:pPr indent="0" marL="0">
+            <a:pPr marL="0" indent="0">
               <a:buNone/>
             </a:pPr>
             <a:r>
@@ -3761,6 +3684,7 @@
         <a:solidFill>
           <a:srgbClr val="F8FAFC"/>
         </a:solidFill>
+        <a:effectLst/>
       </p:bgPr>
     </p:bg>
     <p:spTree>
@@ -3798,7 +3722,7 @@
           <a:bodyPr wrap="square" lIns="0" tIns="0" rIns="0" bIns="0" rtlCol="0" anchor="ctr"/>
           <a:lstStyle/>
           <a:p>
-            <a:pPr indent="0" marL="0">
+            <a:pPr marL="0" indent="0">
               <a:buNone/>
             </a:pPr>
             <a:r>
@@ -3810,7 +3734,7 @@
                 <a:ea typeface="Arial Black" pitchFamily="34" charset="-122"/>
                 <a:cs typeface="Arial Black" pitchFamily="34" charset="-120"/>
               </a:rPr>
-              <a:t>現状の課題</a:t>
+              <a:t>なぜ今、見える化なのか</a:t>
             </a:r>
             <a:endParaRPr lang="en-US" sz="3200" dirty="0"/>
           </a:p>
@@ -3835,6 +3759,13 @@
           </a:solidFill>
           <a:ln/>
         </p:spPr>
+        <p:txBody>
+          <a:bodyPr/>
+          <a:lstStyle/>
+          <a:p>
+            <a:endParaRPr lang="ja-JP" altLang="en-US"/>
+          </a:p>
+        </p:txBody>
       </p:sp>
       <p:sp>
         <p:nvSpPr>
@@ -3855,13 +3786,20 @@
           </a:solidFill>
           <a:ln/>
           <a:effectLst>
-            <a:outerShdw sx="100000" sy="100000" kx="0" ky="0" algn="bl" rotWithShape="0" blurRad="101600" dist="25400" dir="8100000">
+            <a:outerShdw blurRad="101600" dist="25400" dir="8100000" algn="bl" rotWithShape="0">
               <a:srgbClr val="000000">
                 <a:alpha val="12000"/>
               </a:srgbClr>
             </a:outerShdw>
           </a:effectLst>
         </p:spPr>
+        <p:txBody>
+          <a:bodyPr/>
+          <a:lstStyle/>
+          <a:p>
+            <a:endParaRPr lang="ja-JP" altLang="en-US"/>
+          </a:p>
+        </p:txBody>
       </p:sp>
       <p:sp>
         <p:nvSpPr>
@@ -3882,6 +3820,13 @@
           </a:solidFill>
           <a:ln/>
         </p:spPr>
+        <p:txBody>
+          <a:bodyPr/>
+          <a:lstStyle/>
+          <a:p>
+            <a:endParaRPr lang="ja-JP" altLang="en-US"/>
+          </a:p>
+        </p:txBody>
       </p:sp>
       <p:sp>
         <p:nvSpPr>
@@ -3904,7 +3849,7 @@
           <a:bodyPr wrap="square" rtlCol="0" anchor="ctr"/>
           <a:lstStyle/>
           <a:p>
-            <a:pPr indent="0" marL="0">
+            <a:pPr marL="0" indent="0">
               <a:buNone/>
             </a:pPr>
             <a:r>
@@ -3916,7 +3861,7 @@
                 <a:ea typeface="Calibri" pitchFamily="34" charset="-122"/>
                 <a:cs typeface="Calibri" pitchFamily="34" charset="-120"/>
               </a:rPr>
-              <a:t>精神論の限界</a:t>
+              <a:t>数値が見えなかった</a:t>
             </a:r>
             <a:endParaRPr lang="en-US" sz="1800" dirty="0"/>
           </a:p>
@@ -3943,7 +3888,7 @@
           <a:bodyPr wrap="square" rtlCol="0" anchor="ctr"/>
           <a:lstStyle/>
           <a:p>
-            <a:pPr indent="0" marL="0">
+            <a:pPr marL="0" indent="0">
               <a:lnSpc>
                 <a:spcPct val="140000"/>
               </a:lnSpc>
@@ -3958,12 +3903,12 @@
                 <a:ea typeface="Calibri" pitchFamily="34" charset="-122"/>
                 <a:cs typeface="Calibri" pitchFamily="34" charset="-120"/>
               </a:rPr>
-              <a:t>「稼働率を上げよう！」</a:t>
+              <a:t>稼働率の目標はあっても、</a:t>
             </a:r>
             <a:endParaRPr lang="en-US" sz="1300" dirty="0"/>
           </a:p>
           <a:p>
-            <a:pPr indent="0" marL="0">
+            <a:pPr marL="0" indent="0">
               <a:lnSpc>
                 <a:spcPct val="140000"/>
               </a:lnSpc>
@@ -3978,12 +3923,12 @@
                 <a:ea typeface="Calibri" pitchFamily="34" charset="-122"/>
                 <a:cs typeface="Calibri" pitchFamily="34" charset="-120"/>
               </a:rPr>
-              <a:t>という掛け声だけ。</a:t>
+              <a:t>リアルタイムの数値を</a:t>
             </a:r>
             <a:endParaRPr lang="en-US" sz="1300" dirty="0"/>
           </a:p>
           <a:p>
-            <a:pPr indent="0" marL="0">
+            <a:pPr marL="0" indent="0">
               <a:lnSpc>
                 <a:spcPct val="140000"/>
               </a:lnSpc>
@@ -3992,7 +3937,7 @@
             <a:endParaRPr lang="en-US" sz="1300" dirty="0"/>
           </a:p>
           <a:p>
-            <a:pPr indent="0" marL="0">
+            <a:pPr marL="0" indent="0">
               <a:lnSpc>
                 <a:spcPct val="140000"/>
               </a:lnSpc>
@@ -4007,12 +3952,12 @@
                 <a:ea typeface="Calibri" pitchFamily="34" charset="-122"/>
                 <a:cs typeface="Calibri" pitchFamily="34" charset="-120"/>
               </a:rPr>
-              <a:t>具体的な数値目標も</a:t>
+              <a:t>確認する手段が</a:t>
             </a:r>
             <a:endParaRPr lang="en-US" sz="1300" dirty="0"/>
           </a:p>
           <a:p>
-            <a:pPr indent="0" marL="0">
+            <a:pPr marL="0" indent="0">
               <a:lnSpc>
                 <a:spcPct val="140000"/>
               </a:lnSpc>
@@ -4027,7 +3972,7 @@
                 <a:ea typeface="Calibri" pitchFamily="34" charset="-122"/>
                 <a:cs typeface="Calibri" pitchFamily="34" charset="-120"/>
               </a:rPr>
-              <a:t>改善策もなし。</a:t>
+              <a:t>なかった。</a:t>
             </a:r>
             <a:endParaRPr lang="en-US" sz="1300" dirty="0"/>
           </a:p>
@@ -4052,13 +3997,20 @@
           </a:solidFill>
           <a:ln/>
           <a:effectLst>
-            <a:outerShdw sx="100000" sy="100000" kx="0" ky="0" algn="bl" rotWithShape="0" blurRad="101600" dist="25400" dir="8100000">
+            <a:outerShdw blurRad="101600" dist="25400" dir="8100000" algn="bl" rotWithShape="0">
               <a:srgbClr val="000000">
                 <a:alpha val="12000"/>
               </a:srgbClr>
             </a:outerShdw>
           </a:effectLst>
         </p:spPr>
+        <p:txBody>
+          <a:bodyPr/>
+          <a:lstStyle/>
+          <a:p>
+            <a:endParaRPr lang="ja-JP" altLang="en-US"/>
+          </a:p>
+        </p:txBody>
       </p:sp>
       <p:sp>
         <p:nvSpPr>
@@ -4079,6 +4031,13 @@
           </a:solidFill>
           <a:ln/>
         </p:spPr>
+        <p:txBody>
+          <a:bodyPr/>
+          <a:lstStyle/>
+          <a:p>
+            <a:endParaRPr lang="ja-JP" altLang="en-US"/>
+          </a:p>
+        </p:txBody>
       </p:sp>
       <p:sp>
         <p:nvSpPr>
@@ -4101,7 +4060,7 @@
           <a:bodyPr wrap="square" rtlCol="0" anchor="ctr"/>
           <a:lstStyle/>
           <a:p>
-            <a:pPr indent="0" marL="0">
+            <a:pPr marL="0" indent="0">
               <a:buNone/>
             </a:pPr>
             <a:r>
@@ -4113,7 +4072,7 @@
                 <a:ea typeface="Calibri" pitchFamily="34" charset="-122"/>
                 <a:cs typeface="Calibri" pitchFamily="34" charset="-120"/>
               </a:rPr>
-              <a:t>価値が不透明</a:t>
+              <a:t>金額換算できなかった</a:t>
             </a:r>
             <a:endParaRPr lang="en-US" sz="1800" dirty="0"/>
           </a:p>
@@ -4140,7 +4099,7 @@
           <a:bodyPr wrap="square" rtlCol="0" anchor="ctr"/>
           <a:lstStyle/>
           <a:p>
-            <a:pPr indent="0" marL="0">
+            <a:pPr marL="0" indent="0">
               <a:lnSpc>
                 <a:spcPct val="140000"/>
               </a:lnSpc>
@@ -4160,7 +4119,7 @@
             <a:endParaRPr lang="en-US" sz="1300" dirty="0"/>
           </a:p>
           <a:p>
-            <a:pPr indent="0" marL="0">
+            <a:pPr marL="0" indent="0">
               <a:lnSpc>
                 <a:spcPct val="140000"/>
               </a:lnSpc>
@@ -4175,12 +4134,12 @@
                 <a:ea typeface="Calibri" pitchFamily="34" charset="-122"/>
                 <a:cs typeface="Calibri" pitchFamily="34" charset="-120"/>
               </a:rPr>
-              <a:t>経営陣含め誰も</a:t>
+              <a:t>金額に換算する</a:t>
             </a:r>
             <a:endParaRPr lang="en-US" sz="1300" dirty="0"/>
           </a:p>
           <a:p>
-            <a:pPr indent="0" marL="0">
+            <a:pPr marL="0" indent="0">
               <a:lnSpc>
                 <a:spcPct val="140000"/>
               </a:lnSpc>
@@ -4195,12 +4154,12 @@
                 <a:ea typeface="Calibri" pitchFamily="34" charset="-122"/>
                 <a:cs typeface="Calibri" pitchFamily="34" charset="-120"/>
               </a:rPr>
-              <a:t>具体的に知らない。</a:t>
+              <a:t>仕組みがなかった。</a:t>
             </a:r>
             <a:endParaRPr lang="en-US" sz="1300" dirty="0"/>
           </a:p>
           <a:p>
-            <a:pPr indent="0" marL="0">
+            <a:pPr marL="0" indent="0">
               <a:lnSpc>
                 <a:spcPct val="140000"/>
               </a:lnSpc>
@@ -4209,7 +4168,7 @@
             <a:endParaRPr lang="en-US" sz="1300" dirty="0"/>
           </a:p>
           <a:p>
-            <a:pPr indent="0" marL="0">
+            <a:pPr marL="0" indent="0">
               <a:lnSpc>
                 <a:spcPct val="140000"/>
               </a:lnSpc>
@@ -4224,12 +4183,12 @@
                 <a:ea typeface="Calibri" pitchFamily="34" charset="-122"/>
                 <a:cs typeface="Calibri" pitchFamily="34" charset="-120"/>
               </a:rPr>
-              <a:t>運営会議で話題に</a:t>
+              <a:t>見えないものは</a:t>
             </a:r>
             <a:endParaRPr lang="en-US" sz="1300" dirty="0"/>
           </a:p>
           <a:p>
-            <a:pPr indent="0" marL="0">
+            <a:pPr marL="0" indent="0">
               <a:lnSpc>
                 <a:spcPct val="140000"/>
               </a:lnSpc>
@@ -4244,7 +4203,7 @@
                 <a:ea typeface="Calibri" pitchFamily="34" charset="-122"/>
                 <a:cs typeface="Calibri" pitchFamily="34" charset="-120"/>
               </a:rPr>
-              <a:t>なったことがない。</a:t>
+              <a:t>議論しようがない。</a:t>
             </a:r>
             <a:endParaRPr lang="en-US" sz="1300" dirty="0"/>
           </a:p>
@@ -4269,13 +4228,20 @@
           </a:solidFill>
           <a:ln/>
           <a:effectLst>
-            <a:outerShdw sx="100000" sy="100000" kx="0" ky="0" algn="bl" rotWithShape="0" blurRad="101600" dist="25400" dir="8100000">
+            <a:outerShdw blurRad="101600" dist="25400" dir="8100000" algn="bl" rotWithShape="0">
               <a:srgbClr val="000000">
                 <a:alpha val="12000"/>
               </a:srgbClr>
             </a:outerShdw>
           </a:effectLst>
         </p:spPr>
+        <p:txBody>
+          <a:bodyPr/>
+          <a:lstStyle/>
+          <a:p>
+            <a:endParaRPr lang="ja-JP" altLang="en-US"/>
+          </a:p>
+        </p:txBody>
       </p:sp>
       <p:sp>
         <p:nvSpPr>
@@ -4296,6 +4262,13 @@
           </a:solidFill>
           <a:ln/>
         </p:spPr>
+        <p:txBody>
+          <a:bodyPr/>
+          <a:lstStyle/>
+          <a:p>
+            <a:endParaRPr lang="ja-JP" altLang="en-US"/>
+          </a:p>
+        </p:txBody>
       </p:sp>
       <p:sp>
         <p:nvSpPr>
@@ -4318,7 +4291,7 @@
           <a:bodyPr wrap="square" rtlCol="0" anchor="ctr"/>
           <a:lstStyle/>
           <a:p>
-            <a:pPr indent="0" marL="0">
+            <a:pPr marL="0" indent="0">
               <a:buNone/>
             </a:pPr>
             <a:r>
@@ -4330,7 +4303,7 @@
                 <a:ea typeface="Calibri" pitchFamily="34" charset="-122"/>
                 <a:cs typeface="Calibri" pitchFamily="34" charset="-120"/>
               </a:rPr>
-              <a:t>行動が見えない</a:t>
+              <a:t>パターンが見えなかった</a:t>
             </a:r>
             <a:endParaRPr lang="en-US" sz="1800" dirty="0"/>
           </a:p>
@@ -4357,7 +4330,7 @@
           <a:bodyPr wrap="square" rtlCol="0" anchor="ctr"/>
           <a:lstStyle/>
           <a:p>
-            <a:pPr indent="0" marL="0">
+            <a:pPr marL="0" indent="0">
               <a:lnSpc>
                 <a:spcPct val="140000"/>
               </a:lnSpc>
@@ -4372,12 +4345,12 @@
                 <a:ea typeface="Calibri" pitchFamily="34" charset="-122"/>
                 <a:cs typeface="Calibri" pitchFamily="34" charset="-120"/>
               </a:rPr>
-              <a:t>医師別の入退院パターン、</a:t>
+              <a:t>入退院の曜日偏在、</a:t>
             </a:r>
             <a:endParaRPr lang="en-US" sz="1300" dirty="0"/>
           </a:p>
           <a:p>
-            <a:pPr indent="0" marL="0">
+            <a:pPr marL="0" indent="0">
               <a:lnSpc>
                 <a:spcPct val="140000"/>
               </a:lnSpc>
@@ -4392,12 +4365,12 @@
                 <a:ea typeface="Calibri" pitchFamily="34" charset="-122"/>
                 <a:cs typeface="Calibri" pitchFamily="34" charset="-120"/>
               </a:rPr>
-              <a:t>入院創出の貢献、</a:t>
+              <a:t>医師別のパターン——</a:t>
             </a:r>
             <a:endParaRPr lang="en-US" sz="1300" dirty="0"/>
           </a:p>
           <a:p>
-            <a:pPr indent="0" marL="0">
+            <a:pPr marL="0" indent="0">
               <a:lnSpc>
                 <a:spcPct val="140000"/>
               </a:lnSpc>
@@ -4412,12 +4385,12 @@
                 <a:ea typeface="Calibri" pitchFamily="34" charset="-122"/>
                 <a:cs typeface="Calibri" pitchFamily="34" charset="-120"/>
               </a:rPr>
-              <a:t>退院曜日の偏在——</a:t>
+              <a:t>感覚ではわかっていても</a:t>
             </a:r>
             <a:endParaRPr lang="en-US" sz="1300" dirty="0"/>
           </a:p>
           <a:p>
-            <a:pPr indent="0" marL="0">
+            <a:pPr marL="0" indent="0">
               <a:lnSpc>
                 <a:spcPct val="140000"/>
               </a:lnSpc>
@@ -4426,7 +4399,7 @@
             <a:endParaRPr lang="en-US" sz="1300" dirty="0"/>
           </a:p>
           <a:p>
-            <a:pPr indent="0" marL="0">
+            <a:pPr marL="0" indent="0">
               <a:lnSpc>
                 <a:spcPct val="140000"/>
               </a:lnSpc>
@@ -4441,12 +4414,12 @@
                 <a:ea typeface="Calibri" pitchFamily="34" charset="-122"/>
                 <a:cs typeface="Calibri" pitchFamily="34" charset="-120"/>
               </a:rPr>
-              <a:t>誰でも気づいているが</a:t>
+              <a:t>データとして</a:t>
             </a:r>
             <a:endParaRPr lang="en-US" sz="1300" dirty="0"/>
           </a:p>
           <a:p>
-            <a:pPr indent="0" marL="0">
+            <a:pPr marL="0" indent="0">
               <a:lnSpc>
                 <a:spcPct val="140000"/>
               </a:lnSpc>
@@ -4461,7 +4434,7 @@
                 <a:ea typeface="Calibri" pitchFamily="34" charset="-122"/>
                 <a:cs typeface="Calibri" pitchFamily="34" charset="-120"/>
               </a:rPr>
-              <a:t>データで示せない。</a:t>
+              <a:t>共有できなかった。</a:t>
             </a:r>
             <a:endParaRPr lang="en-US" sz="1300" dirty="0"/>
           </a:p>
@@ -4488,7 +4461,7 @@
           <a:bodyPr wrap="square" rtlCol="0" anchor="ctr"/>
           <a:lstStyle/>
           <a:p>
-            <a:pPr indent="0" marL="0">
+            <a:pPr marL="0" indent="0">
               <a:buNone/>
             </a:pPr>
             <a:r>
@@ -4500,7 +4473,7 @@
                 <a:ea typeface="Georgia" pitchFamily="34" charset="-122"/>
                 <a:cs typeface="Georgia" pitchFamily="34" charset="-120"/>
               </a:rPr>
-              <a:t>「この病院はおかしい」—— そう言われないために、数字で語る仕組みが必要。</a:t>
+              <a:t>今、データで見える仕組みが整った。ここから、数字で語る経営が始まる。</a:t>
             </a:r>
             <a:endParaRPr lang="en-US" sz="1400" dirty="0"/>
           </a:p>
@@ -4522,6 +4495,7 @@
         <a:solidFill>
           <a:srgbClr val="1A2744"/>
         </a:solidFill>
+        <a:effectLst/>
       </p:bgPr>
     </p:bg>
     <p:spTree>
@@ -4559,7 +4533,7 @@
           <a:bodyPr wrap="square" lIns="0" tIns="0" rIns="0" bIns="0" rtlCol="0" anchor="ctr"/>
           <a:lstStyle/>
           <a:p>
-            <a:pPr indent="0" marL="0">
+            <a:pPr marL="0" indent="0">
               <a:buNone/>
             </a:pPr>
             <a:r>
@@ -4596,6 +4570,13 @@
           </a:solidFill>
           <a:ln/>
         </p:spPr>
+        <p:txBody>
+          <a:bodyPr/>
+          <a:lstStyle/>
+          <a:p>
+            <a:endParaRPr lang="ja-JP" altLang="en-US"/>
+          </a:p>
+        </p:txBody>
       </p:sp>
       <p:sp>
         <p:nvSpPr>
@@ -4618,7 +4599,7 @@
           <a:bodyPr wrap="square" rtlCol="0" anchor="ctr"/>
           <a:lstStyle/>
           <a:p>
-            <a:pPr algn="ctr" indent="0" marL="0">
+            <a:pPr marL="0" indent="0" algn="ctr">
               <a:buNone/>
             </a:pPr>
             <a:r>
@@ -4657,7 +4638,7 @@
           <a:bodyPr wrap="square" rtlCol="0" anchor="ctr"/>
           <a:lstStyle/>
           <a:p>
-            <a:pPr algn="ctr" indent="0" marL="0">
+            <a:pPr marL="0" indent="0" algn="ctr">
               <a:buNone/>
             </a:pPr>
             <a:r>
@@ -4696,7 +4677,7 @@
           <a:bodyPr wrap="square" rtlCol="0" anchor="ctr"/>
           <a:lstStyle/>
           <a:p>
-            <a:pPr algn="ctr" indent="0" marL="0">
+            <a:pPr marL="0" indent="0" algn="ctr">
               <a:buNone/>
             </a:pPr>
             <a:r>
@@ -4735,7 +4716,7 @@
           <a:bodyPr wrap="square" rtlCol="0" anchor="ctr"/>
           <a:lstStyle/>
           <a:p>
-            <a:pPr algn="ctr" indent="0" marL="0">
+            <a:pPr marL="0" indent="0" algn="ctr">
               <a:buNone/>
             </a:pPr>
             <a:r>
@@ -4774,7 +4755,7 @@
           <a:bodyPr wrap="square" rtlCol="0" anchor="ctr"/>
           <a:lstStyle/>
           <a:p>
-            <a:pPr algn="ctr" indent="0" marL="0">
+            <a:pPr marL="0" indent="0" algn="ctr">
               <a:buNone/>
             </a:pPr>
             <a:r>
@@ -4813,7 +4794,7 @@
           <a:bodyPr wrap="square" rtlCol="0" anchor="ctr"/>
           <a:lstStyle/>
           <a:p>
-            <a:pPr algn="ctr" indent="0" marL="0">
+            <a:pPr marL="0" indent="0" algn="ctr">
               <a:buNone/>
             </a:pPr>
             <a:r>
@@ -4852,7 +4833,7 @@
           <a:bodyPr wrap="square" rtlCol="0" anchor="ctr"/>
           <a:lstStyle/>
           <a:p>
-            <a:pPr algn="ctr" indent="0" marL="0">
+            <a:pPr marL="0" indent="0" algn="ctr">
               <a:buNone/>
             </a:pPr>
             <a:r>
@@ -4891,7 +4872,7 @@
           <a:bodyPr wrap="square" rtlCol="0" anchor="ctr"/>
           <a:lstStyle/>
           <a:p>
-            <a:pPr algn="ctr" indent="0" marL="0">
+            <a:pPr marL="0" indent="0" algn="ctr">
               <a:buNone/>
             </a:pPr>
             <a:r>
@@ -4918,19 +4899,19 @@
         <p:spPr>
           <a:xfrm>
             <a:off x="5943600" y="1280160"/>
-            <a:ext cx="1828800" cy="731520"/>
-          </a:xfrm>
-          <a:prstGeom prst="rect">
-            <a:avLst/>
-          </a:prstGeom>
-          <a:noFill/>
-          <a:ln/>
-        </p:spPr>
-        <p:txBody>
-          <a:bodyPr wrap="square" rtlCol="0" anchor="ctr"/>
-          <a:lstStyle/>
-          <a:p>
-            <a:pPr algn="ctr" indent="0" marL="0">
+            <a:ext cx="1973766" cy="731520"/>
+          </a:xfrm>
+          <a:prstGeom prst="rect">
+            <a:avLst/>
+          </a:prstGeom>
+          <a:noFill/>
+          <a:ln/>
+        </p:spPr>
+        <p:txBody>
+          <a:bodyPr wrap="square" rtlCol="0" anchor="ctr"/>
+          <a:lstStyle/>
+          <a:p>
+            <a:pPr marL="0" indent="0" algn="ctr">
               <a:buNone/>
             </a:pPr>
             <a:r>
@@ -4969,7 +4950,7 @@
           <a:bodyPr wrap="square" rtlCol="0" anchor="ctr"/>
           <a:lstStyle/>
           <a:p>
-            <a:pPr algn="ctr" indent="0" marL="0">
+            <a:pPr marL="0" indent="0" algn="ctr">
               <a:buNone/>
             </a:pPr>
             <a:r>
@@ -5008,7 +4989,7 @@
           <a:bodyPr wrap="square" rtlCol="0" anchor="ctr"/>
           <a:lstStyle/>
           <a:p>
-            <a:pPr algn="ctr" indent="0" marL="0">
+            <a:pPr marL="0" indent="0" algn="ctr">
               <a:buNone/>
             </a:pPr>
             <a:r>
@@ -5045,6 +5026,13 @@
           </a:solidFill>
           <a:ln/>
         </p:spPr>
+        <p:txBody>
+          <a:bodyPr/>
+          <a:lstStyle/>
+          <a:p>
+            <a:endParaRPr lang="ja-JP" altLang="en-US"/>
+          </a:p>
+        </p:txBody>
       </p:sp>
       <p:sp>
         <p:nvSpPr>
@@ -5067,7 +5055,7 @@
           <a:bodyPr wrap="square" rtlCol="0" anchor="ctr"/>
           <a:lstStyle/>
           <a:p>
-            <a:pPr algn="ctr" indent="0" marL="0">
+            <a:pPr marL="0" indent="0" algn="ctr">
               <a:buNone/>
             </a:pPr>
             <a:r>
@@ -5081,9 +5069,6 @@
               </a:rPr>
               <a:t>年間 </a:t>
             </a:r>
-            <a:pPr algn="ctr" indent="0" marL="0">
-              <a:buNone/>
-            </a:pPr>
             <a:r>
               <a:rPr lang="en-US" sz="6000" b="1" dirty="0">
                 <a:solidFill>
@@ -5095,9 +5080,6 @@
               </a:rPr>
               <a:t>1,046</a:t>
             </a:r>
-            <a:pPr algn="ctr" indent="0" marL="0">
-              <a:buNone/>
-            </a:pPr>
             <a:r>
               <a:rPr lang="en-US" sz="2400" dirty="0">
                 <a:solidFill>
@@ -5134,7 +5116,7 @@
           <a:bodyPr wrap="square" rtlCol="0" anchor="ctr"/>
           <a:lstStyle/>
           <a:p>
-            <a:pPr algn="ctr" indent="0" marL="0">
+            <a:pPr marL="0" indent="0" algn="ctr">
               <a:buNone/>
             </a:pPr>
             <a:r>
@@ -5173,7 +5155,7 @@
           <a:bodyPr wrap="square" rtlCol="0" anchor="ctr"/>
           <a:lstStyle/>
           <a:p>
-            <a:pPr indent="0" marL="0">
+            <a:pPr marL="0" indent="0">
               <a:buNone/>
             </a:pPr>
             <a:r>
@@ -5207,6 +5189,7 @@
         <a:solidFill>
           <a:srgbClr val="F8FAFC"/>
         </a:solidFill>
+        <a:effectLst/>
       </p:bgPr>
     </p:bg>
     <p:spTree>
@@ -5244,7 +5227,7 @@
           <a:bodyPr wrap="square" lIns="0" tIns="0" rIns="0" bIns="0" rtlCol="0" anchor="ctr"/>
           <a:lstStyle/>
           <a:p>
-            <a:pPr indent="0" marL="0">
+            <a:pPr marL="0" indent="0">
               <a:buNone/>
             </a:pPr>
             <a:r>
@@ -5281,6 +5264,13 @@
           </a:solidFill>
           <a:ln/>
         </p:spPr>
+        <p:txBody>
+          <a:bodyPr/>
+          <a:lstStyle/>
+          <a:p>
+            <a:endParaRPr lang="ja-JP" altLang="en-US"/>
+          </a:p>
+        </p:txBody>
       </p:sp>
       <p:sp>
         <p:nvSpPr>
@@ -5301,13 +5291,20 @@
           </a:solidFill>
           <a:ln/>
           <a:effectLst>
-            <a:outerShdw sx="100000" sy="100000" kx="0" ky="0" algn="bl" rotWithShape="0" blurRad="101600" dist="25400" dir="8100000">
+            <a:outerShdw blurRad="101600" dist="25400" dir="8100000" algn="bl" rotWithShape="0">
               <a:srgbClr val="000000">
                 <a:alpha val="12000"/>
               </a:srgbClr>
             </a:outerShdw>
           </a:effectLst>
         </p:spPr>
+        <p:txBody>
+          <a:bodyPr/>
+          <a:lstStyle/>
+          <a:p>
+            <a:endParaRPr lang="ja-JP" altLang="en-US"/>
+          </a:p>
+        </p:txBody>
       </p:sp>
       <p:sp>
         <p:nvSpPr>
@@ -5328,6 +5325,13 @@
           </a:solidFill>
           <a:ln/>
         </p:spPr>
+        <p:txBody>
+          <a:bodyPr/>
+          <a:lstStyle/>
+          <a:p>
+            <a:endParaRPr lang="ja-JP" altLang="en-US"/>
+          </a:p>
+        </p:txBody>
       </p:sp>
       <p:sp>
         <p:nvSpPr>
@@ -5350,7 +5354,7 @@
           <a:bodyPr wrap="square" rtlCol="0" anchor="ctr"/>
           <a:lstStyle/>
           <a:p>
-            <a:pPr indent="0" marL="0">
+            <a:pPr marL="0" indent="0">
               <a:buNone/>
             </a:pPr>
             <a:r>
@@ -5389,7 +5393,7 @@
           <a:bodyPr wrap="square" rtlCol="0" anchor="ctr"/>
           <a:lstStyle/>
           <a:p>
-            <a:pPr indent="0" marL="0">
+            <a:pPr marL="0" indent="0">
               <a:buNone/>
             </a:pPr>
             <a:r>
@@ -5401,7 +5405,7 @@
                 <a:ea typeface="Arial Black" pitchFamily="34" charset="-122"/>
                 <a:cs typeface="Arial Black" pitchFamily="34" charset="-120"/>
               </a:rPr>
-              <a:t>30冄7,890万円</a:t>
+              <a:t>30億7,890万円</a:t>
             </a:r>
             <a:endParaRPr lang="en-US" sz="2200" dirty="0"/>
           </a:p>
@@ -5426,13 +5430,20 @@
           </a:solidFill>
           <a:ln/>
           <a:effectLst>
-            <a:outerShdw sx="100000" sy="100000" kx="0" ky="0" algn="bl" rotWithShape="0" blurRad="101600" dist="25400" dir="8100000">
+            <a:outerShdw blurRad="101600" dist="25400" dir="8100000" algn="bl" rotWithShape="0">
               <a:srgbClr val="000000">
                 <a:alpha val="12000"/>
               </a:srgbClr>
             </a:outerShdw>
           </a:effectLst>
         </p:spPr>
+        <p:txBody>
+          <a:bodyPr/>
+          <a:lstStyle/>
+          <a:p>
+            <a:endParaRPr lang="ja-JP" altLang="en-US"/>
+          </a:p>
+        </p:txBody>
       </p:sp>
       <p:sp>
         <p:nvSpPr>
@@ -5453,6 +5464,13 @@
           </a:solidFill>
           <a:ln/>
         </p:spPr>
+        <p:txBody>
+          <a:bodyPr/>
+          <a:lstStyle/>
+          <a:p>
+            <a:endParaRPr lang="ja-JP" altLang="en-US"/>
+          </a:p>
+        </p:txBody>
       </p:sp>
       <p:sp>
         <p:nvSpPr>
@@ -5475,7 +5493,7 @@
           <a:bodyPr wrap="square" rtlCol="0" anchor="ctr"/>
           <a:lstStyle/>
           <a:p>
-            <a:pPr indent="0" marL="0">
+            <a:pPr marL="0" indent="0">
               <a:buNone/>
             </a:pPr>
             <a:r>
@@ -5514,7 +5532,7 @@
           <a:bodyPr wrap="square" rtlCol="0" anchor="ctr"/>
           <a:lstStyle/>
           <a:p>
-            <a:pPr indent="0" marL="0">
+            <a:pPr marL="0" indent="0">
               <a:buNone/>
             </a:pPr>
             <a:r>
@@ -5551,13 +5569,20 @@
           </a:solidFill>
           <a:ln/>
           <a:effectLst>
-            <a:outerShdw sx="100000" sy="100000" kx="0" ky="0" algn="bl" rotWithShape="0" blurRad="101600" dist="25400" dir="8100000">
+            <a:outerShdw blurRad="101600" dist="25400" dir="8100000" algn="bl" rotWithShape="0">
               <a:srgbClr val="000000">
                 <a:alpha val="12000"/>
               </a:srgbClr>
             </a:outerShdw>
           </a:effectLst>
         </p:spPr>
+        <p:txBody>
+          <a:bodyPr/>
+          <a:lstStyle/>
+          <a:p>
+            <a:endParaRPr lang="ja-JP" altLang="en-US"/>
+          </a:p>
+        </p:txBody>
       </p:sp>
       <p:sp>
         <p:nvSpPr>
@@ -5578,6 +5603,13 @@
           </a:solidFill>
           <a:ln/>
         </p:spPr>
+        <p:txBody>
+          <a:bodyPr/>
+          <a:lstStyle/>
+          <a:p>
+            <a:endParaRPr lang="ja-JP" altLang="en-US"/>
+          </a:p>
+        </p:txBody>
       </p:sp>
       <p:sp>
         <p:nvSpPr>
@@ -5600,7 +5632,7 @@
           <a:bodyPr wrap="square" rtlCol="0" anchor="ctr"/>
           <a:lstStyle/>
           <a:p>
-            <a:pPr indent="0" marL="0">
+            <a:pPr marL="0" indent="0">
               <a:buNone/>
             </a:pPr>
             <a:r>
@@ -5639,7 +5671,7 @@
           <a:bodyPr wrap="square" rtlCol="0" anchor="ctr"/>
           <a:lstStyle/>
           <a:p>
-            <a:pPr indent="0" marL="0">
+            <a:pPr marL="0" indent="0">
               <a:buNone/>
             </a:pPr>
             <a:r>
@@ -5676,13 +5708,20 @@
           </a:solidFill>
           <a:ln/>
           <a:effectLst>
-            <a:outerShdw sx="100000" sy="100000" kx="0" ky="0" algn="bl" rotWithShape="0" blurRad="101600" dist="25400" dir="8100000">
+            <a:outerShdw blurRad="101600" dist="25400" dir="8100000" algn="bl" rotWithShape="0">
               <a:srgbClr val="000000">
                 <a:alpha val="12000"/>
               </a:srgbClr>
             </a:outerShdw>
           </a:effectLst>
         </p:spPr>
+        <p:txBody>
+          <a:bodyPr/>
+          <a:lstStyle/>
+          <a:p>
+            <a:endParaRPr lang="ja-JP" altLang="en-US"/>
+          </a:p>
+        </p:txBody>
       </p:sp>
       <p:sp>
         <p:nvSpPr>
@@ -5703,6 +5742,13 @@
           </a:solidFill>
           <a:ln/>
         </p:spPr>
+        <p:txBody>
+          <a:bodyPr/>
+          <a:lstStyle/>
+          <a:p>
+            <a:endParaRPr lang="ja-JP" altLang="en-US"/>
+          </a:p>
+        </p:txBody>
       </p:sp>
       <p:sp>
         <p:nvSpPr>
@@ -5725,7 +5771,7 @@
           <a:bodyPr wrap="square" rtlCol="0" anchor="ctr"/>
           <a:lstStyle/>
           <a:p>
-            <a:pPr indent="0" marL="0">
+            <a:pPr marL="0" indent="0">
               <a:buNone/>
             </a:pPr>
             <a:r>
@@ -5764,7 +5810,7 @@
           <a:bodyPr wrap="square" rtlCol="0" anchor="ctr"/>
           <a:lstStyle/>
           <a:p>
-            <a:pPr indent="0" marL="0">
+            <a:pPr marL="0" indent="0">
               <a:buNone/>
             </a:pPr>
             <a:r>
@@ -5801,13 +5847,20 @@
           </a:solidFill>
           <a:ln/>
           <a:effectLst>
-            <a:outerShdw sx="100000" sy="100000" kx="0" ky="0" algn="bl" rotWithShape="0" blurRad="101600" dist="25400" dir="8100000">
+            <a:outerShdw blurRad="101600" dist="25400" dir="8100000" algn="bl" rotWithShape="0">
               <a:srgbClr val="000000">
                 <a:alpha val="12000"/>
               </a:srgbClr>
             </a:outerShdw>
           </a:effectLst>
         </p:spPr>
+        <p:txBody>
+          <a:bodyPr/>
+          <a:lstStyle/>
+          <a:p>
+            <a:endParaRPr lang="ja-JP" altLang="en-US"/>
+          </a:p>
+        </p:txBody>
       </p:sp>
       <p:sp>
         <p:nvSpPr>
@@ -5828,6 +5881,13 @@
           </a:solidFill>
           <a:ln/>
         </p:spPr>
+        <p:txBody>
+          <a:bodyPr/>
+          <a:lstStyle/>
+          <a:p>
+            <a:endParaRPr lang="ja-JP" altLang="en-US"/>
+          </a:p>
+        </p:txBody>
       </p:sp>
       <p:sp>
         <p:nvSpPr>
@@ -5850,7 +5910,7 @@
           <a:bodyPr wrap="square" rtlCol="0" anchor="ctr"/>
           <a:lstStyle/>
           <a:p>
-            <a:pPr indent="0" marL="0">
+            <a:pPr marL="0" indent="0">
               <a:buNone/>
             </a:pPr>
             <a:r>
@@ -5889,7 +5949,7 @@
           <a:bodyPr wrap="square" rtlCol="0" anchor="ctr"/>
           <a:lstStyle/>
           <a:p>
-            <a:pPr indent="0" marL="0">
+            <a:pPr marL="0" indent="0">
               <a:buNone/>
             </a:pPr>
             <a:r>
@@ -5926,13 +5986,20 @@
           </a:solidFill>
           <a:ln/>
           <a:effectLst>
-            <a:outerShdw sx="100000" sy="100000" kx="0" ky="0" algn="bl" rotWithShape="0" blurRad="101600" dist="25400" dir="8100000">
+            <a:outerShdw blurRad="101600" dist="25400" dir="8100000" algn="bl" rotWithShape="0">
               <a:srgbClr val="000000">
                 <a:alpha val="12000"/>
               </a:srgbClr>
             </a:outerShdw>
           </a:effectLst>
         </p:spPr>
+        <p:txBody>
+          <a:bodyPr/>
+          <a:lstStyle/>
+          <a:p>
+            <a:endParaRPr lang="ja-JP" altLang="en-US"/>
+          </a:p>
+        </p:txBody>
       </p:sp>
       <p:sp>
         <p:nvSpPr>
@@ -5953,6 +6020,13 @@
           </a:solidFill>
           <a:ln/>
         </p:spPr>
+        <p:txBody>
+          <a:bodyPr/>
+          <a:lstStyle/>
+          <a:p>
+            <a:endParaRPr lang="ja-JP" altLang="en-US"/>
+          </a:p>
+        </p:txBody>
       </p:sp>
       <p:sp>
         <p:nvSpPr>
@@ -5975,7 +6049,7 @@
           <a:bodyPr wrap="square" rtlCol="0" anchor="ctr"/>
           <a:lstStyle/>
           <a:p>
-            <a:pPr indent="0" marL="0">
+            <a:pPr marL="0" indent="0">
               <a:buNone/>
             </a:pPr>
             <a:r>
@@ -6014,7 +6088,7 @@
           <a:bodyPr wrap="square" rtlCol="0" anchor="ctr"/>
           <a:lstStyle/>
           <a:p>
-            <a:pPr indent="0" marL="0">
+            <a:pPr marL="0" indent="0">
               <a:buNone/>
             </a:pPr>
             <a:r>
@@ -6051,6 +6125,13 @@
           </a:solidFill>
           <a:ln/>
         </p:spPr>
+        <p:txBody>
+          <a:bodyPr/>
+          <a:lstStyle/>
+          <a:p>
+            <a:endParaRPr lang="ja-JP" altLang="en-US"/>
+          </a:p>
+        </p:txBody>
       </p:sp>
       <p:sp>
         <p:nvSpPr>
@@ -6073,7 +6154,7 @@
           <a:bodyPr wrap="square" rtlCol="0" anchor="ctr"/>
           <a:lstStyle/>
           <a:p>
-            <a:pPr indent="0" marL="0">
+            <a:pPr marL="0" indent="0">
               <a:buNone/>
             </a:pPr>
             <a:r>
@@ -6107,6 +6188,7 @@
         <a:solidFill>
           <a:srgbClr val="F8FAFC"/>
         </a:solidFill>
+        <a:effectLst/>
       </p:bgPr>
     </p:bg>
     <p:spTree>
@@ -6144,7 +6226,7 @@
           <a:bodyPr wrap="square" rtlCol="0" anchor="ctr"/>
           <a:lstStyle/>
           <a:p>
-            <a:pPr indent="0" marL="0">
+            <a:pPr marL="0" indent="0">
               <a:buNone/>
             </a:pPr>
             <a:r>
@@ -6183,7 +6265,7 @@
           <a:bodyPr wrap="square" lIns="0" tIns="0" rIns="0" bIns="0" rtlCol="0" anchor="ctr"/>
           <a:lstStyle/>
           <a:p>
-            <a:pPr indent="0" marL="0">
+            <a:pPr marL="0" indent="0">
               <a:buNone/>
             </a:pPr>
             <a:r>
@@ -6220,6 +6302,13 @@
           </a:solidFill>
           <a:ln/>
         </p:spPr>
+        <p:txBody>
+          <a:bodyPr/>
+          <a:lstStyle/>
+          <a:p>
+            <a:endParaRPr lang="ja-JP" altLang="en-US"/>
+          </a:p>
+        </p:txBody>
       </p:sp>
       <p:sp>
         <p:nvSpPr>
@@ -6229,8 +6318,8 @@
         </p:nvSpPr>
         <p:spPr>
           <a:xfrm>
-            <a:off x="914400" y="1645920"/>
-            <a:ext cx="7315200" cy="731520"/>
+            <a:off x="548640" y="1645920"/>
+            <a:ext cx="8183880" cy="731520"/>
           </a:xfrm>
           <a:prstGeom prst="rect">
             <a:avLst/>
@@ -6240,13 +6329,20 @@
           </a:solidFill>
           <a:ln/>
           <a:effectLst>
-            <a:outerShdw sx="100000" sy="100000" kx="0" ky="0" algn="bl" rotWithShape="0" blurRad="101600" dist="25400" dir="8100000">
+            <a:outerShdw blurRad="101600" dist="25400" dir="8100000" algn="bl" rotWithShape="0">
               <a:srgbClr val="000000">
                 <a:alpha val="12000"/>
               </a:srgbClr>
             </a:outerShdw>
           </a:effectLst>
         </p:spPr>
+        <p:txBody>
+          <a:bodyPr/>
+          <a:lstStyle/>
+          <a:p>
+            <a:endParaRPr lang="ja-JP" altLang="en-US"/>
+          </a:p>
+        </p:txBody>
       </p:sp>
       <p:sp>
         <p:nvSpPr>
@@ -6256,20 +6352,20 @@
         </p:nvSpPr>
         <p:spPr>
           <a:xfrm>
-            <a:off x="914400" y="1645920"/>
-            <a:ext cx="7315200" cy="731520"/>
-          </a:xfrm>
-          <a:prstGeom prst="rect">
-            <a:avLst/>
-          </a:prstGeom>
-          <a:noFill/>
-          <a:ln/>
-        </p:spPr>
-        <p:txBody>
-          <a:bodyPr wrap="square" rtlCol="0" anchor="ctr"/>
-          <a:lstStyle/>
-          <a:p>
-            <a:pPr algn="ctr" indent="0" marL="0">
+            <a:off x="685800" y="1645920"/>
+            <a:ext cx="8046720" cy="731520"/>
+          </a:xfrm>
+          <a:prstGeom prst="rect">
+            <a:avLst/>
+          </a:prstGeom>
+          <a:noFill/>
+          <a:ln/>
+        </p:spPr>
+        <p:txBody>
+          <a:bodyPr wrap="square" rtlCol="0" anchor="ctr"/>
+          <a:lstStyle/>
+          <a:p>
+            <a:pPr marL="0" indent="0" algn="ctr">
               <a:buNone/>
             </a:pPr>
             <a:r>
@@ -6283,9 +6379,6 @@
               </a:rPr>
               <a:t>現在の稼働率 </a:t>
             </a:r>
-            <a:pPr algn="ctr" indent="0" marL="0">
-              <a:buNone/>
-            </a:pPr>
             <a:r>
               <a:rPr lang="en-US" sz="2200" b="1" dirty="0">
                 <a:solidFill>
@@ -6297,9 +6390,6 @@
               </a:rPr>
               <a:t>89%</a:t>
             </a:r>
-            <a:pPr algn="ctr" indent="0" marL="0">
-              <a:buNone/>
-            </a:pPr>
             <a:r>
               <a:rPr lang="en-US" sz="1600" dirty="0">
                 <a:solidFill>
@@ -6311,9 +6401,6 @@
               </a:rPr>
               <a:t>  |  あと1%で年間 </a:t>
             </a:r>
-            <a:pPr algn="ctr" indent="0" marL="0">
-              <a:buNone/>
-            </a:pPr>
             <a:r>
               <a:rPr lang="en-US" sz="2200" b="1" dirty="0">
                 <a:solidFill>
@@ -6325,9 +6412,6 @@
               </a:rPr>
               <a:t>+1,046万円</a:t>
             </a:r>
-            <a:pPr algn="ctr" indent="0" marL="0">
-              <a:buNone/>
-            </a:pPr>
             <a:r>
               <a:rPr lang="en-US" sz="1300" dirty="0">
                 <a:solidFill>
@@ -6337,7 +6421,7 @@
                 <a:ea typeface="Calibri" pitchFamily="34" charset="-122"/>
                 <a:cs typeface="Calibri" pitchFamily="34" charset="-120"/>
               </a:rPr>
-              <a:t> （年間黒字額の29%相当）</a:t>
+              <a:t> （常勤医師1名の年間手取り収入に相当）</a:t>
             </a:r>
             <a:endParaRPr lang="en-US" sz="1600" dirty="0"/>
           </a:p>
@@ -6364,7 +6448,7 @@
           <a:bodyPr wrap="square" rtlCol="0" anchor="ctr"/>
           <a:lstStyle/>
           <a:p>
-            <a:pPr algn="ctr" indent="0" marL="0">
+            <a:pPr marL="0" indent="0" algn="ctr">
               <a:buNone/>
             </a:pPr>
             <a:r>
@@ -6401,13 +6485,20 @@
           </a:solidFill>
           <a:ln/>
           <a:effectLst>
-            <a:outerShdw sx="100000" sy="100000" kx="0" ky="0" algn="bl" rotWithShape="0" blurRad="101600" dist="25400" dir="8100000">
+            <a:outerShdw blurRad="101600" dist="25400" dir="8100000" algn="bl" rotWithShape="0">
               <a:srgbClr val="000000">
                 <a:alpha val="12000"/>
               </a:srgbClr>
             </a:outerShdw>
           </a:effectLst>
         </p:spPr>
+        <p:txBody>
+          <a:bodyPr/>
+          <a:lstStyle/>
+          <a:p>
+            <a:endParaRPr lang="ja-JP" altLang="en-US"/>
+          </a:p>
+        </p:txBody>
       </p:sp>
       <p:sp>
         <p:nvSpPr>
@@ -6428,6 +6519,13 @@
           </a:solidFill>
           <a:ln/>
         </p:spPr>
+        <p:txBody>
+          <a:bodyPr/>
+          <a:lstStyle/>
+          <a:p>
+            <a:endParaRPr lang="ja-JP" altLang="en-US"/>
+          </a:p>
+        </p:txBody>
       </p:sp>
       <p:sp>
         <p:nvSpPr>
@@ -6450,7 +6548,7 @@
           <a:bodyPr wrap="square" rtlCol="0" anchor="ctr"/>
           <a:lstStyle/>
           <a:p>
-            <a:pPr indent="0" marL="0">
+            <a:pPr marL="0" indent="0">
               <a:buNone/>
             </a:pPr>
             <a:r>
@@ -6489,7 +6587,7 @@
           <a:bodyPr wrap="square" rtlCol="0" anchor="ctr"/>
           <a:lstStyle/>
           <a:p>
-            <a:pPr indent="0" marL="0">
+            <a:pPr marL="0" indent="0">
               <a:lnSpc>
                 <a:spcPct val="140000"/>
               </a:lnSpc>
@@ -6529,13 +6627,20 @@
           </a:solidFill>
           <a:ln/>
           <a:effectLst>
-            <a:outerShdw sx="100000" sy="100000" kx="0" ky="0" algn="bl" rotWithShape="0" blurRad="101600" dist="25400" dir="8100000">
+            <a:outerShdw blurRad="101600" dist="25400" dir="8100000" algn="bl" rotWithShape="0">
               <a:srgbClr val="000000">
                 <a:alpha val="12000"/>
               </a:srgbClr>
             </a:outerShdw>
           </a:effectLst>
         </p:spPr>
+        <p:txBody>
+          <a:bodyPr/>
+          <a:lstStyle/>
+          <a:p>
+            <a:endParaRPr lang="ja-JP" altLang="en-US"/>
+          </a:p>
+        </p:txBody>
       </p:sp>
       <p:sp>
         <p:nvSpPr>
@@ -6556,6 +6661,13 @@
           </a:solidFill>
           <a:ln/>
         </p:spPr>
+        <p:txBody>
+          <a:bodyPr/>
+          <a:lstStyle/>
+          <a:p>
+            <a:endParaRPr lang="ja-JP" altLang="en-US"/>
+          </a:p>
+        </p:txBody>
       </p:sp>
       <p:sp>
         <p:nvSpPr>
@@ -6578,7 +6690,7 @@
           <a:bodyPr wrap="square" rtlCol="0" anchor="ctr"/>
           <a:lstStyle/>
           <a:p>
-            <a:pPr indent="0" marL="0">
+            <a:pPr marL="0" indent="0">
               <a:buNone/>
             </a:pPr>
             <a:r>
@@ -6617,7 +6729,7 @@
           <a:bodyPr wrap="square" rtlCol="0" anchor="ctr"/>
           <a:lstStyle/>
           <a:p>
-            <a:pPr indent="0" marL="0">
+            <a:pPr marL="0" indent="0">
               <a:lnSpc>
                 <a:spcPct val="140000"/>
               </a:lnSpc>
@@ -6657,13 +6769,20 @@
           </a:solidFill>
           <a:ln/>
           <a:effectLst>
-            <a:outerShdw sx="100000" sy="100000" kx="0" ky="0" algn="bl" rotWithShape="0" blurRad="101600" dist="25400" dir="8100000">
+            <a:outerShdw blurRad="101600" dist="25400" dir="8100000" algn="bl" rotWithShape="0">
               <a:srgbClr val="000000">
                 <a:alpha val="12000"/>
               </a:srgbClr>
             </a:outerShdw>
           </a:effectLst>
         </p:spPr>
+        <p:txBody>
+          <a:bodyPr/>
+          <a:lstStyle/>
+          <a:p>
+            <a:endParaRPr lang="ja-JP" altLang="en-US"/>
+          </a:p>
+        </p:txBody>
       </p:sp>
       <p:sp>
         <p:nvSpPr>
@@ -6684,6 +6803,13 @@
           </a:solidFill>
           <a:ln/>
         </p:spPr>
+        <p:txBody>
+          <a:bodyPr/>
+          <a:lstStyle/>
+          <a:p>
+            <a:endParaRPr lang="ja-JP" altLang="en-US"/>
+          </a:p>
+        </p:txBody>
       </p:sp>
       <p:sp>
         <p:nvSpPr>
@@ -6706,7 +6832,7 @@
           <a:bodyPr wrap="square" rtlCol="0" anchor="ctr"/>
           <a:lstStyle/>
           <a:p>
-            <a:pPr indent="0" marL="0">
+            <a:pPr marL="0" indent="0">
               <a:buNone/>
             </a:pPr>
             <a:r>
@@ -6745,7 +6871,7 @@
           <a:bodyPr wrap="square" rtlCol="0" anchor="ctr"/>
           <a:lstStyle/>
           <a:p>
-            <a:pPr indent="0" marL="0">
+            <a:pPr marL="0" indent="0">
               <a:lnSpc>
                 <a:spcPct val="140000"/>
               </a:lnSpc>
@@ -6763,6 +6889,40 @@
               <a:t>「あと1%」が精神論ではなく経営数値として語られる</a:t>
             </a:r>
             <a:endParaRPr lang="en-US" sz="1200" dirty="0"/>
+          </a:p>
+        </p:txBody>
+      </p:sp>
+      <p:sp>
+        <p:nvSpPr>
+          <p:cNvPr id="20" name="TextBox 19"/>
+          <p:cNvSpPr txBox="1"/>
+          <p:nvPr/>
+        </p:nvSpPr>
+        <p:spPr>
+          <a:xfrm>
+            <a:off x="914400" y="4846320"/>
+            <a:ext cx="7315200" cy="274320"/>
+          </a:xfrm>
+          <a:prstGeom prst="rect">
+            <a:avLst/>
+          </a:prstGeom>
+          <a:noFill/>
+        </p:spPr>
+        <p:txBody>
+          <a:bodyPr wrap="square">
+            <a:spAutoFit/>
+          </a:bodyPr>
+          <a:lstStyle/>
+          <a:p>
+            <a:r>
+              <a:rPr sz="1000" i="1">
+                <a:solidFill>
+                  <a:srgbClr val="94A3B8"/>
+                </a:solidFill>
+                <a:latin typeface="Calibri"/>
+              </a:rPr>
+              <a:t>※ アプリ上では経営数値の直接表示を避け、職員が実感しやすい表現に変換しています</a:t>
+            </a:r>
           </a:p>
         </p:txBody>
       </p:sp>
@@ -6782,6 +6942,7 @@
         <a:solidFill>
           <a:srgbClr val="F8FAFC"/>
         </a:solidFill>
+        <a:effectLst/>
       </p:bgPr>
     </p:bg>
     <p:spTree>
@@ -6819,7 +6980,7 @@
           <a:bodyPr wrap="square" rtlCol="0" anchor="ctr"/>
           <a:lstStyle/>
           <a:p>
-            <a:pPr indent="0" marL="0">
+            <a:pPr marL="0" indent="0">
               <a:buNone/>
             </a:pPr>
             <a:r>
@@ -6858,7 +7019,7 @@
           <a:bodyPr wrap="square" lIns="0" tIns="0" rIns="0" bIns="0" rtlCol="0" anchor="ctr"/>
           <a:lstStyle/>
           <a:p>
-            <a:pPr indent="0" marL="0">
+            <a:pPr marL="0" indent="0">
               <a:buNone/>
             </a:pPr>
             <a:r>
@@ -6895,6 +7056,13 @@
           </a:solidFill>
           <a:ln/>
         </p:spPr>
+        <p:txBody>
+          <a:bodyPr/>
+          <a:lstStyle/>
+          <a:p>
+            <a:endParaRPr lang="ja-JP" altLang="en-US"/>
+          </a:p>
+        </p:txBody>
       </p:sp>
       <p:sp>
         <p:nvSpPr>
@@ -6915,13 +7083,20 @@
           </a:solidFill>
           <a:ln/>
           <a:effectLst>
-            <a:outerShdw sx="100000" sy="100000" kx="0" ky="0" algn="bl" rotWithShape="0" blurRad="101600" dist="25400" dir="8100000">
+            <a:outerShdw blurRad="101600" dist="25400" dir="8100000" algn="bl" rotWithShape="0">
               <a:srgbClr val="000000">
                 <a:alpha val="12000"/>
               </a:srgbClr>
             </a:outerShdw>
           </a:effectLst>
         </p:spPr>
+        <p:txBody>
+          <a:bodyPr/>
+          <a:lstStyle/>
+          <a:p>
+            <a:endParaRPr lang="ja-JP" altLang="en-US"/>
+          </a:p>
+        </p:txBody>
       </p:sp>
       <p:sp>
         <p:nvSpPr>
@@ -6942,6 +7117,13 @@
           </a:solidFill>
           <a:ln/>
         </p:spPr>
+        <p:txBody>
+          <a:bodyPr/>
+          <a:lstStyle/>
+          <a:p>
+            <a:endParaRPr lang="ja-JP" altLang="en-US"/>
+          </a:p>
+        </p:txBody>
       </p:sp>
       <p:sp>
         <p:nvSpPr>
@@ -6951,7 +7133,7 @@
         </p:nvSpPr>
         <p:spPr>
           <a:xfrm>
-            <a:off x="822960" y="1554480"/>
+            <a:off x="813816" y="1463783"/>
             <a:ext cx="3383280" cy="365760"/>
           </a:xfrm>
           <a:prstGeom prst="rect">
@@ -6964,7 +7146,7 @@
           <a:bodyPr wrap="square" rtlCol="0" anchor="ctr"/>
           <a:lstStyle/>
           <a:p>
-            <a:pPr indent="0" marL="0">
+            <a:pPr marL="0" indent="0">
               <a:buNone/>
             </a:pPr>
             <a:r>
@@ -6990,20 +7172,20 @@
         </p:nvSpPr>
         <p:spPr>
           <a:xfrm>
-            <a:off x="822960" y="1965960"/>
-            <a:ext cx="3383280" cy="1097280"/>
-          </a:xfrm>
-          <a:prstGeom prst="rect">
-            <a:avLst/>
-          </a:prstGeom>
-          <a:noFill/>
-          <a:ln/>
-        </p:spPr>
-        <p:txBody>
-          <a:bodyPr wrap="square" rtlCol="0" anchor="ctr"/>
-          <a:lstStyle/>
-          <a:p>
-            <a:pPr indent="0" marL="0">
+            <a:off x="822960" y="1875263"/>
+            <a:ext cx="3566160" cy="1097280"/>
+          </a:xfrm>
+          <a:prstGeom prst="rect">
+            <a:avLst/>
+          </a:prstGeom>
+          <a:noFill/>
+          <a:ln/>
+        </p:spPr>
+        <p:txBody>
+          <a:bodyPr wrap="square" rtlCol="0" anchor="ctr"/>
+          <a:lstStyle/>
+          <a:p>
+            <a:pPr marL="0" indent="0">
               <a:lnSpc>
                 <a:spcPct val="150000"/>
               </a:lnSpc>
@@ -7018,12 +7200,12 @@
                 <a:ea typeface="Calibri" pitchFamily="34" charset="-122"/>
                 <a:cs typeface="Calibri" pitchFamily="34" charset="-120"/>
               </a:rPr>
-              <a:t>先月の金曜退院は32件（全体の40%）</a:t>
+              <a:t>例: 金曜退院が全体の40%を占めた場合</a:t>
             </a:r>
             <a:endParaRPr lang="en-US" sz="1200" dirty="0"/>
           </a:p>
           <a:p>
-            <a:pPr indent="0" marL="0">
+            <a:pPr marL="0" indent="0">
               <a:lnSpc>
                 <a:spcPct val="150000"/>
               </a:lnSpc>
@@ -7038,12 +7220,12 @@
                 <a:ea typeface="Calibri" pitchFamily="34" charset="-122"/>
                 <a:cs typeface="Calibri" pitchFamily="34" charset="-120"/>
               </a:rPr>
-              <a:t>土日の平均稼働率が82%に低下</a:t>
+              <a:t>土日の稼働率が大きく低下</a:t>
             </a:r>
             <a:endParaRPr lang="en-US" sz="1200" dirty="0"/>
           </a:p>
           <a:p>
-            <a:pPr indent="0" marL="0">
+            <a:pPr marL="0" indent="0">
               <a:lnSpc>
                 <a:spcPct val="150000"/>
               </a:lnSpc>
@@ -7052,7 +7234,7 @@
             <a:endParaRPr lang="en-US" sz="1200" dirty="0"/>
           </a:p>
           <a:p>
-            <a:pPr indent="0" marL="0">
+            <a:pPr marL="0" indent="0">
               <a:lnSpc>
                 <a:spcPct val="150000"/>
               </a:lnSpc>
@@ -7067,12 +7249,12 @@
                 <a:ea typeface="Calibri" pitchFamily="34" charset="-122"/>
                 <a:cs typeface="Calibri" pitchFamily="34" charset="-120"/>
               </a:rPr>
-              <a:t>年間推定ロス: 576万円</a:t>
+              <a:t>年間推定ロス: 数百万円規模</a:t>
             </a:r>
             <a:endParaRPr lang="en-US" sz="1200" dirty="0"/>
           </a:p>
           <a:p>
-            <a:pPr indent="0" marL="0">
+            <a:pPr marL="0" indent="0">
               <a:lnSpc>
                 <a:spcPct val="150000"/>
               </a:lnSpc>
@@ -7087,7 +7269,7 @@
                 <a:ea typeface="Calibri" pitchFamily="34" charset="-122"/>
                 <a:cs typeface="Calibri" pitchFamily="34" charset="-120"/>
               </a:rPr>
-              <a:t>（年間黒字額の16%相当）</a:t>
+              <a:t>（実データで自動算出）</a:t>
             </a:r>
             <a:endParaRPr lang="en-US" sz="1200" dirty="0"/>
           </a:p>
@@ -7112,13 +7294,20 @@
           </a:solidFill>
           <a:ln/>
           <a:effectLst>
-            <a:outerShdw sx="100000" sy="100000" kx="0" ky="0" algn="bl" rotWithShape="0" blurRad="101600" dist="25400" dir="8100000">
+            <a:outerShdw blurRad="101600" dist="25400" dir="8100000" algn="bl" rotWithShape="0">
               <a:srgbClr val="000000">
                 <a:alpha val="12000"/>
               </a:srgbClr>
             </a:outerShdw>
           </a:effectLst>
         </p:spPr>
+        <p:txBody>
+          <a:bodyPr/>
+          <a:lstStyle/>
+          <a:p>
+            <a:endParaRPr lang="ja-JP" altLang="en-US"/>
+          </a:p>
+        </p:txBody>
       </p:sp>
       <p:sp>
         <p:nvSpPr>
@@ -7139,6 +7328,13 @@
           </a:solidFill>
           <a:ln/>
         </p:spPr>
+        <p:txBody>
+          <a:bodyPr/>
+          <a:lstStyle/>
+          <a:p>
+            <a:endParaRPr lang="ja-JP" altLang="en-US"/>
+          </a:p>
+        </p:txBody>
       </p:sp>
       <p:sp>
         <p:nvSpPr>
@@ -7148,7 +7344,7 @@
         </p:nvSpPr>
         <p:spPr>
           <a:xfrm>
-            <a:off x="5029200" y="1554480"/>
+            <a:off x="5029200" y="1463040"/>
             <a:ext cx="3383280" cy="365760"/>
           </a:xfrm>
           <a:prstGeom prst="rect">
@@ -7161,7 +7357,7 @@
           <a:bodyPr wrap="square" rtlCol="0" anchor="ctr"/>
           <a:lstStyle/>
           <a:p>
-            <a:pPr indent="0" marL="0">
+            <a:pPr marL="0" indent="0">
               <a:buNone/>
             </a:pPr>
             <a:r>
@@ -7187,20 +7383,20 @@
         </p:nvSpPr>
         <p:spPr>
           <a:xfrm>
-            <a:off x="5029200" y="1965960"/>
-            <a:ext cx="3383280" cy="1097280"/>
-          </a:xfrm>
-          <a:prstGeom prst="rect">
-            <a:avLst/>
-          </a:prstGeom>
-          <a:noFill/>
-          <a:ln/>
-        </p:spPr>
-        <p:txBody>
-          <a:bodyPr wrap="square" rtlCol="0" anchor="ctr"/>
-          <a:lstStyle/>
-          <a:p>
-            <a:pPr indent="0" marL="0">
+            <a:off x="5029200" y="1874520"/>
+            <a:ext cx="3497766" cy="1097280"/>
+          </a:xfrm>
+          <a:prstGeom prst="rect">
+            <a:avLst/>
+          </a:prstGeom>
+          <a:noFill/>
+          <a:ln/>
+        </p:spPr>
+        <p:txBody>
+          <a:bodyPr wrap="square" rtlCol="0" anchor="ctr"/>
+          <a:lstStyle/>
+          <a:p>
+            <a:pPr marL="0" indent="0">
               <a:lnSpc>
                 <a:spcPct val="150000"/>
               </a:lnSpc>
@@ -7215,12 +7411,12 @@
                 <a:ea typeface="Calibri" pitchFamily="34" charset="-122"/>
                 <a:cs typeface="Calibri" pitchFamily="34" charset="-120"/>
               </a:rPr>
-              <a:t>C先生の入院創出: 月12件（前月比+4件）</a:t>
+              <a:t>例: ある医師の入院創出が前月比で増加した場合</a:t>
             </a:r>
             <a:endParaRPr lang="en-US" sz="1200" dirty="0"/>
           </a:p>
           <a:p>
-            <a:pPr indent="0" marL="0">
+            <a:pPr marL="0" indent="0">
               <a:lnSpc>
                 <a:spcPct val="150000"/>
               </a:lnSpc>
@@ -7235,12 +7431,12 @@
                 <a:ea typeface="Calibri" pitchFamily="34" charset="-122"/>
                 <a:cs typeface="Calibri" pitchFamily="34" charset="-120"/>
               </a:rPr>
-              <a:t>稼働率への貢献: +0.3%</a:t>
+              <a:t>稼働率への貢献度を自動算出</a:t>
             </a:r>
             <a:endParaRPr lang="en-US" sz="1200" dirty="0"/>
           </a:p>
           <a:p>
-            <a:pPr indent="0" marL="0">
+            <a:pPr marL="0" indent="0">
               <a:lnSpc>
                 <a:spcPct val="150000"/>
               </a:lnSpc>
@@ -7249,7 +7445,7 @@
             <a:endParaRPr lang="en-US" sz="1200" dirty="0"/>
           </a:p>
           <a:p>
-            <a:pPr indent="0" marL="0">
+            <a:pPr marL="0" indent="0">
               <a:lnSpc>
                 <a:spcPct val="150000"/>
               </a:lnSpc>
@@ -7264,7 +7460,7 @@
                 <a:ea typeface="Calibri" pitchFamily="34" charset="-122"/>
                 <a:cs typeface="Calibri" pitchFamily="34" charset="-120"/>
               </a:rPr>
-              <a:t>年間換算: +334万円の売上貢献</a:t>
+              <a:t>年間換算の金額を自動表示</a:t>
             </a:r>
             <a:endParaRPr lang="en-US" sz="1200" dirty="0"/>
           </a:p>
@@ -7291,7 +7487,7 @@
           <a:bodyPr wrap="square" rtlCol="0" anchor="ctr"/>
           <a:lstStyle/>
           <a:p>
-            <a:pPr indent="0" marL="0">
+            <a:pPr marL="0" indent="0">
               <a:buNone/>
             </a:pPr>
             <a:r>
@@ -7328,13 +7524,20 @@
           </a:solidFill>
           <a:ln/>
           <a:effectLst>
-            <a:outerShdw sx="100000" sy="100000" kx="0" ky="0" algn="bl" rotWithShape="0" blurRad="101600" dist="25400" dir="8100000">
+            <a:outerShdw blurRad="101600" dist="25400" dir="8100000" algn="bl" rotWithShape="0">
               <a:srgbClr val="000000">
                 <a:alpha val="12000"/>
               </a:srgbClr>
             </a:outerShdw>
           </a:effectLst>
         </p:spPr>
+        <p:txBody>
+          <a:bodyPr/>
+          <a:lstStyle/>
+          <a:p>
+            <a:endParaRPr lang="ja-JP" altLang="en-US"/>
+          </a:p>
+        </p:txBody>
       </p:sp>
       <p:sp>
         <p:nvSpPr>
@@ -7355,6 +7558,13 @@
           </a:solidFill>
           <a:ln/>
         </p:spPr>
+        <p:txBody>
+          <a:bodyPr/>
+          <a:lstStyle/>
+          <a:p>
+            <a:endParaRPr lang="ja-JP" altLang="en-US"/>
+          </a:p>
+        </p:txBody>
       </p:sp>
       <p:sp>
         <p:nvSpPr>
@@ -7377,7 +7587,7 @@
           <a:bodyPr wrap="square" rtlCol="0" anchor="ctr"/>
           <a:lstStyle/>
           <a:p>
-            <a:pPr algn="ctr" indent="0" marL="0">
+            <a:pPr marL="0" indent="0" algn="ctr">
               <a:buNone/>
             </a:pPr>
             <a:r>
@@ -7416,7 +7626,7 @@
           <a:bodyPr wrap="square" rtlCol="0" anchor="ctr"/>
           <a:lstStyle/>
           <a:p>
-            <a:pPr indent="0" marL="0">
+            <a:pPr marL="0" indent="0">
               <a:lnSpc>
                 <a:spcPct val="130000"/>
               </a:lnSpc>
@@ -7436,7 +7646,7 @@
             <a:endParaRPr lang="en-US" sz="1100" dirty="0"/>
           </a:p>
           <a:p>
-            <a:pPr indent="0" marL="0">
+            <a:pPr marL="0" indent="0">
               <a:lnSpc>
                 <a:spcPct val="130000"/>
               </a:lnSpc>
@@ -7476,13 +7686,20 @@
           </a:solidFill>
           <a:ln/>
           <a:effectLst>
-            <a:outerShdw sx="100000" sy="100000" kx="0" ky="0" algn="bl" rotWithShape="0" blurRad="101600" dist="25400" dir="8100000">
+            <a:outerShdw blurRad="101600" dist="25400" dir="8100000" algn="bl" rotWithShape="0">
               <a:srgbClr val="000000">
                 <a:alpha val="12000"/>
               </a:srgbClr>
             </a:outerShdw>
           </a:effectLst>
         </p:spPr>
+        <p:txBody>
+          <a:bodyPr/>
+          <a:lstStyle/>
+          <a:p>
+            <a:endParaRPr lang="ja-JP" altLang="en-US"/>
+          </a:p>
+        </p:txBody>
       </p:sp>
       <p:sp>
         <p:nvSpPr>
@@ -7503,6 +7720,13 @@
           </a:solidFill>
           <a:ln/>
         </p:spPr>
+        <p:txBody>
+          <a:bodyPr/>
+          <a:lstStyle/>
+          <a:p>
+            <a:endParaRPr lang="ja-JP" altLang="en-US"/>
+          </a:p>
+        </p:txBody>
       </p:sp>
       <p:sp>
         <p:nvSpPr>
@@ -7525,7 +7749,7 @@
           <a:bodyPr wrap="square" rtlCol="0" anchor="ctr"/>
           <a:lstStyle/>
           <a:p>
-            <a:pPr algn="ctr" indent="0" marL="0">
+            <a:pPr marL="0" indent="0" algn="ctr">
               <a:buNone/>
             </a:pPr>
             <a:r>
@@ -7564,7 +7788,7 @@
           <a:bodyPr wrap="square" rtlCol="0" anchor="ctr"/>
           <a:lstStyle/>
           <a:p>
-            <a:pPr indent="0" marL="0">
+            <a:pPr marL="0" indent="0">
               <a:lnSpc>
                 <a:spcPct val="130000"/>
               </a:lnSpc>
@@ -7584,7 +7808,7 @@
             <a:endParaRPr lang="en-US" sz="1100" dirty="0"/>
           </a:p>
           <a:p>
-            <a:pPr indent="0" marL="0">
+            <a:pPr marL="0" indent="0">
               <a:lnSpc>
                 <a:spcPct val="130000"/>
               </a:lnSpc>
@@ -7624,13 +7848,20 @@
           </a:solidFill>
           <a:ln/>
           <a:effectLst>
-            <a:outerShdw sx="100000" sy="100000" kx="0" ky="0" algn="bl" rotWithShape="0" blurRad="101600" dist="25400" dir="8100000">
+            <a:outerShdw blurRad="101600" dist="25400" dir="8100000" algn="bl" rotWithShape="0">
               <a:srgbClr val="000000">
                 <a:alpha val="12000"/>
               </a:srgbClr>
             </a:outerShdw>
           </a:effectLst>
         </p:spPr>
+        <p:txBody>
+          <a:bodyPr/>
+          <a:lstStyle/>
+          <a:p>
+            <a:endParaRPr lang="ja-JP" altLang="en-US"/>
+          </a:p>
+        </p:txBody>
       </p:sp>
       <p:sp>
         <p:nvSpPr>
@@ -7651,6 +7882,13 @@
           </a:solidFill>
           <a:ln/>
         </p:spPr>
+        <p:txBody>
+          <a:bodyPr/>
+          <a:lstStyle/>
+          <a:p>
+            <a:endParaRPr lang="ja-JP" altLang="en-US"/>
+          </a:p>
+        </p:txBody>
       </p:sp>
       <p:sp>
         <p:nvSpPr>
@@ -7673,7 +7911,7 @@
           <a:bodyPr wrap="square" rtlCol="0" anchor="ctr"/>
           <a:lstStyle/>
           <a:p>
-            <a:pPr algn="ctr" indent="0" marL="0">
+            <a:pPr marL="0" indent="0" algn="ctr">
               <a:buNone/>
             </a:pPr>
             <a:r>
@@ -7712,7 +7950,7 @@
           <a:bodyPr wrap="square" rtlCol="0" anchor="ctr"/>
           <a:lstStyle/>
           <a:p>
-            <a:pPr indent="0" marL="0">
+            <a:pPr marL="0" indent="0">
               <a:lnSpc>
                 <a:spcPct val="130000"/>
               </a:lnSpc>
@@ -7732,7 +7970,7 @@
             <a:endParaRPr lang="en-US" sz="1100" dirty="0"/>
           </a:p>
           <a:p>
-            <a:pPr indent="0" marL="0">
+            <a:pPr marL="0" indent="0">
               <a:lnSpc>
                 <a:spcPct val="130000"/>
               </a:lnSpc>
@@ -7772,13 +8010,20 @@
           </a:solidFill>
           <a:ln/>
           <a:effectLst>
-            <a:outerShdw sx="100000" sy="100000" kx="0" ky="0" algn="bl" rotWithShape="0" blurRad="101600" dist="25400" dir="8100000">
+            <a:outerShdw blurRad="101600" dist="25400" dir="8100000" algn="bl" rotWithShape="0">
               <a:srgbClr val="000000">
                 <a:alpha val="12000"/>
               </a:srgbClr>
             </a:outerShdw>
           </a:effectLst>
         </p:spPr>
+        <p:txBody>
+          <a:bodyPr/>
+          <a:lstStyle/>
+          <a:p>
+            <a:endParaRPr lang="ja-JP" altLang="en-US"/>
+          </a:p>
+        </p:txBody>
       </p:sp>
       <p:sp>
         <p:nvSpPr>
@@ -7799,6 +8044,13 @@
           </a:solidFill>
           <a:ln/>
         </p:spPr>
+        <p:txBody>
+          <a:bodyPr/>
+          <a:lstStyle/>
+          <a:p>
+            <a:endParaRPr lang="ja-JP" altLang="en-US"/>
+          </a:p>
+        </p:txBody>
       </p:sp>
       <p:sp>
         <p:nvSpPr>
@@ -7821,7 +8073,7 @@
           <a:bodyPr wrap="square" rtlCol="0" anchor="ctr"/>
           <a:lstStyle/>
           <a:p>
-            <a:pPr algn="ctr" indent="0" marL="0">
+            <a:pPr marL="0" indent="0" algn="ctr">
               <a:buNone/>
             </a:pPr>
             <a:r>
@@ -7860,7 +8112,7 @@
           <a:bodyPr wrap="square" rtlCol="0" anchor="ctr"/>
           <a:lstStyle/>
           <a:p>
-            <a:pPr indent="0" marL="0">
+            <a:pPr marL="0" indent="0">
               <a:lnSpc>
                 <a:spcPct val="130000"/>
               </a:lnSpc>
@@ -7875,12 +8127,12 @@
                 <a:ea typeface="Calibri" pitchFamily="34" charset="-122"/>
                 <a:cs typeface="Calibri" pitchFamily="34" charset="-120"/>
               </a:rPr>
-              <a:t>どうすれば良いか</a:t>
+              <a:t>どうなり得るか</a:t>
             </a:r>
             <a:endParaRPr lang="en-US" sz="1100" dirty="0"/>
           </a:p>
           <a:p>
-            <a:pPr indent="0" marL="0">
+            <a:pPr marL="0" indent="0">
               <a:lnSpc>
                 <a:spcPct val="130000"/>
               </a:lnSpc>
@@ -7895,7 +8147,7 @@
                 <a:ea typeface="Calibri" pitchFamily="34" charset="-122"/>
                 <a:cs typeface="Calibri" pitchFamily="34" charset="-120"/>
               </a:rPr>
-              <a:t>改善策の提示</a:t>
+              <a:t>シミュレーションで試算</a:t>
             </a:r>
             <a:endParaRPr lang="en-US" sz="1100" dirty="0"/>
           </a:p>
@@ -7917,6 +8169,7 @@
         <a:solidFill>
           <a:srgbClr val="F8FAFC"/>
         </a:solidFill>
+        <a:effectLst/>
       </p:bgPr>
     </p:bg>
     <p:spTree>
@@ -7941,7 +8194,7 @@
         </p:nvSpPr>
         <p:spPr>
           <a:xfrm>
-            <a:off x="548640" y="274320"/>
+            <a:off x="548640" y="-82519"/>
             <a:ext cx="1828800" cy="457200"/>
           </a:xfrm>
           <a:prstGeom prst="rect">
@@ -7954,7 +8207,7 @@
           <a:bodyPr wrap="square" rtlCol="0" anchor="ctr"/>
           <a:lstStyle/>
           <a:p>
-            <a:pPr indent="0" marL="0">
+            <a:pPr marL="0" indent="0">
               <a:buNone/>
             </a:pPr>
             <a:r>
@@ -7980,7 +8233,7 @@
         </p:nvSpPr>
         <p:spPr>
           <a:xfrm>
-            <a:off x="548640" y="548640"/>
+            <a:off x="548640" y="191801"/>
             <a:ext cx="8046720" cy="640080"/>
           </a:xfrm>
           <a:prstGeom prst="rect">
@@ -7993,7 +8246,7 @@
           <a:bodyPr wrap="square" lIns="0" tIns="0" rIns="0" bIns="0" rtlCol="0" anchor="ctr"/>
           <a:lstStyle/>
           <a:p>
-            <a:pPr indent="0" marL="0">
+            <a:pPr marL="0" indent="0">
               <a:buNone/>
             </a:pPr>
             <a:r>
@@ -8019,7 +8272,7 @@
         </p:nvSpPr>
         <p:spPr>
           <a:xfrm>
-            <a:off x="548640" y="1188720"/>
+            <a:off x="548640" y="831881"/>
             <a:ext cx="1097280" cy="45720"/>
           </a:xfrm>
           <a:prstGeom prst="rect">
@@ -8030,6 +8283,13 @@
           </a:solidFill>
           <a:ln/>
         </p:spPr>
+        <p:txBody>
+          <a:bodyPr/>
+          <a:lstStyle/>
+          <a:p>
+            <a:endParaRPr lang="ja-JP" altLang="en-US"/>
+          </a:p>
+        </p:txBody>
       </p:sp>
       <p:sp>
         <p:nvSpPr>
@@ -8039,7 +8299,7 @@
         </p:nvSpPr>
         <p:spPr>
           <a:xfrm>
-            <a:off x="548640" y="1371600"/>
+            <a:off x="548640" y="1014761"/>
             <a:ext cx="8046720" cy="457200"/>
           </a:xfrm>
           <a:prstGeom prst="rect">
@@ -8052,7 +8312,7 @@
           <a:bodyPr wrap="square" rtlCol="0" anchor="ctr"/>
           <a:lstStyle/>
           <a:p>
-            <a:pPr indent="0" marL="0">
+            <a:pPr marL="0" indent="0">
               <a:buNone/>
             </a:pPr>
             <a:r>
@@ -8078,7 +8338,7 @@
         </p:nvSpPr>
         <p:spPr>
           <a:xfrm>
-            <a:off x="548640" y="1920240"/>
+            <a:off x="548640" y="1563401"/>
             <a:ext cx="2560320" cy="1371600"/>
           </a:xfrm>
           <a:prstGeom prst="rect">
@@ -8089,13 +8349,20 @@
           </a:solidFill>
           <a:ln/>
           <a:effectLst>
-            <a:outerShdw sx="100000" sy="100000" kx="0" ky="0" algn="bl" rotWithShape="0" blurRad="101600" dist="25400" dir="8100000">
+            <a:outerShdw blurRad="101600" dist="25400" dir="8100000" algn="bl" rotWithShape="0">
               <a:srgbClr val="000000">
                 <a:alpha val="12000"/>
               </a:srgbClr>
             </a:outerShdw>
           </a:effectLst>
         </p:spPr>
+        <p:txBody>
+          <a:bodyPr/>
+          <a:lstStyle/>
+          <a:p>
+            <a:endParaRPr lang="ja-JP" altLang="en-US"/>
+          </a:p>
+        </p:txBody>
       </p:sp>
       <p:sp>
         <p:nvSpPr>
@@ -8105,7 +8372,7 @@
         </p:nvSpPr>
         <p:spPr>
           <a:xfrm>
-            <a:off x="548640" y="1920240"/>
+            <a:off x="548640" y="1563401"/>
             <a:ext cx="2560320" cy="54864"/>
           </a:xfrm>
           <a:prstGeom prst="rect">
@@ -8116,6 +8383,13 @@
           </a:solidFill>
           <a:ln/>
         </p:spPr>
+        <p:txBody>
+          <a:bodyPr/>
+          <a:lstStyle/>
+          <a:p>
+            <a:endParaRPr lang="ja-JP" altLang="en-US"/>
+          </a:p>
+        </p:txBody>
       </p:sp>
       <p:sp>
         <p:nvSpPr>
@@ -8125,7 +8399,7 @@
         </p:nvSpPr>
         <p:spPr>
           <a:xfrm>
-            <a:off x="685800" y="2011680"/>
+            <a:off x="685800" y="1654841"/>
             <a:ext cx="914400" cy="274320"/>
           </a:xfrm>
           <a:prstGeom prst="rect">
@@ -8138,7 +8412,7 @@
           <a:bodyPr wrap="square" rtlCol="0" anchor="ctr"/>
           <a:lstStyle/>
           <a:p>
-            <a:pPr indent="0" marL="0">
+            <a:pPr marL="0" indent="0">
               <a:buNone/>
             </a:pPr>
             <a:r>
@@ -8164,7 +8438,7 @@
         </p:nvSpPr>
         <p:spPr>
           <a:xfrm>
-            <a:off x="685800" y="2286000"/>
+            <a:off x="685800" y="1929161"/>
             <a:ext cx="2286000" cy="365760"/>
           </a:xfrm>
           <a:prstGeom prst="rect">
@@ -8177,7 +8451,7 @@
           <a:bodyPr wrap="square" rtlCol="0" anchor="ctr"/>
           <a:lstStyle/>
           <a:p>
-            <a:pPr indent="0" marL="0">
+            <a:pPr marL="0" indent="0">
               <a:buNone/>
             </a:pPr>
             <a:r>
@@ -8203,7 +8477,7 @@
         </p:nvSpPr>
         <p:spPr>
           <a:xfrm>
-            <a:off x="685800" y="2651760"/>
+            <a:off x="685800" y="2294921"/>
             <a:ext cx="2286000" cy="548640"/>
           </a:xfrm>
           <a:prstGeom prst="rect">
@@ -8216,7 +8490,7 @@
           <a:bodyPr wrap="square" rtlCol="0" anchor="ctr"/>
           <a:lstStyle/>
           <a:p>
-            <a:pPr indent="0" marL="0">
+            <a:pPr marL="0" indent="0">
               <a:lnSpc>
                 <a:spcPct val="130000"/>
               </a:lnSpc>
@@ -8236,7 +8510,7 @@
             <a:endParaRPr lang="en-US" sz="1100" dirty="0"/>
           </a:p>
           <a:p>
-            <a:pPr indent="0" marL="0">
+            <a:pPr marL="0" indent="0">
               <a:lnSpc>
                 <a:spcPct val="130000"/>
               </a:lnSpc>
@@ -8265,7 +8539,7 @@
         </p:nvSpPr>
         <p:spPr>
           <a:xfrm>
-            <a:off x="3108960" y="2286000"/>
+            <a:off x="3108960" y="1929161"/>
             <a:ext cx="274320" cy="457200"/>
           </a:xfrm>
           <a:prstGeom prst="rect">
@@ -8278,7 +8552,7 @@
           <a:bodyPr wrap="square" rtlCol="0" anchor="ctr"/>
           <a:lstStyle/>
           <a:p>
-            <a:pPr algn="ctr" indent="0" marL="0">
+            <a:pPr marL="0" indent="0" algn="ctr">
               <a:buNone/>
             </a:pPr>
             <a:r>
@@ -8304,7 +8578,7 @@
         </p:nvSpPr>
         <p:spPr>
           <a:xfrm>
-            <a:off x="3383280" y="1920240"/>
+            <a:off x="3383280" y="1563401"/>
             <a:ext cx="2560320" cy="1371600"/>
           </a:xfrm>
           <a:prstGeom prst="rect">
@@ -8315,13 +8589,20 @@
           </a:solidFill>
           <a:ln/>
           <a:effectLst>
-            <a:outerShdw sx="100000" sy="100000" kx="0" ky="0" algn="bl" rotWithShape="0" blurRad="101600" dist="25400" dir="8100000">
+            <a:outerShdw blurRad="101600" dist="25400" dir="8100000" algn="bl" rotWithShape="0">
               <a:srgbClr val="000000">
                 <a:alpha val="12000"/>
               </a:srgbClr>
             </a:outerShdw>
           </a:effectLst>
         </p:spPr>
+        <p:txBody>
+          <a:bodyPr/>
+          <a:lstStyle/>
+          <a:p>
+            <a:endParaRPr lang="ja-JP" altLang="en-US"/>
+          </a:p>
+        </p:txBody>
       </p:sp>
       <p:sp>
         <p:nvSpPr>
@@ -8331,7 +8612,7 @@
         </p:nvSpPr>
         <p:spPr>
           <a:xfrm>
-            <a:off x="3383280" y="1920240"/>
+            <a:off x="3383280" y="1563401"/>
             <a:ext cx="2560320" cy="54864"/>
           </a:xfrm>
           <a:prstGeom prst="rect">
@@ -8342,6 +8623,13 @@
           </a:solidFill>
           <a:ln/>
         </p:spPr>
+        <p:txBody>
+          <a:bodyPr/>
+          <a:lstStyle/>
+          <a:p>
+            <a:endParaRPr lang="ja-JP" altLang="en-US"/>
+          </a:p>
+        </p:txBody>
       </p:sp>
       <p:sp>
         <p:nvSpPr>
@@ -8351,7 +8639,7 @@
         </p:nvSpPr>
         <p:spPr>
           <a:xfrm>
-            <a:off x="3520440" y="2011680"/>
+            <a:off x="3520440" y="1654841"/>
             <a:ext cx="914400" cy="274320"/>
           </a:xfrm>
           <a:prstGeom prst="rect">
@@ -8364,7 +8652,7 @@
           <a:bodyPr wrap="square" rtlCol="0" anchor="ctr"/>
           <a:lstStyle/>
           <a:p>
-            <a:pPr indent="0" marL="0">
+            <a:pPr marL="0" indent="0">
               <a:buNone/>
             </a:pPr>
             <a:r>
@@ -8390,7 +8678,7 @@
         </p:nvSpPr>
         <p:spPr>
           <a:xfrm>
-            <a:off x="3520440" y="2286000"/>
+            <a:off x="3520440" y="1929161"/>
             <a:ext cx="2286000" cy="365760"/>
           </a:xfrm>
           <a:prstGeom prst="rect">
@@ -8403,7 +8691,7 @@
           <a:bodyPr wrap="square" rtlCol="0" anchor="ctr"/>
           <a:lstStyle/>
           <a:p>
-            <a:pPr indent="0" marL="0">
+            <a:pPr marL="0" indent="0">
               <a:buNone/>
             </a:pPr>
             <a:r>
@@ -8429,7 +8717,7 @@
         </p:nvSpPr>
         <p:spPr>
           <a:xfrm>
-            <a:off x="3520440" y="2651760"/>
+            <a:off x="3520440" y="2294921"/>
             <a:ext cx="2286000" cy="548640"/>
           </a:xfrm>
           <a:prstGeom prst="rect">
@@ -8442,7 +8730,7 @@
           <a:bodyPr wrap="square" rtlCol="0" anchor="ctr"/>
           <a:lstStyle/>
           <a:p>
-            <a:pPr indent="0" marL="0">
+            <a:pPr marL="0" indent="0">
               <a:lnSpc>
                 <a:spcPct val="130000"/>
               </a:lnSpc>
@@ -8462,7 +8750,7 @@
             <a:endParaRPr lang="en-US" sz="1100" dirty="0"/>
           </a:p>
           <a:p>
-            <a:pPr indent="0" marL="0">
+            <a:pPr marL="0" indent="0">
               <a:lnSpc>
                 <a:spcPct val="130000"/>
               </a:lnSpc>
@@ -8491,7 +8779,7 @@
         </p:nvSpPr>
         <p:spPr>
           <a:xfrm>
-            <a:off x="5943600" y="2286000"/>
+            <a:off x="5943600" y="1929161"/>
             <a:ext cx="274320" cy="457200"/>
           </a:xfrm>
           <a:prstGeom prst="rect">
@@ -8504,7 +8792,7 @@
           <a:bodyPr wrap="square" rtlCol="0" anchor="ctr"/>
           <a:lstStyle/>
           <a:p>
-            <a:pPr algn="ctr" indent="0" marL="0">
+            <a:pPr marL="0" indent="0" algn="ctr">
               <a:buNone/>
             </a:pPr>
             <a:r>
@@ -8530,7 +8818,7 @@
         </p:nvSpPr>
         <p:spPr>
           <a:xfrm>
-            <a:off x="6217920" y="1920240"/>
+            <a:off x="6217920" y="1563401"/>
             <a:ext cx="2560320" cy="1371600"/>
           </a:xfrm>
           <a:prstGeom prst="rect">
@@ -8541,13 +8829,20 @@
           </a:solidFill>
           <a:ln/>
           <a:effectLst>
-            <a:outerShdw sx="100000" sy="100000" kx="0" ky="0" algn="bl" rotWithShape="0" blurRad="101600" dist="25400" dir="8100000">
+            <a:outerShdw blurRad="101600" dist="25400" dir="8100000" algn="bl" rotWithShape="0">
               <a:srgbClr val="000000">
                 <a:alpha val="12000"/>
               </a:srgbClr>
             </a:outerShdw>
           </a:effectLst>
         </p:spPr>
+        <p:txBody>
+          <a:bodyPr/>
+          <a:lstStyle/>
+          <a:p>
+            <a:endParaRPr lang="ja-JP" altLang="en-US"/>
+          </a:p>
+        </p:txBody>
       </p:sp>
       <p:sp>
         <p:nvSpPr>
@@ -8557,7 +8852,7 @@
         </p:nvSpPr>
         <p:spPr>
           <a:xfrm>
-            <a:off x="6217920" y="1920240"/>
+            <a:off x="6217920" y="1563401"/>
             <a:ext cx="2560320" cy="54864"/>
           </a:xfrm>
           <a:prstGeom prst="rect">
@@ -8568,6 +8863,13 @@
           </a:solidFill>
           <a:ln/>
         </p:spPr>
+        <p:txBody>
+          <a:bodyPr/>
+          <a:lstStyle/>
+          <a:p>
+            <a:endParaRPr lang="ja-JP" altLang="en-US"/>
+          </a:p>
+        </p:txBody>
       </p:sp>
       <p:sp>
         <p:nvSpPr>
@@ -8577,7 +8879,7 @@
         </p:nvSpPr>
         <p:spPr>
           <a:xfrm>
-            <a:off x="6355080" y="2011680"/>
+            <a:off x="6355080" y="1654841"/>
             <a:ext cx="914400" cy="274320"/>
           </a:xfrm>
           <a:prstGeom prst="rect">
@@ -8590,7 +8892,7 @@
           <a:bodyPr wrap="square" rtlCol="0" anchor="ctr"/>
           <a:lstStyle/>
           <a:p>
-            <a:pPr indent="0" marL="0">
+            <a:pPr marL="0" indent="0">
               <a:buNone/>
             </a:pPr>
             <a:r>
@@ -8616,7 +8918,7 @@
         </p:nvSpPr>
         <p:spPr>
           <a:xfrm>
-            <a:off x="6355080" y="2286000"/>
+            <a:off x="6355080" y="1929161"/>
             <a:ext cx="2286000" cy="365760"/>
           </a:xfrm>
           <a:prstGeom prst="rect">
@@ -8629,7 +8931,7 @@
           <a:bodyPr wrap="square" rtlCol="0" anchor="ctr"/>
           <a:lstStyle/>
           <a:p>
-            <a:pPr indent="0" marL="0">
+            <a:pPr marL="0" indent="0">
               <a:buNone/>
             </a:pPr>
             <a:r>
@@ -8655,7 +8957,7 @@
         </p:nvSpPr>
         <p:spPr>
           <a:xfrm>
-            <a:off x="6355080" y="2651760"/>
+            <a:off x="6355080" y="2294921"/>
             <a:ext cx="2286000" cy="548640"/>
           </a:xfrm>
           <a:prstGeom prst="rect">
@@ -8668,7 +8970,7 @@
           <a:bodyPr wrap="square" rtlCol="0" anchor="ctr"/>
           <a:lstStyle/>
           <a:p>
-            <a:pPr indent="0" marL="0">
+            <a:pPr marL="0" indent="0">
               <a:lnSpc>
                 <a:spcPct val="130000"/>
               </a:lnSpc>
@@ -8688,7 +8990,7 @@
             <a:endParaRPr lang="en-US" sz="1100" dirty="0"/>
           </a:p>
           <a:p>
-            <a:pPr indent="0" marL="0">
+            <a:pPr marL="0" indent="0">
               <a:lnSpc>
                 <a:spcPct val="130000"/>
               </a:lnSpc>
@@ -8717,7 +9019,7 @@
         </p:nvSpPr>
         <p:spPr>
           <a:xfrm>
-            <a:off x="548640" y="3566160"/>
+            <a:off x="548640" y="3117881"/>
             <a:ext cx="8046720" cy="457200"/>
           </a:xfrm>
           <a:prstGeom prst="rect">
@@ -8730,7 +9032,7 @@
           <a:bodyPr wrap="square" rtlCol="0" anchor="ctr"/>
           <a:lstStyle/>
           <a:p>
-            <a:pPr indent="0" marL="0">
+            <a:pPr marL="0" indent="0">
               <a:buNone/>
             </a:pPr>
             <a:r>
@@ -8756,8 +9058,8 @@
         </p:nvSpPr>
         <p:spPr>
           <a:xfrm>
-            <a:off x="731520" y="4069080"/>
-            <a:ext cx="3657600" cy="320040"/>
+            <a:off x="731520" y="3483641"/>
+            <a:ext cx="3657600" cy="247500"/>
           </a:xfrm>
           <a:prstGeom prst="rect">
             <a:avLst/>
@@ -8774,7 +9076,7 @@
               <a:buChar char="•"/>
             </a:pPr>
             <a:r>
-              <a:rPr lang="en-US" sz="1200" dirty="0">
+              <a:rPr lang="en-US" sz="1100" dirty="0">
                 <a:solidFill>
                   <a:srgbClr val="1E293B"/>
                 </a:solidFill>
@@ -8796,8 +9098,8 @@
         </p:nvSpPr>
         <p:spPr>
           <a:xfrm>
-            <a:off x="731520" y="4389120"/>
-            <a:ext cx="3657600" cy="320040"/>
+            <a:off x="731520" y="3731141"/>
+            <a:ext cx="3657600" cy="247500"/>
           </a:xfrm>
           <a:prstGeom prst="rect">
             <a:avLst/>
@@ -8814,7 +9116,7 @@
               <a:buChar char="•"/>
             </a:pPr>
             <a:r>
-              <a:rPr lang="en-US" sz="1200" dirty="0">
+              <a:rPr lang="en-US" sz="1100" dirty="0">
                 <a:solidFill>
                   <a:srgbClr val="1E293B"/>
                 </a:solidFill>
@@ -8836,8 +9138,8 @@
         </p:nvSpPr>
         <p:spPr>
           <a:xfrm>
-            <a:off x="731520" y="4709160"/>
-            <a:ext cx="3657600" cy="320040"/>
+            <a:off x="731520" y="3978641"/>
+            <a:ext cx="3657600" cy="247500"/>
           </a:xfrm>
           <a:prstGeom prst="rect">
             <a:avLst/>
@@ -8854,7 +9156,7 @@
               <a:buChar char="•"/>
             </a:pPr>
             <a:r>
-              <a:rPr lang="en-US" sz="1200" dirty="0">
+              <a:rPr lang="en-US" sz="1100" dirty="0">
                 <a:solidFill>
                   <a:srgbClr val="1E293B"/>
                 </a:solidFill>
@@ -8876,8 +9178,8 @@
         </p:nvSpPr>
         <p:spPr>
           <a:xfrm>
-            <a:off x="4846320" y="4069080"/>
-            <a:ext cx="3657600" cy="320040"/>
+            <a:off x="4846320" y="3483641"/>
+            <a:ext cx="3657600" cy="247500"/>
           </a:xfrm>
           <a:prstGeom prst="rect">
             <a:avLst/>
@@ -8894,7 +9196,7 @@
               <a:buChar char="•"/>
             </a:pPr>
             <a:r>
-              <a:rPr lang="en-US" sz="1200" dirty="0">
+              <a:rPr lang="en-US" sz="1100" dirty="0">
                 <a:solidFill>
                   <a:srgbClr val="1E293B"/>
                 </a:solidFill>
@@ -8916,8 +9218,8 @@
         </p:nvSpPr>
         <p:spPr>
           <a:xfrm>
-            <a:off x="4846320" y="4389120"/>
-            <a:ext cx="3657600" cy="320040"/>
+            <a:off x="4846320" y="3731141"/>
+            <a:ext cx="3657600" cy="247500"/>
           </a:xfrm>
           <a:prstGeom prst="rect">
             <a:avLst/>
@@ -8934,7 +9236,7 @@
               <a:buChar char="•"/>
             </a:pPr>
             <a:r>
-              <a:rPr lang="en-US" sz="1200" dirty="0">
+              <a:rPr lang="en-US" sz="1100" dirty="0">
                 <a:solidFill>
                   <a:srgbClr val="1E293B"/>
                 </a:solidFill>
@@ -8956,8 +9258,8 @@
         </p:nvSpPr>
         <p:spPr>
           <a:xfrm>
-            <a:off x="4846320" y="4709160"/>
-            <a:ext cx="3657600" cy="320040"/>
+            <a:off x="4846320" y="3978641"/>
+            <a:ext cx="3657600" cy="247500"/>
           </a:xfrm>
           <a:prstGeom prst="rect">
             <a:avLst/>
@@ -8974,7 +9276,7 @@
               <a:buChar char="•"/>
             </a:pPr>
             <a:r>
-              <a:rPr lang="en-US" sz="1200" dirty="0">
+              <a:rPr lang="en-US" sz="1100" dirty="0">
                 <a:solidFill>
                   <a:srgbClr val="1E293B"/>
                 </a:solidFill>
@@ -8985,6 +9287,162 @@
               <a:t>入院創出医の貢献ランキング</a:t>
             </a:r>
             <a:endParaRPr lang="en-US" sz="1200" dirty="0"/>
+          </a:p>
+        </p:txBody>
+      </p:sp>
+      <p:sp>
+        <p:nvSpPr>
+          <p:cNvPr id="30" name="TextBox 29"/>
+          <p:cNvSpPr txBox="1"/>
+          <p:nvPr/>
+        </p:nvSpPr>
+        <p:spPr>
+          <a:xfrm>
+            <a:off x="548640" y="4271861"/>
+            <a:ext cx="8046720" cy="960000"/>
+          </a:xfrm>
+          <a:prstGeom prst="rect">
+            <a:avLst/>
+          </a:prstGeom>
+          <a:noFill/>
+        </p:spPr>
+        <p:txBody>
+          <a:bodyPr wrap="square">
+            <a:spAutoFit/>
+          </a:bodyPr>
+          <a:lstStyle/>
+          <a:p>
+            <a:r>
+              <a:rPr sz="1100" b="1" dirty="0">
+                <a:solidFill>
+                  <a:srgbClr val="1A2744"/>
+                </a:solidFill>
+                <a:latin typeface="Calibri"/>
+              </a:rPr>
+              <a:t>▶ </a:t>
+            </a:r>
+            <a:r>
+              <a:rPr sz="1100" b="1" dirty="0" err="1">
+                <a:solidFill>
+                  <a:srgbClr val="1A2744"/>
+                </a:solidFill>
+                <a:latin typeface="Calibri"/>
+              </a:rPr>
+              <a:t>データから考えられる打ち手の例</a:t>
+            </a:r>
+            <a:endParaRPr sz="1100" b="1" dirty="0">
+              <a:solidFill>
+                <a:srgbClr val="1A2744"/>
+              </a:solidFill>
+              <a:latin typeface="Calibri"/>
+            </a:endParaRPr>
+          </a:p>
+          <a:p>
+            <a:r>
+              <a:rPr sz="1000" dirty="0">
+                <a:solidFill>
+                  <a:srgbClr val="1E293B"/>
+                </a:solidFill>
+                <a:latin typeface="Calibri"/>
+              </a:rPr>
+              <a:t>• </a:t>
+            </a:r>
+            <a:r>
+              <a:rPr sz="1000" dirty="0" err="1">
+                <a:solidFill>
+                  <a:srgbClr val="1E293B"/>
+                </a:solidFill>
+                <a:latin typeface="Calibri"/>
+              </a:rPr>
+              <a:t>入院創出医へのインセンティブ設計と効果検証</a:t>
+            </a:r>
+            <a:endParaRPr sz="1000" dirty="0">
+              <a:solidFill>
+                <a:srgbClr val="1E293B"/>
+              </a:solidFill>
+              <a:latin typeface="Calibri"/>
+            </a:endParaRPr>
+          </a:p>
+          <a:p>
+            <a:r>
+              <a:rPr sz="1000" dirty="0">
+                <a:solidFill>
+                  <a:srgbClr val="1E293B"/>
+                </a:solidFill>
+                <a:latin typeface="Calibri"/>
+              </a:rPr>
+              <a:t>• </a:t>
+            </a:r>
+            <a:r>
+              <a:rPr sz="1000" dirty="0" err="1">
+                <a:solidFill>
+                  <a:srgbClr val="1E293B"/>
+                </a:solidFill>
+                <a:latin typeface="Calibri"/>
+              </a:rPr>
+              <a:t>退院曜日の平準化による週末稼働率の改善</a:t>
+            </a:r>
+            <a:endParaRPr sz="1000" dirty="0">
+              <a:solidFill>
+                <a:srgbClr val="1E293B"/>
+              </a:solidFill>
+              <a:latin typeface="Calibri"/>
+            </a:endParaRPr>
+          </a:p>
+          <a:p>
+            <a:r>
+              <a:rPr sz="1000" dirty="0">
+                <a:solidFill>
+                  <a:srgbClr val="1E293B"/>
+                </a:solidFill>
+                <a:latin typeface="Calibri"/>
+              </a:rPr>
+              <a:t>• </a:t>
+            </a:r>
+            <a:r>
+              <a:rPr sz="1000" dirty="0" err="1">
+                <a:solidFill>
+                  <a:srgbClr val="1E293B"/>
+                </a:solidFill>
+                <a:latin typeface="Calibri"/>
+              </a:rPr>
+              <a:t>入院経路別の強化策（連携室・救急の受入拡大</a:t>
+            </a:r>
+            <a:r>
+              <a:rPr sz="1000" dirty="0">
+                <a:solidFill>
+                  <a:srgbClr val="1E293B"/>
+                </a:solidFill>
+                <a:latin typeface="Calibri"/>
+              </a:rPr>
+              <a:t>）</a:t>
+            </a:r>
+          </a:p>
+          <a:p>
+            <a:r>
+              <a:rPr sz="1000" dirty="0">
+                <a:solidFill>
+                  <a:srgbClr val="1E293B"/>
+                </a:solidFill>
+                <a:latin typeface="Calibri"/>
+              </a:rPr>
+              <a:t>• </a:t>
+            </a:r>
+            <a:r>
+              <a:rPr sz="1000" dirty="0" err="1">
+                <a:solidFill>
+                  <a:srgbClr val="1E293B"/>
+                </a:solidFill>
+                <a:latin typeface="Calibri"/>
+              </a:rPr>
+              <a:t>非常勤医師の入院創出パターン分析と契約条件の見直し</a:t>
+            </a:r>
+            <a:endParaRPr sz="1000" dirty="0">
+              <a:solidFill>
+                <a:srgbClr val="1E293B"/>
+              </a:solidFill>
+              <a:latin typeface="Calibri"/>
+            </a:endParaRPr>
           </a:p>
         </p:txBody>
       </p:sp>
@@ -9004,6 +9462,7 @@
         <a:solidFill>
           <a:srgbClr val="1A2744"/>
         </a:solidFill>
+        <a:effectLst/>
       </p:bgPr>
     </p:bg>
     <p:spTree>
@@ -9041,7 +9500,7 @@
           <a:bodyPr wrap="square" lIns="0" tIns="0" rIns="0" bIns="0" rtlCol="0" anchor="ctr"/>
           <a:lstStyle/>
           <a:p>
-            <a:pPr indent="0" marL="0">
+            <a:pPr marL="0" indent="0">
               <a:buNone/>
             </a:pPr>
             <a:r>
@@ -9078,10 +9537,17 @@
           </a:solidFill>
           <a:ln/>
         </p:spPr>
+        <p:txBody>
+          <a:bodyPr/>
+          <a:lstStyle/>
+          <a:p>
+            <a:endParaRPr lang="ja-JP" altLang="en-US"/>
+          </a:p>
+        </p:txBody>
       </p:sp>
       <p:graphicFrame>
         <p:nvGraphicFramePr>
-          <p:cNvPr id="4" name="Chart 0" descr=""/>
+          <p:cNvPr id="4" name="Chart 0"/>
           <p:cNvGraphicFramePr/>
           <p:nvPr/>
         </p:nvGraphicFramePr>
@@ -9089,9 +9555,9 @@
           <a:off x="548640" y="1188720"/>
           <a:ext cx="5029200" cy="3200400"/>
         </p:xfrm>
-        <a:graphic xmlns:a="http://schemas.openxmlformats.org/drawingml/2006/main">
+        <a:graphic>
           <a:graphicData uri="http://schemas.openxmlformats.org/drawingml/2006/chart">
-            <c:chart xmlns:c="http://schemas.openxmlformats.org/drawingml/2006/chart" r:id="rId1"/>
+            <c:chart xmlns:c="http://schemas.openxmlformats.org/drawingml/2006/chart" xmlns:r="http://schemas.openxmlformats.org/officeDocument/2006/relationships" r:id="rId3"/>
           </a:graphicData>
         </a:graphic>
       </p:graphicFrame>
@@ -9114,6 +9580,13 @@
           </a:solidFill>
           <a:ln/>
         </p:spPr>
+        <p:txBody>
+          <a:bodyPr/>
+          <a:lstStyle/>
+          <a:p>
+            <a:endParaRPr lang="ja-JP" altLang="en-US"/>
+          </a:p>
+        </p:txBody>
       </p:sp>
       <p:sp>
         <p:nvSpPr>
@@ -9123,7 +9596,7 @@
         </p:nvSpPr>
         <p:spPr>
           <a:xfrm>
-            <a:off x="5943600" y="1554480"/>
+            <a:off x="5943600" y="1463040"/>
             <a:ext cx="2926080" cy="365760"/>
           </a:xfrm>
           <a:prstGeom prst="rect">
@@ -9136,7 +9609,7 @@
           <a:bodyPr wrap="square" rtlCol="0" anchor="ctr"/>
           <a:lstStyle/>
           <a:p>
-            <a:pPr algn="ctr" indent="0" marL="0">
+            <a:pPr marL="0" indent="0" algn="ctr">
               <a:buNone/>
             </a:pPr>
             <a:r>
@@ -9162,7 +9635,7 @@
         </p:nvSpPr>
         <p:spPr>
           <a:xfrm>
-            <a:off x="5943600" y="2011680"/>
+            <a:off x="5943600" y="2103120"/>
             <a:ext cx="2926080" cy="914400"/>
           </a:xfrm>
           <a:prstGeom prst="rect">
@@ -9175,7 +9648,7 @@
           <a:bodyPr wrap="square" rtlCol="0" anchor="ctr"/>
           <a:lstStyle/>
           <a:p>
-            <a:pPr algn="ctr" indent="0" marL="0">
+            <a:pPr marL="0" indent="0" algn="ctr">
               <a:buNone/>
             </a:pPr>
             <a:r>
@@ -9201,7 +9674,7 @@
         </p:nvSpPr>
         <p:spPr>
           <a:xfrm>
-            <a:off x="5943600" y="2834640"/>
+            <a:off x="5943600" y="2926080"/>
             <a:ext cx="2926080" cy="365760"/>
           </a:xfrm>
           <a:prstGeom prst="rect">
@@ -9214,7 +9687,7 @@
           <a:bodyPr wrap="square" rtlCol="0" anchor="ctr"/>
           <a:lstStyle/>
           <a:p>
-            <a:pPr algn="ctr" indent="0" marL="0">
+            <a:pPr marL="0" indent="0" algn="ctr">
               <a:buNone/>
             </a:pPr>
             <a:r>
@@ -9240,7 +9713,7 @@
         </p:nvSpPr>
         <p:spPr>
           <a:xfrm>
-            <a:off x="5943600" y="3200400"/>
+            <a:off x="5943600" y="3383280"/>
             <a:ext cx="2926080" cy="365760"/>
           </a:xfrm>
           <a:prstGeom prst="rect">
@@ -9253,7 +9726,7 @@
           <a:bodyPr wrap="square" rtlCol="0" anchor="ctr"/>
           <a:lstStyle/>
           <a:p>
-            <a:pPr algn="ctr" indent="0" marL="0">
+            <a:pPr marL="0" indent="0" algn="ctr">
               <a:buNone/>
             </a:pPr>
             <a:r>
@@ -9292,7 +9765,7 @@
           <a:bodyPr wrap="square" rtlCol="0" anchor="ctr"/>
           <a:lstStyle/>
           <a:p>
-            <a:pPr indent="0" marL="0">
+            <a:pPr marL="0" indent="0">
               <a:buNone/>
             </a:pPr>
             <a:r>
@@ -9304,9 +9777,79 @@
                 <a:ea typeface="Georgia" pitchFamily="34" charset="-122"/>
                 <a:cs typeface="Georgia" pitchFamily="34" charset="-120"/>
               </a:rPr>
-              <a:t>個別は小さくても、積み重ねれば年間黒字額の 63% に相当する改善余地がある。</a:t>
+              <a:t>個別は小さくても、積み重ねれば大きな改善になる。実データの蓄積により、より精緻な試算が可能に。</a:t>
             </a:r>
             <a:endParaRPr lang="en-US" sz="1400" dirty="0"/>
+          </a:p>
+        </p:txBody>
+      </p:sp>
+      <p:sp>
+        <p:nvSpPr>
+          <p:cNvPr id="11" name="TextBox 10"/>
+          <p:cNvSpPr txBox="1"/>
+          <p:nvPr/>
+        </p:nvSpPr>
+        <p:spPr>
+          <a:xfrm>
+            <a:off x="5943600" y="3108960"/>
+            <a:ext cx="2926080" cy="274320"/>
+          </a:xfrm>
+          <a:prstGeom prst="rect">
+            <a:avLst/>
+          </a:prstGeom>
+          <a:noFill/>
+        </p:spPr>
+        <p:txBody>
+          <a:bodyPr wrap="square">
+            <a:spAutoFit/>
+          </a:bodyPr>
+          <a:lstStyle/>
+          <a:p>
+            <a:pPr algn="ctr"/>
+            <a:r>
+              <a:rPr sz="1000" i="1">
+                <a:solidFill>
+                  <a:srgbClr val="94A3B8"/>
+                </a:solidFill>
+                <a:latin typeface="Calibri"/>
+              </a:rPr>
+              <a:t>（デモデータによる試算例）</a:t>
+            </a:r>
+          </a:p>
+        </p:txBody>
+      </p:sp>
+      <p:sp>
+        <p:nvSpPr>
+          <p:cNvPr id="12" name="TextBox 11"/>
+          <p:cNvSpPr txBox="1"/>
+          <p:nvPr/>
+        </p:nvSpPr>
+        <p:spPr>
+          <a:xfrm>
+            <a:off x="5943600" y="1737360"/>
+            <a:ext cx="2926080" cy="365760"/>
+          </a:xfrm>
+          <a:prstGeom prst="rect">
+            <a:avLst/>
+          </a:prstGeom>
+          <a:noFill/>
+        </p:spPr>
+        <p:txBody>
+          <a:bodyPr wrap="square">
+            <a:spAutoFit/>
+          </a:bodyPr>
+          <a:lstStyle/>
+          <a:p>
+            <a:pPr algn="ctr"/>
+            <a:r>
+              <a:rPr sz="850">
+                <a:solidFill>
+                  <a:srgbClr val="94A3B8"/>
+                </a:solidFill>
+                <a:latin typeface="Calibri"/>
+              </a:rPr>
+              <a:t>金曜退院の平準化・空床ラグの短縮・入院経路の拡大など、個別改善策の効果を積み上げた試算値</a:t>
+            </a:r>
           </a:p>
         </p:txBody>
       </p:sp>
@@ -9326,6 +9869,7 @@
         <a:solidFill>
           <a:srgbClr val="F8FAFC"/>
         </a:solidFill>
+        <a:effectLst/>
       </p:bgPr>
     </p:bg>
     <p:spTree>
@@ -9363,7 +9907,7 @@
           <a:bodyPr wrap="square" lIns="0" tIns="0" rIns="0" bIns="0" rtlCol="0" anchor="ctr"/>
           <a:lstStyle/>
           <a:p>
-            <a:pPr indent="0" marL="0">
+            <a:pPr marL="0" indent="0">
               <a:buNone/>
             </a:pPr>
             <a:r>
@@ -9400,6 +9944,13 @@
           </a:solidFill>
           <a:ln/>
         </p:spPr>
+        <p:txBody>
+          <a:bodyPr/>
+          <a:lstStyle/>
+          <a:p>
+            <a:endParaRPr lang="ja-JP" altLang="en-US"/>
+          </a:p>
+        </p:txBody>
       </p:sp>
       <p:sp>
         <p:nvSpPr>
@@ -9422,7 +9973,7 @@
           <a:bodyPr wrap="square" rtlCol="0" anchor="ctr"/>
           <a:lstStyle/>
           <a:p>
-            <a:pPr indent="0" marL="0">
+            <a:pPr marL="0" indent="0">
               <a:buNone/>
             </a:pPr>
             <a:r>
@@ -9459,13 +10010,20 @@
           </a:solidFill>
           <a:ln/>
           <a:effectLst>
-            <a:outerShdw sx="100000" sy="100000" kx="0" ky="0" algn="bl" rotWithShape="0" blurRad="101600" dist="25400" dir="8100000">
+            <a:outerShdw blurRad="101600" dist="25400" dir="8100000" algn="bl" rotWithShape="0">
               <a:srgbClr val="000000">
                 <a:alpha val="12000"/>
               </a:srgbClr>
             </a:outerShdw>
           </a:effectLst>
         </p:spPr>
+        <p:txBody>
+          <a:bodyPr/>
+          <a:lstStyle/>
+          <a:p>
+            <a:endParaRPr lang="ja-JP" altLang="en-US"/>
+          </a:p>
+        </p:txBody>
       </p:sp>
       <p:sp>
         <p:nvSpPr>
@@ -9486,6 +10044,13 @@
           </a:solidFill>
           <a:ln/>
         </p:spPr>
+        <p:txBody>
+          <a:bodyPr/>
+          <a:lstStyle/>
+          <a:p>
+            <a:endParaRPr lang="ja-JP" altLang="en-US"/>
+          </a:p>
+        </p:txBody>
       </p:sp>
       <p:sp>
         <p:nvSpPr>
@@ -9508,7 +10073,7 @@
           <a:bodyPr wrap="square" rtlCol="0" anchor="ctr"/>
           <a:lstStyle/>
           <a:p>
-            <a:pPr algn="ctr" indent="0" marL="0">
+            <a:pPr marL="0" indent="0" algn="ctr">
               <a:buNone/>
             </a:pPr>
             <a:r>
@@ -9547,7 +10112,7 @@
           <a:bodyPr wrap="square" rtlCol="0" anchor="ctr"/>
           <a:lstStyle/>
           <a:p>
-            <a:pPr algn="ctr" indent="0" marL="0">
+            <a:pPr marL="0" indent="0" algn="ctr">
               <a:buNone/>
             </a:pPr>
             <a:r>
@@ -9586,7 +10151,7 @@
           <a:bodyPr wrap="square" rtlCol="0" anchor="ctr"/>
           <a:lstStyle/>
           <a:p>
-            <a:pPr algn="ctr" indent="0" marL="0">
+            <a:pPr marL="0" indent="0" algn="ctr">
               <a:lnSpc>
                 <a:spcPct val="140000"/>
               </a:lnSpc>
@@ -9606,7 +10171,7 @@
             <a:endParaRPr lang="en-US" sz="1200" dirty="0"/>
           </a:p>
           <a:p>
-            <a:pPr algn="ctr" indent="0" marL="0">
+            <a:pPr marL="0" indent="0" algn="ctr">
               <a:lnSpc>
                 <a:spcPct val="140000"/>
               </a:lnSpc>
@@ -9626,7 +10191,7 @@
             <a:endParaRPr lang="en-US" sz="1200" dirty="0"/>
           </a:p>
           <a:p>
-            <a:pPr algn="ctr" indent="0" marL="0">
+            <a:pPr marL="0" indent="0" algn="ctr">
               <a:lnSpc>
                 <a:spcPct val="140000"/>
               </a:lnSpc>
@@ -9635,7 +10200,7 @@
             <a:endParaRPr lang="en-US" sz="1200" dirty="0"/>
           </a:p>
           <a:p>
-            <a:pPr algn="ctr" indent="0" marL="0">
+            <a:pPr marL="0" indent="0" algn="ctr">
               <a:lnSpc>
                 <a:spcPct val="140000"/>
               </a:lnSpc>
@@ -9655,7 +10220,7 @@
             <a:endParaRPr lang="en-US" sz="1200" dirty="0"/>
           </a:p>
           <a:p>
-            <a:pPr algn="ctr" indent="0" marL="0">
+            <a:pPr marL="0" indent="0" algn="ctr">
               <a:lnSpc>
                 <a:spcPct val="140000"/>
               </a:lnSpc>
@@ -9697,7 +10262,7 @@
           <a:bodyPr wrap="square" rtlCol="0" anchor="ctr"/>
           <a:lstStyle/>
           <a:p>
-            <a:pPr algn="ctr" indent="0" marL="0">
+            <a:pPr marL="0" indent="0" algn="ctr">
               <a:buNone/>
             </a:pPr>
             <a:r>
@@ -9734,13 +10299,20 @@
           </a:solidFill>
           <a:ln/>
           <a:effectLst>
-            <a:outerShdw sx="100000" sy="100000" kx="0" ky="0" algn="bl" rotWithShape="0" blurRad="101600" dist="25400" dir="8100000">
+            <a:outerShdw blurRad="101600" dist="25400" dir="8100000" algn="bl" rotWithShape="0">
               <a:srgbClr val="000000">
                 <a:alpha val="12000"/>
               </a:srgbClr>
             </a:outerShdw>
           </a:effectLst>
         </p:spPr>
+        <p:txBody>
+          <a:bodyPr/>
+          <a:lstStyle/>
+          <a:p>
+            <a:endParaRPr lang="ja-JP" altLang="en-US"/>
+          </a:p>
+        </p:txBody>
       </p:sp>
       <p:sp>
         <p:nvSpPr>
@@ -9761,6 +10333,13 @@
           </a:solidFill>
           <a:ln/>
         </p:spPr>
+        <p:txBody>
+          <a:bodyPr/>
+          <a:lstStyle/>
+          <a:p>
+            <a:endParaRPr lang="ja-JP" altLang="en-US"/>
+          </a:p>
+        </p:txBody>
       </p:sp>
       <p:sp>
         <p:nvSpPr>
@@ -9783,7 +10362,7 @@
           <a:bodyPr wrap="square" rtlCol="0" anchor="ctr"/>
           <a:lstStyle/>
           <a:p>
-            <a:pPr algn="ctr" indent="0" marL="0">
+            <a:pPr marL="0" indent="0" algn="ctr">
               <a:buNone/>
             </a:pPr>
             <a:r>
@@ -9822,7 +10401,7 @@
           <a:bodyPr wrap="square" rtlCol="0" anchor="ctr"/>
           <a:lstStyle/>
           <a:p>
-            <a:pPr algn="ctr" indent="0" marL="0">
+            <a:pPr marL="0" indent="0" algn="ctr">
               <a:buNone/>
             </a:pPr>
             <a:r>
@@ -9861,7 +10440,7 @@
           <a:bodyPr wrap="square" rtlCol="0" anchor="ctr"/>
           <a:lstStyle/>
           <a:p>
-            <a:pPr algn="ctr" indent="0" marL="0">
+            <a:pPr marL="0" indent="0" algn="ctr">
               <a:lnSpc>
                 <a:spcPct val="140000"/>
               </a:lnSpc>
@@ -9881,7 +10460,7 @@
             <a:endParaRPr lang="en-US" sz="1200" dirty="0"/>
           </a:p>
           <a:p>
-            <a:pPr algn="ctr" indent="0" marL="0">
+            <a:pPr marL="0" indent="0" algn="ctr">
               <a:lnSpc>
                 <a:spcPct val="140000"/>
               </a:lnSpc>
@@ -9901,7 +10480,7 @@
             <a:endParaRPr lang="en-US" sz="1200" dirty="0"/>
           </a:p>
           <a:p>
-            <a:pPr algn="ctr" indent="0" marL="0">
+            <a:pPr marL="0" indent="0" algn="ctr">
               <a:lnSpc>
                 <a:spcPct val="140000"/>
               </a:lnSpc>
@@ -9910,7 +10489,7 @@
             <a:endParaRPr lang="en-US" sz="1200" dirty="0"/>
           </a:p>
           <a:p>
-            <a:pPr algn="ctr" indent="0" marL="0">
+            <a:pPr marL="0" indent="0" algn="ctr">
               <a:lnSpc>
                 <a:spcPct val="140000"/>
               </a:lnSpc>
@@ -9930,7 +10509,7 @@
             <a:endParaRPr lang="en-US" sz="1200" dirty="0"/>
           </a:p>
           <a:p>
-            <a:pPr algn="ctr" indent="0" marL="0">
+            <a:pPr marL="0" indent="0" algn="ctr">
               <a:lnSpc>
                 <a:spcPct val="140000"/>
               </a:lnSpc>
@@ -9972,7 +10551,7 @@
           <a:bodyPr wrap="square" rtlCol="0" anchor="ctr"/>
           <a:lstStyle/>
           <a:p>
-            <a:pPr algn="ctr" indent="0" marL="0">
+            <a:pPr marL="0" indent="0" algn="ctr">
               <a:buNone/>
             </a:pPr>
             <a:r>
@@ -10009,13 +10588,20 @@
           </a:solidFill>
           <a:ln/>
           <a:effectLst>
-            <a:outerShdw sx="100000" sy="100000" kx="0" ky="0" algn="bl" rotWithShape="0" blurRad="101600" dist="25400" dir="8100000">
+            <a:outerShdw blurRad="101600" dist="25400" dir="8100000" algn="bl" rotWithShape="0">
               <a:srgbClr val="000000">
                 <a:alpha val="12000"/>
               </a:srgbClr>
             </a:outerShdw>
           </a:effectLst>
         </p:spPr>
+        <p:txBody>
+          <a:bodyPr/>
+          <a:lstStyle/>
+          <a:p>
+            <a:endParaRPr lang="ja-JP" altLang="en-US"/>
+          </a:p>
+        </p:txBody>
       </p:sp>
       <p:sp>
         <p:nvSpPr>
@@ -10036,6 +10622,13 @@
           </a:solidFill>
           <a:ln/>
         </p:spPr>
+        <p:txBody>
+          <a:bodyPr/>
+          <a:lstStyle/>
+          <a:p>
+            <a:endParaRPr lang="ja-JP" altLang="en-US"/>
+          </a:p>
+        </p:txBody>
       </p:sp>
       <p:sp>
         <p:nvSpPr>
@@ -10058,7 +10651,7 @@
           <a:bodyPr wrap="square" rtlCol="0" anchor="ctr"/>
           <a:lstStyle/>
           <a:p>
-            <a:pPr algn="ctr" indent="0" marL="0">
+            <a:pPr marL="0" indent="0" algn="ctr">
               <a:buNone/>
             </a:pPr>
             <a:r>
@@ -10097,7 +10690,7 @@
           <a:bodyPr wrap="square" rtlCol="0" anchor="ctr"/>
           <a:lstStyle/>
           <a:p>
-            <a:pPr algn="ctr" indent="0" marL="0">
+            <a:pPr marL="0" indent="0" algn="ctr">
               <a:buNone/>
             </a:pPr>
             <a:r>
@@ -10136,7 +10729,7 @@
           <a:bodyPr wrap="square" rtlCol="0" anchor="ctr"/>
           <a:lstStyle/>
           <a:p>
-            <a:pPr algn="ctr" indent="0" marL="0">
+            <a:pPr marL="0" indent="0" algn="ctr">
               <a:lnSpc>
                 <a:spcPct val="140000"/>
               </a:lnSpc>
@@ -10156,7 +10749,7 @@
             <a:endParaRPr lang="en-US" sz="1200" dirty="0"/>
           </a:p>
           <a:p>
-            <a:pPr algn="ctr" indent="0" marL="0">
+            <a:pPr marL="0" indent="0" algn="ctr">
               <a:lnSpc>
                 <a:spcPct val="140000"/>
               </a:lnSpc>
@@ -10165,7 +10758,7 @@
             <a:endParaRPr lang="en-US" sz="1200" dirty="0"/>
           </a:p>
           <a:p>
-            <a:pPr algn="ctr" indent="0" marL="0">
+            <a:pPr marL="0" indent="0" algn="ctr">
               <a:lnSpc>
                 <a:spcPct val="140000"/>
               </a:lnSpc>
@@ -10180,12 +10773,12 @@
                 <a:ea typeface="Calibri" pitchFamily="34" charset="-122"/>
                 <a:cs typeface="Calibri" pitchFamily="34" charset="-120"/>
               </a:rPr>
-              <a:t>「あなたの退院パターンが</a:t>
+              <a:t>「病棟全体の退院パターンが</a:t>
             </a:r>
             <a:endParaRPr lang="en-US" sz="1200" dirty="0"/>
           </a:p>
           <a:p>
-            <a:pPr algn="ctr" indent="0" marL="0">
+            <a:pPr marL="0" indent="0" algn="ctr">
               <a:lnSpc>
                 <a:spcPct val="140000"/>
               </a:lnSpc>
@@ -10200,12 +10793,12 @@
                 <a:ea typeface="Calibri" pitchFamily="34" charset="-122"/>
                 <a:cs typeface="Calibri" pitchFamily="34" charset="-120"/>
               </a:rPr>
-              <a:t>月○万円の影響です」と</a:t>
+              <a:t>月○万円の影響」と</a:t>
             </a:r>
             <a:endParaRPr lang="en-US" sz="1200" dirty="0"/>
           </a:p>
           <a:p>
-            <a:pPr algn="ctr" indent="0" marL="0">
+            <a:pPr marL="0" indent="0" algn="ctr">
               <a:lnSpc>
                 <a:spcPct val="140000"/>
               </a:lnSpc>
@@ -10527,4 +11120,319 @@
     </a:ext>
   </a:extLst>
 </a:theme>
+</file>
+
+<file path=ppt/theme/theme2.xml><?xml version="1.0" encoding="utf-8"?>
+<a:theme xmlns:a="http://schemas.openxmlformats.org/drawingml/2006/main" name="Office テーマ">
+  <a:themeElements>
+    <a:clrScheme name="Office">
+      <a:dk1>
+        <a:sysClr val="windowText" lastClr="000000"/>
+      </a:dk1>
+      <a:lt1>
+        <a:sysClr val="window" lastClr="FFFFFF"/>
+      </a:lt1>
+      <a:dk2>
+        <a:srgbClr val="0E2841"/>
+      </a:dk2>
+      <a:lt2>
+        <a:srgbClr val="E8E8E8"/>
+      </a:lt2>
+      <a:accent1>
+        <a:srgbClr val="156082"/>
+      </a:accent1>
+      <a:accent2>
+        <a:srgbClr val="E97132"/>
+      </a:accent2>
+      <a:accent3>
+        <a:srgbClr val="196B24"/>
+      </a:accent3>
+      <a:accent4>
+        <a:srgbClr val="0F9ED5"/>
+      </a:accent4>
+      <a:accent5>
+        <a:srgbClr val="A02B93"/>
+      </a:accent5>
+      <a:accent6>
+        <a:srgbClr val="4EA72E"/>
+      </a:accent6>
+      <a:hlink>
+        <a:srgbClr val="467886"/>
+      </a:hlink>
+      <a:folHlink>
+        <a:srgbClr val="96607D"/>
+      </a:folHlink>
+    </a:clrScheme>
+    <a:fontScheme name="Office">
+      <a:majorFont>
+        <a:latin typeface="游ゴシック Light" panose="02110004020202020204"/>
+        <a:ea typeface=""/>
+        <a:cs typeface=""/>
+        <a:font script="Jpan" typeface="游ゴシック Light"/>
+        <a:font script="Hang" typeface="맑은 고딕"/>
+        <a:font script="Hans" typeface="等线 Light"/>
+        <a:font script="Hant" typeface="新細明體"/>
+        <a:font script="Arab" typeface="Times New Roman"/>
+        <a:font script="Hebr" typeface="Times New Roman"/>
+        <a:font script="Thai" typeface="Angsana New"/>
+        <a:font script="Ethi" typeface="Nyala"/>
+        <a:font script="Beng" typeface="Vrinda"/>
+        <a:font script="Gujr" typeface="Shruti"/>
+        <a:font script="Khmr" typeface="MoolBoran"/>
+        <a:font script="Knda" typeface="Tunga"/>
+        <a:font script="Guru" typeface="Raavi"/>
+        <a:font script="Cans" typeface="Euphemia"/>
+        <a:font script="Cher" typeface="Plantagenet Cherokee"/>
+        <a:font script="Yiii" typeface="Microsoft Yi Baiti"/>
+        <a:font script="Tibt" typeface="Microsoft Himalaya"/>
+        <a:font script="Thaa" typeface="MV Boli"/>
+        <a:font script="Deva" typeface="Mangal"/>
+        <a:font script="Telu" typeface="Gautami"/>
+        <a:font script="Taml" typeface="Latha"/>
+        <a:font script="Syrc" typeface="Estrangelo Edessa"/>
+        <a:font script="Orya" typeface="Kalinga"/>
+        <a:font script="Mlym" typeface="Kartika"/>
+        <a:font script="Laoo" typeface="DokChampa"/>
+        <a:font script="Sinh" typeface="Iskoola Pota"/>
+        <a:font script="Mong" typeface="Mongolian Baiti"/>
+        <a:font script="Viet" typeface="Times New Roman"/>
+        <a:font script="Uigh" typeface="Microsoft Uighur"/>
+        <a:font script="Geor" typeface="Sylfaen"/>
+        <a:font script="Armn" typeface="Arial"/>
+        <a:font script="Bugi" typeface="Leelawadee UI"/>
+        <a:font script="Bopo" typeface="Microsoft JhengHei"/>
+        <a:font script="Java" typeface="Javanese Text"/>
+        <a:font script="Lisu" typeface="Segoe UI"/>
+        <a:font script="Mymr" typeface="Myanmar Text"/>
+        <a:font script="Nkoo" typeface="Ebrima"/>
+        <a:font script="Olck" typeface="Nirmala UI"/>
+        <a:font script="Osma" typeface="Ebrima"/>
+        <a:font script="Phag" typeface="Phagspa"/>
+        <a:font script="Syrn" typeface="Estrangelo Edessa"/>
+        <a:font script="Syrj" typeface="Estrangelo Edessa"/>
+        <a:font script="Syre" typeface="Estrangelo Edessa"/>
+        <a:font script="Sora" typeface="Nirmala UI"/>
+        <a:font script="Tale" typeface="Microsoft Tai Le"/>
+        <a:font script="Talu" typeface="Microsoft New Tai Lue"/>
+        <a:font script="Tfng" typeface="Ebrima"/>
+      </a:majorFont>
+      <a:minorFont>
+        <a:latin typeface="游ゴシック" panose="02110004020202020204"/>
+        <a:ea typeface=""/>
+        <a:cs typeface=""/>
+        <a:font script="Jpan" typeface="游ゴシック"/>
+        <a:font script="Hang" typeface="맑은 고딕"/>
+        <a:font script="Hans" typeface="等线"/>
+        <a:font script="Hant" typeface="新細明體"/>
+        <a:font script="Arab" typeface="Arial"/>
+        <a:font script="Hebr" typeface="Arial"/>
+        <a:font script="Thai" typeface="Cordia New"/>
+        <a:font script="Ethi" typeface="Nyala"/>
+        <a:font script="Beng" typeface="Vrinda"/>
+        <a:font script="Gujr" typeface="Shruti"/>
+        <a:font script="Khmr" typeface="DaunPenh"/>
+        <a:font script="Knda" typeface="Tunga"/>
+        <a:font script="Guru" typeface="Raavi"/>
+        <a:font script="Cans" typeface="Euphemia"/>
+        <a:font script="Cher" typeface="Plantagenet Cherokee"/>
+        <a:font script="Yiii" typeface="Microsoft Yi Baiti"/>
+        <a:font script="Tibt" typeface="Microsoft Himalaya"/>
+        <a:font script="Thaa" typeface="MV Boli"/>
+        <a:font script="Deva" typeface="Mangal"/>
+        <a:font script="Telu" typeface="Gautami"/>
+        <a:font script="Taml" typeface="Latha"/>
+        <a:font script="Syrc" typeface="Estrangelo Edessa"/>
+        <a:font script="Orya" typeface="Kalinga"/>
+        <a:font script="Mlym" typeface="Kartika"/>
+        <a:font script="Laoo" typeface="DokChampa"/>
+        <a:font script="Sinh" typeface="Iskoola Pota"/>
+        <a:font script="Mong" typeface="Mongolian Baiti"/>
+        <a:font script="Viet" typeface="Arial"/>
+        <a:font script="Uigh" typeface="Microsoft Uighur"/>
+        <a:font script="Geor" typeface="Sylfaen"/>
+        <a:font script="Armn" typeface="Arial"/>
+        <a:font script="Bugi" typeface="Leelawadee UI"/>
+        <a:font script="Bopo" typeface="Microsoft JhengHei"/>
+        <a:font script="Java" typeface="Javanese Text"/>
+        <a:font script="Lisu" typeface="Segoe UI"/>
+        <a:font script="Mymr" typeface="Myanmar Text"/>
+        <a:font script="Nkoo" typeface="Ebrima"/>
+        <a:font script="Olck" typeface="Nirmala UI"/>
+        <a:font script="Osma" typeface="Ebrima"/>
+        <a:font script="Phag" typeface="Phagspa"/>
+        <a:font script="Syrn" typeface="Estrangelo Edessa"/>
+        <a:font script="Syrj" typeface="Estrangelo Edessa"/>
+        <a:font script="Syre" typeface="Estrangelo Edessa"/>
+        <a:font script="Sora" typeface="Nirmala UI"/>
+        <a:font script="Tale" typeface="Microsoft Tai Le"/>
+        <a:font script="Talu" typeface="Microsoft New Tai Lue"/>
+        <a:font script="Tfng" typeface="Ebrima"/>
+      </a:minorFont>
+    </a:fontScheme>
+    <a:fmtScheme name="Office">
+      <a:fillStyleLst>
+        <a:solidFill>
+          <a:schemeClr val="phClr"/>
+        </a:solidFill>
+        <a:gradFill rotWithShape="1">
+          <a:gsLst>
+            <a:gs pos="0">
+              <a:schemeClr val="phClr">
+                <a:lumMod val="110000"/>
+                <a:satMod val="105000"/>
+                <a:tint val="67000"/>
+              </a:schemeClr>
+            </a:gs>
+            <a:gs pos="50000">
+              <a:schemeClr val="phClr">
+                <a:lumMod val="105000"/>
+                <a:satMod val="103000"/>
+                <a:tint val="73000"/>
+              </a:schemeClr>
+            </a:gs>
+            <a:gs pos="100000">
+              <a:schemeClr val="phClr">
+                <a:lumMod val="105000"/>
+                <a:satMod val="109000"/>
+                <a:tint val="81000"/>
+              </a:schemeClr>
+            </a:gs>
+          </a:gsLst>
+          <a:lin ang="5400000" scaled="0"/>
+        </a:gradFill>
+        <a:gradFill rotWithShape="1">
+          <a:gsLst>
+            <a:gs pos="0">
+              <a:schemeClr val="phClr">
+                <a:satMod val="103000"/>
+                <a:lumMod val="102000"/>
+                <a:tint val="94000"/>
+              </a:schemeClr>
+            </a:gs>
+            <a:gs pos="50000">
+              <a:schemeClr val="phClr">
+                <a:satMod val="110000"/>
+                <a:lumMod val="100000"/>
+                <a:shade val="100000"/>
+              </a:schemeClr>
+            </a:gs>
+            <a:gs pos="100000">
+              <a:schemeClr val="phClr">
+                <a:lumMod val="99000"/>
+                <a:satMod val="120000"/>
+                <a:shade val="78000"/>
+              </a:schemeClr>
+            </a:gs>
+          </a:gsLst>
+          <a:lin ang="5400000" scaled="0"/>
+        </a:gradFill>
+      </a:fillStyleLst>
+      <a:lnStyleLst>
+        <a:ln w="12700" cap="flat" cmpd="sng" algn="ctr">
+          <a:solidFill>
+            <a:schemeClr val="phClr"/>
+          </a:solidFill>
+          <a:prstDash val="solid"/>
+          <a:miter lim="800000"/>
+        </a:ln>
+        <a:ln w="19050" cap="flat" cmpd="sng" algn="ctr">
+          <a:solidFill>
+            <a:schemeClr val="phClr"/>
+          </a:solidFill>
+          <a:prstDash val="solid"/>
+          <a:miter lim="800000"/>
+        </a:ln>
+        <a:ln w="25400" cap="flat" cmpd="sng" algn="ctr">
+          <a:solidFill>
+            <a:schemeClr val="phClr"/>
+          </a:solidFill>
+          <a:prstDash val="solid"/>
+          <a:miter lim="800000"/>
+        </a:ln>
+      </a:lnStyleLst>
+      <a:effectStyleLst>
+        <a:effectStyle>
+          <a:effectLst/>
+        </a:effectStyle>
+        <a:effectStyle>
+          <a:effectLst/>
+        </a:effectStyle>
+        <a:effectStyle>
+          <a:effectLst>
+            <a:outerShdw blurRad="57150" dist="19050" dir="5400000" algn="ctr" rotWithShape="0">
+              <a:srgbClr val="000000">
+                <a:alpha val="63000"/>
+              </a:srgbClr>
+            </a:outerShdw>
+          </a:effectLst>
+        </a:effectStyle>
+      </a:effectStyleLst>
+      <a:bgFillStyleLst>
+        <a:solidFill>
+          <a:schemeClr val="phClr"/>
+        </a:solidFill>
+        <a:solidFill>
+          <a:schemeClr val="phClr">
+            <a:tint val="95000"/>
+            <a:satMod val="170000"/>
+          </a:schemeClr>
+        </a:solidFill>
+        <a:gradFill rotWithShape="1">
+          <a:gsLst>
+            <a:gs pos="0">
+              <a:schemeClr val="phClr">
+                <a:tint val="93000"/>
+                <a:satMod val="150000"/>
+                <a:shade val="98000"/>
+                <a:lumMod val="102000"/>
+              </a:schemeClr>
+            </a:gs>
+            <a:gs pos="50000">
+              <a:schemeClr val="phClr">
+                <a:tint val="98000"/>
+                <a:satMod val="130000"/>
+                <a:shade val="90000"/>
+                <a:lumMod val="103000"/>
+              </a:schemeClr>
+            </a:gs>
+            <a:gs pos="100000">
+              <a:schemeClr val="phClr">
+                <a:shade val="63000"/>
+                <a:satMod val="120000"/>
+              </a:schemeClr>
+            </a:gs>
+          </a:gsLst>
+          <a:lin ang="5400000" scaled="0"/>
+        </a:gradFill>
+      </a:bgFillStyleLst>
+    </a:fmtScheme>
+  </a:themeElements>
+  <a:objectDefaults>
+    <a:lnDef>
+      <a:spPr/>
+      <a:bodyPr/>
+      <a:lstStyle/>
+      <a:style>
+        <a:lnRef idx="2">
+          <a:schemeClr val="accent1"/>
+        </a:lnRef>
+        <a:fillRef idx="0">
+          <a:schemeClr val="accent1"/>
+        </a:fillRef>
+        <a:effectRef idx="1">
+          <a:schemeClr val="accent1"/>
+        </a:effectRef>
+        <a:fontRef idx="minor">
+          <a:schemeClr val="tx1"/>
+        </a:fontRef>
+      </a:style>
+    </a:lnDef>
+  </a:objectDefaults>
+  <a:extraClrSchemeLst/>
+  <a:extLst>
+    <a:ext uri="{05A4C25C-085E-4340-85A3-A5531E510DB2}">
+      <thm15:themeFamily xmlns:thm15="http://schemas.microsoft.com/office/thememl/2012/main" name="Office Theme" id="{2E142A2C-CD16-42D6-873A-C26D2A0506FA}" vid="{1BDDFF52-6CD6-40A5-AB3C-68EB2F1E4D0A}"/>
+    </a:ext>
+  </a:extLst>
+</a:theme>
 </file>
--- a/docs/admin/bed_control_evolution_presentation.pptx
+++ b/docs/admin/bed_control_evolution_presentation.pptx
@@ -17,6 +17,7 @@
     <p:sldId id="262" r:id="rId8"/>
     <p:sldId id="263" r:id="rId9"/>
     <p:sldId id="264" r:id="rId10"/>
+    <p:sldId id="267" r:id="rId18"/>
     <p:sldId id="265" r:id="rId11"/>
     <p:sldId id="266" r:id="rId12"/>
   </p:sldIdLst>
@@ -3665,6 +3666,398 @@
               <a:t>おもろまちメディカルセンター  |  ベッドコントロールシミュレーター v3.0</a:t>
             </a:r>
             <a:endParaRPr lang="en-US" sz="1400" dirty="0"/>
+          </a:p>
+        </p:txBody>
+      </p:sp>
+    </p:spTree>
+  </p:cSld>
+  <p:clrMapOvr>
+    <a:masterClrMapping/>
+  </p:clrMapOvr>
+</p:sld>
+</file>
+
+<file path=ppt/slides/slide12.xml><?xml version="1.0" encoding="utf-8"?>
+<p:sld xmlns:a="http://schemas.openxmlformats.org/drawingml/2006/main" xmlns:p="http://schemas.openxmlformats.org/presentationml/2006/main" xmlns:r="http://schemas.openxmlformats.org/officeDocument/2006/relationships">
+  <p:cSld>
+    <p:spTree>
+      <p:nvGrpSpPr>
+        <p:cNvPr id="1" name=""/>
+        <p:cNvGrpSpPr/>
+        <p:nvPr/>
+      </p:nvGrpSpPr>
+      <p:grpSpPr/>
+      <p:sp>
+        <p:nvSpPr>
+          <p:cNvPr id="2" name="TextBox 1"/>
+          <p:cNvSpPr txBox="1"/>
+          <p:nvPr/>
+        </p:nvSpPr>
+        <p:spPr>
+          <a:xfrm>
+            <a:off x="731520" y="365760"/>
+            <a:ext cx="2743200" cy="457200"/>
+          </a:xfrm>
+          <a:prstGeom prst="rect">
+            <a:avLst/>
+          </a:prstGeom>
+          <a:noFill/>
+        </p:spPr>
+        <p:txBody>
+          <a:bodyPr wrap="square">
+            <a:spAutoFit/>
+          </a:bodyPr>
+          <a:lstStyle/>
+          <a:p>
+            <a:pPr>
+              <a:defRPr sz="1400" b="0">
+                <a:solidFill>
+                  <a:srgbClr val="666666"/>
+                </a:solidFill>
+              </a:defRPr>
+            </a:pPr>
+            <a:r>
+              <a:t>新機能 4</a:t>
+            </a:r>
+          </a:p>
+        </p:txBody>
+      </p:sp>
+      <p:sp>
+        <p:nvSpPr>
+          <p:cNvPr id="3" name="TextBox 2"/>
+          <p:cNvSpPr txBox="1"/>
+          <p:nvPr/>
+        </p:nvSpPr>
+        <p:spPr>
+          <a:xfrm>
+            <a:off x="731520" y="777240"/>
+            <a:ext cx="7315200" cy="548640"/>
+          </a:xfrm>
+          <a:prstGeom prst="rect">
+            <a:avLst/>
+          </a:prstGeom>
+          <a:noFill/>
+        </p:spPr>
+        <p:txBody>
+          <a:bodyPr wrap="square">
+            <a:spAutoFit/>
+          </a:bodyPr>
+          <a:lstStyle/>
+          <a:p>
+            <a:pPr>
+              <a:defRPr sz="2800" b="1">
+                <a:solidFill>
+                  <a:srgbClr val="1A1A2E"/>
+                </a:solidFill>
+              </a:defRPr>
+            </a:pPr>
+            <a:r>
+              <a:t>HOPE連携 — 数字を、行動に変える。</a:t>
+            </a:r>
+          </a:p>
+        </p:txBody>
+      </p:sp>
+      <p:sp>
+        <p:nvSpPr>
+          <p:cNvPr id="4" name="TextBox 3"/>
+          <p:cNvSpPr txBox="1"/>
+          <p:nvPr/>
+        </p:nvSpPr>
+        <p:spPr>
+          <a:xfrm>
+            <a:off x="731520" y="1554480"/>
+            <a:ext cx="7680960" cy="457200"/>
+          </a:xfrm>
+          <a:prstGeom prst="rect">
+            <a:avLst/>
+          </a:prstGeom>
+          <a:noFill/>
+        </p:spPr>
+        <p:txBody>
+          <a:bodyPr wrap="square">
+            <a:spAutoFit/>
+          </a:bodyPr>
+          <a:lstStyle/>
+          <a:p>
+            <a:pPr>
+              <a:defRPr sz="1300">
+                <a:solidFill>
+                  <a:srgbClr val="555555"/>
+                </a:solidFill>
+              </a:defRPr>
+            </a:pPr>
+            <a:r>
+              <a:t>アプリが生成した病床サマリーを、HOPE電子カルテのToDoで医師に直接届ける</a:t>
+            </a:r>
+          </a:p>
+        </p:txBody>
+      </p:sp>
+      <p:sp>
+        <p:nvSpPr>
+          <p:cNvPr id="5" name="TextBox 4"/>
+          <p:cNvSpPr txBox="1"/>
+          <p:nvPr/>
+        </p:nvSpPr>
+        <p:spPr>
+          <a:xfrm>
+            <a:off x="457200" y="2286000"/>
+            <a:ext cx="3931920" cy="365760"/>
+          </a:xfrm>
+          <a:prstGeom prst="rect">
+            <a:avLst/>
+          </a:prstGeom>
+          <a:noFill/>
+        </p:spPr>
+        <p:txBody>
+          <a:bodyPr wrap="square">
+            <a:spAutoFit/>
+          </a:bodyPr>
+          <a:lstStyle/>
+          <a:p>
+            <a:pPr>
+              <a:defRPr sz="1500" b="1">
+                <a:solidFill>
+                  <a:srgbClr val="2D5BA0"/>
+                </a:solidFill>
+              </a:defRPr>
+            </a:pPr>
+            <a:r>
+              <a:t>① 全体サマリー（全員向け）</a:t>
+            </a:r>
+          </a:p>
+        </p:txBody>
+      </p:sp>
+      <p:sp>
+        <p:nvSpPr>
+          <p:cNvPr id="6" name="TextBox 5"/>
+          <p:cNvSpPr txBox="1"/>
+          <p:nvPr/>
+        </p:nvSpPr>
+        <p:spPr>
+          <a:xfrm>
+            <a:off x="457200" y="2743200"/>
+            <a:ext cx="3931920" cy="2286000"/>
+          </a:xfrm>
+          <a:prstGeom prst="rect">
+            <a:avLst/>
+          </a:prstGeom>
+          <a:noFill/>
+        </p:spPr>
+        <p:txBody>
+          <a:bodyPr wrap="square">
+            <a:spAutoFit/>
+          </a:bodyPr>
+          <a:lstStyle/>
+          <a:p>
+            <a:pPr>
+              <a:defRPr sz="1000">
+                <a:solidFill>
+                  <a:srgbClr val="333333"/>
+                </a:solidFill>
+                <a:latin typeface="Courier New"/>
+              </a:defRPr>
+            </a:pPr>
+            <a:r>
+              <a:t>【病床管理】4/5</a:t>
+            </a:r>
+            <a:br/>
+            <a:r>
+              <a:t>全体88/94床(93.6%)</a:t>
+            </a:r>
+            <a:br/>
+            <a:r>
+              <a:t>5F:40/47床(85.1%) 空7床</a:t>
+            </a:r>
+            <a:br/>
+            <a:r>
+              <a:t>6F:46/47床(97.9%) 残1床⚠</a:t>
+            </a:r>
+            <a:br/>
+            <a:r>
+              <a:t>本日 入院5 退院4 純増+1</a:t>
+            </a:r>
+            <a:br/>
+            <a:br/>
+            <a:r>
+              <a:t>6F満床近く入院制限中</a:t>
+            </a:r>
+            <a:br/>
+            <a:r>
+              <a:t>5Fは受入余力あり</a:t>
+            </a:r>
+            <a:br/>
+            <a:r>
+              <a:t>（病床管理室）</a:t>
+            </a:r>
+          </a:p>
+        </p:txBody>
+      </p:sp>
+      <p:sp>
+        <p:nvSpPr>
+          <p:cNvPr id="7" name="TextBox 6"/>
+          <p:cNvSpPr txBox="1"/>
+          <p:nvPr/>
+        </p:nvSpPr>
+        <p:spPr>
+          <a:xfrm>
+            <a:off x="4754880" y="2286000"/>
+            <a:ext cx="3931920" cy="365760"/>
+          </a:xfrm>
+          <a:prstGeom prst="rect">
+            <a:avLst/>
+          </a:prstGeom>
+          <a:noFill/>
+        </p:spPr>
+        <p:txBody>
+          <a:bodyPr wrap="square">
+            <a:spAutoFit/>
+          </a:bodyPr>
+          <a:lstStyle/>
+          <a:p>
+            <a:pPr>
+              <a:defRPr sz="1500" b="1">
+                <a:solidFill>
+                  <a:srgbClr val="A02D2D"/>
+                </a:solidFill>
+              </a:defRPr>
+            </a:pPr>
+            <a:r>
+              <a:t>② 医師別 退院調整依頼</a:t>
+            </a:r>
+          </a:p>
+        </p:txBody>
+      </p:sp>
+      <p:sp>
+        <p:nvSpPr>
+          <p:cNvPr id="8" name="TextBox 7"/>
+          <p:cNvSpPr txBox="1"/>
+          <p:nvPr/>
+        </p:nvSpPr>
+        <p:spPr>
+          <a:xfrm>
+            <a:off x="4754880" y="2743200"/>
+            <a:ext cx="3931920" cy="2286000"/>
+          </a:xfrm>
+          <a:prstGeom prst="rect">
+            <a:avLst/>
+          </a:prstGeom>
+          <a:noFill/>
+        </p:spPr>
+        <p:txBody>
+          <a:bodyPr wrap="square">
+            <a:spAutoFit/>
+          </a:bodyPr>
+          <a:lstStyle/>
+          <a:p>
+            <a:pPr>
+              <a:defRPr sz="1000">
+                <a:solidFill>
+                  <a:srgbClr val="333333"/>
+                </a:solidFill>
+                <a:latin typeface="Courier New"/>
+              </a:defRPr>
+            </a:pPr>
+            <a:r>
+              <a:t>【退院調整のご相談】4/5</a:t>
+            </a:r>
+            <a:br/>
+            <a:r>
+              <a:t>○○先生</a:t>
+            </a:r>
+            <a:br/>
+            <a:br/>
+            <a:r>
+              <a:t>担当患者で在院21日以上の方:</a:t>
+            </a:r>
+            <a:br/>
+            <a:r>
+              <a:t>・6F 入院3/15 在院21日目</a:t>
+            </a:r>
+            <a:br/>
+            <a:r>
+              <a:t>・6F 入院3/10 在院26日目</a:t>
+            </a:r>
+            <a:br/>
+            <a:br/>
+            <a:r>
+              <a:t>現在6F稼働率97.9%(残1床)で</a:t>
+            </a:r>
+            <a:br/>
+            <a:r>
+              <a:t>新規入院の受入が困難な状況です。</a:t>
+            </a:r>
+            <a:br/>
+            <a:br/>
+            <a:r>
+              <a:t>退院・転院の見通しをお知らせ</a:t>
+            </a:r>
+            <a:br/>
+            <a:r>
+              <a:t>ください。</a:t>
+            </a:r>
+            <a:br/>
+            <a:r>
+              <a:t>（病床管理室）</a:t>
+            </a:r>
+          </a:p>
+        </p:txBody>
+      </p:sp>
+      <p:sp>
+        <p:nvSpPr>
+          <p:cNvPr id="9" name="TextBox 8"/>
+          <p:cNvSpPr txBox="1"/>
+          <p:nvPr/>
+        </p:nvSpPr>
+        <p:spPr>
+          <a:xfrm>
+            <a:off x="731520" y="5120640"/>
+            <a:ext cx="7680960" cy="914400"/>
+          </a:xfrm>
+          <a:prstGeom prst="rect">
+            <a:avLst/>
+          </a:prstGeom>
+          <a:noFill/>
+        </p:spPr>
+        <p:txBody>
+          <a:bodyPr wrap="square">
+            <a:spAutoFit/>
+          </a:bodyPr>
+          <a:lstStyle/>
+          <a:p>
+            <a:pPr>
+              <a:defRPr sz="1100">
+                <a:solidFill>
+                  <a:srgbClr val="444444"/>
+                </a:solidFill>
+              </a:defRPr>
+            </a:pPr>
+            <a:r>
+              <a:t>✓  400文字以内で自動生成 → コピーボタンでワンクリックコピー → HOPEに貼り付けて送信</a:t>
+            </a:r>
+          </a:p>
+          <a:p>
+            <a:pPr>
+              <a:defRPr sz="1100">
+                <a:solidFill>
+                  <a:srgbClr val="444444"/>
+                </a:solidFill>
+              </a:defRPr>
+            </a:pPr>
+            <a:r>
+              <a:t>✓  患者個人情報は一切含まない（入院日と在院日数のみ）</a:t>
+            </a:r>
+          </a:p>
+          <a:p>
+            <a:pPr>
+              <a:defRPr sz="1100">
+                <a:solidFill>
+                  <a:srgbClr val="444444"/>
+                </a:solidFill>
+              </a:defRPr>
+            </a:pPr>
+            <a:r>
+              <a:t>✓  院内LAN完結 — インターネット接続不要</a:t>
+            </a:r>
           </a:p>
         </p:txBody>
       </p:sp>

--- a/docs/admin/bed_control_evolution_presentation.pptx
+++ b/docs/admin/bed_control_evolution_presentation.pptx
@@ -146,7 +146,7 @@
               <c:strCache>
                 <c:ptCount val="1"/>
                 <c:pt idx="0">
-                  <c:v>改善効果（万円/年）</c:v>
+                  <c:v>改善額（万円）</c:v>
                 </c:pt>
               </c:strCache>
             </c:strRef>
@@ -226,16 +226,16 @@
                 <c:formatCode>General</c:formatCode>
                 <c:ptCount val="4"/>
                 <c:pt idx="0">
-                  <c:v>576</c:v>
+                  <c:v>314</c:v>
                 </c:pt>
                 <c:pt idx="1">
-                  <c:v>334</c:v>
+                  <c:v>209</c:v>
                 </c:pt>
                 <c:pt idx="2">
-                  <c:v>890</c:v>
+                  <c:v>314</c:v>
                 </c:pt>
                 <c:pt idx="3">
-                  <c:v>445</c:v>
+                  <c:v>209</c:v>
                 </c:pt>
               </c:numCache>
             </c:numRef>
@@ -1966,6 +1966,398 @@
 </file>
 
 <file path=ppt/slides/slide10.xml><?xml version="1.0" encoding="utf-8"?>
+<p:sld xmlns:a="http://schemas.openxmlformats.org/drawingml/2006/main" xmlns:p="http://schemas.openxmlformats.org/presentationml/2006/main" xmlns:r="http://schemas.openxmlformats.org/officeDocument/2006/relationships">
+  <p:cSld>
+    <p:spTree>
+      <p:nvGrpSpPr>
+        <p:cNvPr id="1" name=""/>
+        <p:cNvGrpSpPr/>
+        <p:nvPr/>
+      </p:nvGrpSpPr>
+      <p:grpSpPr/>
+      <p:sp>
+        <p:nvSpPr>
+          <p:cNvPr id="2" name="TextBox 1"/>
+          <p:cNvSpPr txBox="1"/>
+          <p:nvPr/>
+        </p:nvSpPr>
+        <p:spPr>
+          <a:xfrm>
+            <a:off x="731520" y="365760"/>
+            <a:ext cx="2743200" cy="457200"/>
+          </a:xfrm>
+          <a:prstGeom prst="rect">
+            <a:avLst/>
+          </a:prstGeom>
+          <a:noFill/>
+        </p:spPr>
+        <p:txBody>
+          <a:bodyPr wrap="square">
+            <a:spAutoFit/>
+          </a:bodyPr>
+          <a:lstStyle/>
+          <a:p>
+            <a:pPr>
+              <a:defRPr sz="1400" b="0">
+                <a:solidFill>
+                  <a:srgbClr val="666666"/>
+                </a:solidFill>
+              </a:defRPr>
+            </a:pPr>
+            <a:r>
+              <a:t>新機能 4</a:t>
+            </a:r>
+          </a:p>
+        </p:txBody>
+      </p:sp>
+      <p:sp>
+        <p:nvSpPr>
+          <p:cNvPr id="3" name="TextBox 2"/>
+          <p:cNvSpPr txBox="1"/>
+          <p:nvPr/>
+        </p:nvSpPr>
+        <p:spPr>
+          <a:xfrm>
+            <a:off x="731520" y="777240"/>
+            <a:ext cx="7315200" cy="548640"/>
+          </a:xfrm>
+          <a:prstGeom prst="rect">
+            <a:avLst/>
+          </a:prstGeom>
+          <a:noFill/>
+        </p:spPr>
+        <p:txBody>
+          <a:bodyPr wrap="square">
+            <a:spAutoFit/>
+          </a:bodyPr>
+          <a:lstStyle/>
+          <a:p>
+            <a:pPr>
+              <a:defRPr sz="2800" b="1">
+                <a:solidFill>
+                  <a:srgbClr val="1A1A2E"/>
+                </a:solidFill>
+              </a:defRPr>
+            </a:pPr>
+            <a:r>
+              <a:t>HOPE連携 — 数字を、行動に変える。</a:t>
+            </a:r>
+          </a:p>
+        </p:txBody>
+      </p:sp>
+      <p:sp>
+        <p:nvSpPr>
+          <p:cNvPr id="4" name="TextBox 3"/>
+          <p:cNvSpPr txBox="1"/>
+          <p:nvPr/>
+        </p:nvSpPr>
+        <p:spPr>
+          <a:xfrm>
+            <a:off x="731520" y="1554480"/>
+            <a:ext cx="7680960" cy="457200"/>
+          </a:xfrm>
+          <a:prstGeom prst="rect">
+            <a:avLst/>
+          </a:prstGeom>
+          <a:noFill/>
+        </p:spPr>
+        <p:txBody>
+          <a:bodyPr wrap="square">
+            <a:spAutoFit/>
+          </a:bodyPr>
+          <a:lstStyle/>
+          <a:p>
+            <a:pPr>
+              <a:defRPr sz="1300">
+                <a:solidFill>
+                  <a:srgbClr val="555555"/>
+                </a:solidFill>
+              </a:defRPr>
+            </a:pPr>
+            <a:r>
+              <a:t>アプリが生成した病床サマリーを、HOPE電子カルテのToDoで医師に直接届ける</a:t>
+            </a:r>
+          </a:p>
+        </p:txBody>
+      </p:sp>
+      <p:sp>
+        <p:nvSpPr>
+          <p:cNvPr id="5" name="TextBox 4"/>
+          <p:cNvSpPr txBox="1"/>
+          <p:nvPr/>
+        </p:nvSpPr>
+        <p:spPr>
+          <a:xfrm>
+            <a:off x="457200" y="2286000"/>
+            <a:ext cx="3931920" cy="365760"/>
+          </a:xfrm>
+          <a:prstGeom prst="rect">
+            <a:avLst/>
+          </a:prstGeom>
+          <a:noFill/>
+        </p:spPr>
+        <p:txBody>
+          <a:bodyPr wrap="square">
+            <a:spAutoFit/>
+          </a:bodyPr>
+          <a:lstStyle/>
+          <a:p>
+            <a:pPr>
+              <a:defRPr sz="1500" b="1">
+                <a:solidFill>
+                  <a:srgbClr val="2D5BA0"/>
+                </a:solidFill>
+              </a:defRPr>
+            </a:pPr>
+            <a:r>
+              <a:t>① 全体サマリー（全員向け）</a:t>
+            </a:r>
+          </a:p>
+        </p:txBody>
+      </p:sp>
+      <p:sp>
+        <p:nvSpPr>
+          <p:cNvPr id="6" name="TextBox 5"/>
+          <p:cNvSpPr txBox="1"/>
+          <p:nvPr/>
+        </p:nvSpPr>
+        <p:spPr>
+          <a:xfrm>
+            <a:off x="457200" y="2743200"/>
+            <a:ext cx="3931920" cy="2286000"/>
+          </a:xfrm>
+          <a:prstGeom prst="rect">
+            <a:avLst/>
+          </a:prstGeom>
+          <a:noFill/>
+        </p:spPr>
+        <p:txBody>
+          <a:bodyPr wrap="square">
+            <a:spAutoFit/>
+          </a:bodyPr>
+          <a:lstStyle/>
+          <a:p>
+            <a:pPr>
+              <a:defRPr sz="1000">
+                <a:solidFill>
+                  <a:srgbClr val="333333"/>
+                </a:solidFill>
+                <a:latin typeface="Courier New"/>
+              </a:defRPr>
+            </a:pPr>
+            <a:r>
+              <a:t>【病床管理】4/5</a:t>
+            </a:r>
+            <a:br/>
+            <a:r>
+              <a:t>全体88/94床(93.6%)</a:t>
+            </a:r>
+            <a:br/>
+            <a:r>
+              <a:t>5F:40/47床(85.1%) 空7床</a:t>
+            </a:r>
+            <a:br/>
+            <a:r>
+              <a:t>6F:46/47床(97.9%) 残1床⚠</a:t>
+            </a:r>
+            <a:br/>
+            <a:r>
+              <a:t>本日 入院5 退院4 純増+1</a:t>
+            </a:r>
+            <a:br/>
+            <a:br/>
+            <a:r>
+              <a:t>6F満床近く入院制限中</a:t>
+            </a:r>
+            <a:br/>
+            <a:r>
+              <a:t>5Fは受入余力あり</a:t>
+            </a:r>
+            <a:br/>
+            <a:r>
+              <a:t>（病床管理室）</a:t>
+            </a:r>
+          </a:p>
+        </p:txBody>
+      </p:sp>
+      <p:sp>
+        <p:nvSpPr>
+          <p:cNvPr id="7" name="TextBox 6"/>
+          <p:cNvSpPr txBox="1"/>
+          <p:nvPr/>
+        </p:nvSpPr>
+        <p:spPr>
+          <a:xfrm>
+            <a:off x="4754880" y="2286000"/>
+            <a:ext cx="3931920" cy="365760"/>
+          </a:xfrm>
+          <a:prstGeom prst="rect">
+            <a:avLst/>
+          </a:prstGeom>
+          <a:noFill/>
+        </p:spPr>
+        <p:txBody>
+          <a:bodyPr wrap="square">
+            <a:spAutoFit/>
+          </a:bodyPr>
+          <a:lstStyle/>
+          <a:p>
+            <a:pPr>
+              <a:defRPr sz="1500" b="1">
+                <a:solidFill>
+                  <a:srgbClr val="A02D2D"/>
+                </a:solidFill>
+              </a:defRPr>
+            </a:pPr>
+            <a:r>
+              <a:t>② 医師別 退院調整依頼</a:t>
+            </a:r>
+          </a:p>
+        </p:txBody>
+      </p:sp>
+      <p:sp>
+        <p:nvSpPr>
+          <p:cNvPr id="8" name="TextBox 7"/>
+          <p:cNvSpPr txBox="1"/>
+          <p:nvPr/>
+        </p:nvSpPr>
+        <p:spPr>
+          <a:xfrm>
+            <a:off x="4754880" y="2743200"/>
+            <a:ext cx="3931920" cy="2286000"/>
+          </a:xfrm>
+          <a:prstGeom prst="rect">
+            <a:avLst/>
+          </a:prstGeom>
+          <a:noFill/>
+        </p:spPr>
+        <p:txBody>
+          <a:bodyPr wrap="square">
+            <a:spAutoFit/>
+          </a:bodyPr>
+          <a:lstStyle/>
+          <a:p>
+            <a:pPr>
+              <a:defRPr sz="1000">
+                <a:solidFill>
+                  <a:srgbClr val="333333"/>
+                </a:solidFill>
+                <a:latin typeface="Courier New"/>
+              </a:defRPr>
+            </a:pPr>
+            <a:r>
+              <a:t>【退院調整のご相談】4/5</a:t>
+            </a:r>
+            <a:br/>
+            <a:r>
+              <a:t>○○先生</a:t>
+            </a:r>
+            <a:br/>
+            <a:br/>
+            <a:r>
+              <a:t>担当患者で在院21日以上の方:</a:t>
+            </a:r>
+            <a:br/>
+            <a:r>
+              <a:t>・6F 入院3/15 在院21日目</a:t>
+            </a:r>
+            <a:br/>
+            <a:r>
+              <a:t>・6F 入院3/10 在院26日目</a:t>
+            </a:r>
+            <a:br/>
+            <a:br/>
+            <a:r>
+              <a:t>現在6F稼働率97.9%(残1床)で</a:t>
+            </a:r>
+            <a:br/>
+            <a:r>
+              <a:t>新規入院の受入が困難な状況です。</a:t>
+            </a:r>
+            <a:br/>
+            <a:br/>
+            <a:r>
+              <a:t>退院・転院の見通しをお知らせ</a:t>
+            </a:r>
+            <a:br/>
+            <a:r>
+              <a:t>ください。</a:t>
+            </a:r>
+            <a:br/>
+            <a:r>
+              <a:t>（病床管理室）</a:t>
+            </a:r>
+          </a:p>
+        </p:txBody>
+      </p:sp>
+      <p:sp>
+        <p:nvSpPr>
+          <p:cNvPr id="9" name="TextBox 8"/>
+          <p:cNvSpPr txBox="1"/>
+          <p:nvPr/>
+        </p:nvSpPr>
+        <p:spPr>
+          <a:xfrm>
+            <a:off x="731520" y="5120640"/>
+            <a:ext cx="7680960" cy="914400"/>
+          </a:xfrm>
+          <a:prstGeom prst="rect">
+            <a:avLst/>
+          </a:prstGeom>
+          <a:noFill/>
+        </p:spPr>
+        <p:txBody>
+          <a:bodyPr wrap="square">
+            <a:spAutoFit/>
+          </a:bodyPr>
+          <a:lstStyle/>
+          <a:p>
+            <a:pPr>
+              <a:defRPr sz="1100">
+                <a:solidFill>
+                  <a:srgbClr val="444444"/>
+                </a:solidFill>
+              </a:defRPr>
+            </a:pPr>
+            <a:r>
+              <a:t>✓  400文字以内で自動生成 → コピーボタンでワンクリックコピー → HOPEに貼り付けて送信</a:t>
+            </a:r>
+          </a:p>
+          <a:p>
+            <a:pPr>
+              <a:defRPr sz="1100">
+                <a:solidFill>
+                  <a:srgbClr val="444444"/>
+                </a:solidFill>
+              </a:defRPr>
+            </a:pPr>
+            <a:r>
+              <a:t>✓  患者個人情報は一切含まない（入院日と在院日数のみ）</a:t>
+            </a:r>
+          </a:p>
+          <a:p>
+            <a:pPr>
+              <a:defRPr sz="1100">
+                <a:solidFill>
+                  <a:srgbClr val="444444"/>
+                </a:solidFill>
+              </a:defRPr>
+            </a:pPr>
+            <a:r>
+              <a:t>✓  院内LAN完結 — インターネット接続不要</a:t>
+            </a:r>
+          </a:p>
+        </p:txBody>
+      </p:sp>
+    </p:spTree>
+  </p:cSld>
+  <p:clrMapOvr>
+    <a:masterClrMapping/>
+  </p:clrMapOvr>
+</p:sld>
+</file>
+
+<file path=ppt/slides/slide11.xml><?xml version="1.0" encoding="utf-8"?>
 <p:sld xmlns:a="http://schemas.openxmlformats.org/drawingml/2006/main" xmlns:r="http://schemas.openxmlformats.org/officeDocument/2006/relationships" xmlns:p="http://schemas.openxmlformats.org/presentationml/2006/main">
   <p:cSld name="Slide 10">
     <p:bg>
@@ -3143,7 +3535,7 @@
 </p:sld>
 </file>
 
-<file path=ppt/slides/slide11.xml><?xml version="1.0" encoding="utf-8"?>
+<file path=ppt/slides/slide12.xml><?xml version="1.0" encoding="utf-8"?>
 <p:sld xmlns:a="http://schemas.openxmlformats.org/drawingml/2006/main" xmlns:r="http://schemas.openxmlformats.org/officeDocument/2006/relationships" xmlns:p="http://schemas.openxmlformats.org/presentationml/2006/main">
   <p:cSld name="Slide 11">
     <p:bg>
@@ -3666,398 +4058,6 @@
               <a:t>おもろまちメディカルセンター  |  ベッドコントロールシミュレーター v3.0</a:t>
             </a:r>
             <a:endParaRPr lang="en-US" sz="1400" dirty="0"/>
-          </a:p>
-        </p:txBody>
-      </p:sp>
-    </p:spTree>
-  </p:cSld>
-  <p:clrMapOvr>
-    <a:masterClrMapping/>
-  </p:clrMapOvr>
-</p:sld>
-</file>
-
-<file path=ppt/slides/slide12.xml><?xml version="1.0" encoding="utf-8"?>
-<p:sld xmlns:a="http://schemas.openxmlformats.org/drawingml/2006/main" xmlns:p="http://schemas.openxmlformats.org/presentationml/2006/main" xmlns:r="http://schemas.openxmlformats.org/officeDocument/2006/relationships">
-  <p:cSld>
-    <p:spTree>
-      <p:nvGrpSpPr>
-        <p:cNvPr id="1" name=""/>
-        <p:cNvGrpSpPr/>
-        <p:nvPr/>
-      </p:nvGrpSpPr>
-      <p:grpSpPr/>
-      <p:sp>
-        <p:nvSpPr>
-          <p:cNvPr id="2" name="TextBox 1"/>
-          <p:cNvSpPr txBox="1"/>
-          <p:nvPr/>
-        </p:nvSpPr>
-        <p:spPr>
-          <a:xfrm>
-            <a:off x="731520" y="365760"/>
-            <a:ext cx="2743200" cy="457200"/>
-          </a:xfrm>
-          <a:prstGeom prst="rect">
-            <a:avLst/>
-          </a:prstGeom>
-          <a:noFill/>
-        </p:spPr>
-        <p:txBody>
-          <a:bodyPr wrap="square">
-            <a:spAutoFit/>
-          </a:bodyPr>
-          <a:lstStyle/>
-          <a:p>
-            <a:pPr>
-              <a:defRPr sz="1400" b="0">
-                <a:solidFill>
-                  <a:srgbClr val="666666"/>
-                </a:solidFill>
-              </a:defRPr>
-            </a:pPr>
-            <a:r>
-              <a:t>新機能 4</a:t>
-            </a:r>
-          </a:p>
-        </p:txBody>
-      </p:sp>
-      <p:sp>
-        <p:nvSpPr>
-          <p:cNvPr id="3" name="TextBox 2"/>
-          <p:cNvSpPr txBox="1"/>
-          <p:nvPr/>
-        </p:nvSpPr>
-        <p:spPr>
-          <a:xfrm>
-            <a:off x="731520" y="777240"/>
-            <a:ext cx="7315200" cy="548640"/>
-          </a:xfrm>
-          <a:prstGeom prst="rect">
-            <a:avLst/>
-          </a:prstGeom>
-          <a:noFill/>
-        </p:spPr>
-        <p:txBody>
-          <a:bodyPr wrap="square">
-            <a:spAutoFit/>
-          </a:bodyPr>
-          <a:lstStyle/>
-          <a:p>
-            <a:pPr>
-              <a:defRPr sz="2800" b="1">
-                <a:solidFill>
-                  <a:srgbClr val="1A1A2E"/>
-                </a:solidFill>
-              </a:defRPr>
-            </a:pPr>
-            <a:r>
-              <a:t>HOPE連携 — 数字を、行動に変える。</a:t>
-            </a:r>
-          </a:p>
-        </p:txBody>
-      </p:sp>
-      <p:sp>
-        <p:nvSpPr>
-          <p:cNvPr id="4" name="TextBox 3"/>
-          <p:cNvSpPr txBox="1"/>
-          <p:nvPr/>
-        </p:nvSpPr>
-        <p:spPr>
-          <a:xfrm>
-            <a:off x="731520" y="1554480"/>
-            <a:ext cx="7680960" cy="457200"/>
-          </a:xfrm>
-          <a:prstGeom prst="rect">
-            <a:avLst/>
-          </a:prstGeom>
-          <a:noFill/>
-        </p:spPr>
-        <p:txBody>
-          <a:bodyPr wrap="square">
-            <a:spAutoFit/>
-          </a:bodyPr>
-          <a:lstStyle/>
-          <a:p>
-            <a:pPr>
-              <a:defRPr sz="1300">
-                <a:solidFill>
-                  <a:srgbClr val="555555"/>
-                </a:solidFill>
-              </a:defRPr>
-            </a:pPr>
-            <a:r>
-              <a:t>アプリが生成した病床サマリーを、HOPE電子カルテのToDoで医師に直接届ける</a:t>
-            </a:r>
-          </a:p>
-        </p:txBody>
-      </p:sp>
-      <p:sp>
-        <p:nvSpPr>
-          <p:cNvPr id="5" name="TextBox 4"/>
-          <p:cNvSpPr txBox="1"/>
-          <p:nvPr/>
-        </p:nvSpPr>
-        <p:spPr>
-          <a:xfrm>
-            <a:off x="457200" y="2286000"/>
-            <a:ext cx="3931920" cy="365760"/>
-          </a:xfrm>
-          <a:prstGeom prst="rect">
-            <a:avLst/>
-          </a:prstGeom>
-          <a:noFill/>
-        </p:spPr>
-        <p:txBody>
-          <a:bodyPr wrap="square">
-            <a:spAutoFit/>
-          </a:bodyPr>
-          <a:lstStyle/>
-          <a:p>
-            <a:pPr>
-              <a:defRPr sz="1500" b="1">
-                <a:solidFill>
-                  <a:srgbClr val="2D5BA0"/>
-                </a:solidFill>
-              </a:defRPr>
-            </a:pPr>
-            <a:r>
-              <a:t>① 全体サマリー（全員向け）</a:t>
-            </a:r>
-          </a:p>
-        </p:txBody>
-      </p:sp>
-      <p:sp>
-        <p:nvSpPr>
-          <p:cNvPr id="6" name="TextBox 5"/>
-          <p:cNvSpPr txBox="1"/>
-          <p:nvPr/>
-        </p:nvSpPr>
-        <p:spPr>
-          <a:xfrm>
-            <a:off x="457200" y="2743200"/>
-            <a:ext cx="3931920" cy="2286000"/>
-          </a:xfrm>
-          <a:prstGeom prst="rect">
-            <a:avLst/>
-          </a:prstGeom>
-          <a:noFill/>
-        </p:spPr>
-        <p:txBody>
-          <a:bodyPr wrap="square">
-            <a:spAutoFit/>
-          </a:bodyPr>
-          <a:lstStyle/>
-          <a:p>
-            <a:pPr>
-              <a:defRPr sz="1000">
-                <a:solidFill>
-                  <a:srgbClr val="333333"/>
-                </a:solidFill>
-                <a:latin typeface="Courier New"/>
-              </a:defRPr>
-            </a:pPr>
-            <a:r>
-              <a:t>【病床管理】4/5</a:t>
-            </a:r>
-            <a:br/>
-            <a:r>
-              <a:t>全体88/94床(93.6%)</a:t>
-            </a:r>
-            <a:br/>
-            <a:r>
-              <a:t>5F:40/47床(85.1%) 空7床</a:t>
-            </a:r>
-            <a:br/>
-            <a:r>
-              <a:t>6F:46/47床(97.9%) 残1床⚠</a:t>
-            </a:r>
-            <a:br/>
-            <a:r>
-              <a:t>本日 入院5 退院4 純増+1</a:t>
-            </a:r>
-            <a:br/>
-            <a:br/>
-            <a:r>
-              <a:t>6F満床近く入院制限中</a:t>
-            </a:r>
-            <a:br/>
-            <a:r>
-              <a:t>5Fは受入余力あり</a:t>
-            </a:r>
-            <a:br/>
-            <a:r>
-              <a:t>（病床管理室）</a:t>
-            </a:r>
-          </a:p>
-        </p:txBody>
-      </p:sp>
-      <p:sp>
-        <p:nvSpPr>
-          <p:cNvPr id="7" name="TextBox 6"/>
-          <p:cNvSpPr txBox="1"/>
-          <p:nvPr/>
-        </p:nvSpPr>
-        <p:spPr>
-          <a:xfrm>
-            <a:off x="4754880" y="2286000"/>
-            <a:ext cx="3931920" cy="365760"/>
-          </a:xfrm>
-          <a:prstGeom prst="rect">
-            <a:avLst/>
-          </a:prstGeom>
-          <a:noFill/>
-        </p:spPr>
-        <p:txBody>
-          <a:bodyPr wrap="square">
-            <a:spAutoFit/>
-          </a:bodyPr>
-          <a:lstStyle/>
-          <a:p>
-            <a:pPr>
-              <a:defRPr sz="1500" b="1">
-                <a:solidFill>
-                  <a:srgbClr val="A02D2D"/>
-                </a:solidFill>
-              </a:defRPr>
-            </a:pPr>
-            <a:r>
-              <a:t>② 医師別 退院調整依頼</a:t>
-            </a:r>
-          </a:p>
-        </p:txBody>
-      </p:sp>
-      <p:sp>
-        <p:nvSpPr>
-          <p:cNvPr id="8" name="TextBox 7"/>
-          <p:cNvSpPr txBox="1"/>
-          <p:nvPr/>
-        </p:nvSpPr>
-        <p:spPr>
-          <a:xfrm>
-            <a:off x="4754880" y="2743200"/>
-            <a:ext cx="3931920" cy="2286000"/>
-          </a:xfrm>
-          <a:prstGeom prst="rect">
-            <a:avLst/>
-          </a:prstGeom>
-          <a:noFill/>
-        </p:spPr>
-        <p:txBody>
-          <a:bodyPr wrap="square">
-            <a:spAutoFit/>
-          </a:bodyPr>
-          <a:lstStyle/>
-          <a:p>
-            <a:pPr>
-              <a:defRPr sz="1000">
-                <a:solidFill>
-                  <a:srgbClr val="333333"/>
-                </a:solidFill>
-                <a:latin typeface="Courier New"/>
-              </a:defRPr>
-            </a:pPr>
-            <a:r>
-              <a:t>【退院調整のご相談】4/5</a:t>
-            </a:r>
-            <a:br/>
-            <a:r>
-              <a:t>○○先生</a:t>
-            </a:r>
-            <a:br/>
-            <a:br/>
-            <a:r>
-              <a:t>担当患者で在院21日以上の方:</a:t>
-            </a:r>
-            <a:br/>
-            <a:r>
-              <a:t>・6F 入院3/15 在院21日目</a:t>
-            </a:r>
-            <a:br/>
-            <a:r>
-              <a:t>・6F 入院3/10 在院26日目</a:t>
-            </a:r>
-            <a:br/>
-            <a:br/>
-            <a:r>
-              <a:t>現在6F稼働率97.9%(残1床)で</a:t>
-            </a:r>
-            <a:br/>
-            <a:r>
-              <a:t>新規入院の受入が困難な状況です。</a:t>
-            </a:r>
-            <a:br/>
-            <a:br/>
-            <a:r>
-              <a:t>退院・転院の見通しをお知らせ</a:t>
-            </a:r>
-            <a:br/>
-            <a:r>
-              <a:t>ください。</a:t>
-            </a:r>
-            <a:br/>
-            <a:r>
-              <a:t>（病床管理室）</a:t>
-            </a:r>
-          </a:p>
-        </p:txBody>
-      </p:sp>
-      <p:sp>
-        <p:nvSpPr>
-          <p:cNvPr id="9" name="TextBox 8"/>
-          <p:cNvSpPr txBox="1"/>
-          <p:nvPr/>
-        </p:nvSpPr>
-        <p:spPr>
-          <a:xfrm>
-            <a:off x="731520" y="5120640"/>
-            <a:ext cx="7680960" cy="914400"/>
-          </a:xfrm>
-          <a:prstGeom prst="rect">
-            <a:avLst/>
-          </a:prstGeom>
-          <a:noFill/>
-        </p:spPr>
-        <p:txBody>
-          <a:bodyPr wrap="square">
-            <a:spAutoFit/>
-          </a:bodyPr>
-          <a:lstStyle/>
-          <a:p>
-            <a:pPr>
-              <a:defRPr sz="1100">
-                <a:solidFill>
-                  <a:srgbClr val="444444"/>
-                </a:solidFill>
-              </a:defRPr>
-            </a:pPr>
-            <a:r>
-              <a:t>✓  400文字以内で自動生成 → コピーボタンでワンクリックコピー → HOPEに貼り付けて送信</a:t>
-            </a:r>
-          </a:p>
-          <a:p>
-            <a:pPr>
-              <a:defRPr sz="1100">
-                <a:solidFill>
-                  <a:srgbClr val="444444"/>
-                </a:solidFill>
-              </a:defRPr>
-            </a:pPr>
-            <a:r>
-              <a:t>✓  患者個人情報は一切含まない（入院日と在院日数のみ）</a:t>
-            </a:r>
-          </a:p>
-          <a:p>
-            <a:pPr>
-              <a:defRPr sz="1100">
-                <a:solidFill>
-                  <a:srgbClr val="444444"/>
-                </a:solidFill>
-              </a:defRPr>
-            </a:pPr>
-            <a:r>
-              <a:t>✓  院内LAN完結 — インターネット接続不要</a:t>
-            </a:r>
           </a:p>
         </p:txBody>
       </p:sp>
@@ -10014,7 +10014,7 @@
                 <a:ea typeface="Calibri" pitchFamily="34" charset="-122"/>
                 <a:cs typeface="Calibri" pitchFamily="34" charset="-120"/>
               </a:rPr>
-              <a:t>合計改善ポテンシャル</a:t>
+              <a:t>稼働率+1%で実現する改善規模</a:t>
             </a:r>
             <a:endParaRPr lang="en-US" sz="1300" dirty="0"/>
           </a:p>
@@ -10053,7 +10053,7 @@
                 <a:ea typeface="Arial Black" pitchFamily="34" charset="-122"/>
                 <a:cs typeface="Arial Black" pitchFamily="34" charset="-120"/>
               </a:rPr>
-              <a:t>2,245</a:t>
+              <a:t>約1,000</a:t>
             </a:r>
             <a:endParaRPr lang="en-US" sz="5200" dirty="0"/>
           </a:p>
@@ -10131,7 +10131,7 @@
                 <a:ea typeface="Calibri" pitchFamily="34" charset="-122"/>
                 <a:cs typeface="Calibri" pitchFamily="34" charset="-120"/>
               </a:rPr>
-              <a:t>稼働率換算: 約+2%</a:t>
+              <a:t>稼働率 +1.0% の場合</a:t>
             </a:r>
             <a:endParaRPr lang="en-US" sz="1400" dirty="0"/>
           </a:p>
@@ -10170,7 +10170,7 @@
                 <a:ea typeface="Georgia" pitchFamily="34" charset="-122"/>
                 <a:cs typeface="Georgia" pitchFamily="34" charset="-120"/>
               </a:rPr>
-              <a:t>個別は小さくても、積み重ねれば大きな改善になる。実データの蓄積により、より精緻な試算が可能に。</a:t>
+              <a:t>各項目は稼働率 1% = 年間約1,046万円（94床ベース）から算出。実データの蓄積で、精度の高い試算に進化します。</a:t>
             </a:r>
             <a:endParaRPr lang="en-US" sz="1400" dirty="0"/>
           </a:p>
@@ -10206,7 +10206,7 @@
                 </a:solidFill>
                 <a:latin typeface="Calibri"/>
               </a:rPr>
-              <a:t>（デモデータによる試算例）</a:t>
+              <a:t>（94床・月150件ベースの概算）</a:t>
             </a:r>
           </a:p>
         </p:txBody>
@@ -10241,7 +10241,7 @@
                 </a:solidFill>
                 <a:latin typeface="Calibri"/>
               </a:rPr>
-              <a:t>金曜退院の平準化・空床ラグの短縮・入院経路の拡大など、個別改善策の効果を積み上げた試算値</a:t>
+              <a:t>各改善策の稼働率寄与を控えめに見積もった概算値。導入コストゼロで改善機会を可視化します。</a:t>
             </a:r>
           </a:p>
         </p:txBody>

--- a/docs/admin/bed_control_evolution_presentation.pptx
+++ b/docs/admin/bed_control_evolution_presentation.pptx
@@ -146,7 +146,7 @@
               <c:strCache>
                 <c:ptCount val="1"/>
                 <c:pt idx="0">
-                  <c:v>改善額（万円）</c:v>
+                  <c:v>回収ベッド日</c:v>
                 </c:pt>
               </c:strCache>
             </c:strRef>
@@ -202,19 +202,23 @@
                 <c:ptCount val="4"/>
                 <c:pt idx="0">
                   <c:v>退院曜日
-平準化</c:v>
+平準化
+(+0.3%)</c:v>
                 </c:pt>
                 <c:pt idx="1">
                   <c:v>空床ラグ
-短縮</c:v>
+短縮
+(+0.2%)</c:v>
                 </c:pt>
                 <c:pt idx="2">
-                  <c:v>入院創出
-強化</c:v>
+                  <c:v>入院経路
+可視化
+(+0.3%)</c:v>
                 </c:pt>
                 <c:pt idx="3">
                   <c:v>在院日数
-適正化</c:v>
+可視化
+(+0.2%)</c:v>
                 </c:pt>
               </c:strCache>
             </c:strRef>
@@ -226,16 +230,16 @@
                 <c:formatCode>General</c:formatCode>
                 <c:ptCount val="4"/>
                 <c:pt idx="0">
-                  <c:v>314</c:v>
+                  <c:v>100</c:v>
                 </c:pt>
                 <c:pt idx="1">
-                  <c:v>209</c:v>
+                  <c:v>70</c:v>
                 </c:pt>
                 <c:pt idx="2">
-                  <c:v>314</c:v>
+                  <c:v>100</c:v>
                 </c:pt>
                 <c:pt idx="3">
-                  <c:v>209</c:v>
+                  <c:v>70</c:v>
                 </c:pt>
               </c:numCache>
             </c:numRef>
@@ -247,6 +251,20 @@
           </c:extLst>
         </c:ser>
         <c:dLbls>
+          <c:numFmt formatCode="#,##0&quot;日&quot;" sourceLinked="0"/>
+          <c:txPr>
+            <a:bodyPr/>
+            <a:lstStyle/>
+            <a:p>
+              <a:pPr>
+                <a:defRPr sz="1100" b="1">
+                  <a:solidFill>
+                    <a:srgbClr val="FFFFFF"/>
+                  </a:solidFill>
+                </a:defRPr>
+              </a:pPr>
+            </a:p>
+          </c:txPr>
           <c:showLegendKey val="0"/>
           <c:showVal val="1"/>
           <c:showCatName val="0"/>
@@ -318,6 +336,28 @@
             </a:ln>
           </c:spPr>
         </c:majorGridlines>
+        <c:title>
+          <c:tx>
+            <c:rich>
+              <a:bodyPr/>
+              <a:lstStyle/>
+              <a:p>
+                <a:pPr>
+                  <a:defRPr sz="900">
+                    <a:solidFill>
+                      <a:srgbClr val="94A3B8"/>
+                    </a:solidFill>
+                  </a:defRPr>
+                </a:pPr>
+                <a:r>
+                  <a:t>回収ベッド日/年</a:t>
+                </a:r>
+              </a:p>
+            </c:rich>
+          </c:tx>
+          <c:layout/>
+          <c:overlay val="0"/>
+        </c:title>
         <c:numFmt formatCode="General" sourceLinked="0"/>
         <c:majorTickMark val="out"/>
         <c:minorTickMark val="none"/>
@@ -10014,7 +10054,7 @@
                 <a:ea typeface="Calibri" pitchFamily="34" charset="-122"/>
                 <a:cs typeface="Calibri" pitchFamily="34" charset="-120"/>
               </a:rPr>
-              <a:t>稼働率+1%で実現する改善規模</a:t>
+              <a:t>合計 約340ベッド日/年の回収</a:t>
             </a:r>
             <a:endParaRPr lang="en-US" sz="1300" dirty="0"/>
           </a:p>
@@ -10131,7 +10171,7 @@
                 <a:ea typeface="Calibri" pitchFamily="34" charset="-122"/>
                 <a:cs typeface="Calibri" pitchFamily="34" charset="-120"/>
               </a:rPr>
-              <a:t>稼働率 +1.0% の場合</a:t>
+              <a:t>稼働率 +1.0% ≒ 年間約1,000万円</a:t>
             </a:r>
             <a:endParaRPr lang="en-US" sz="1400" dirty="0"/>
           </a:p>
@@ -10170,7 +10210,7 @@
                 <a:ea typeface="Georgia" pitchFamily="34" charset="-122"/>
                 <a:cs typeface="Georgia" pitchFamily="34" charset="-120"/>
               </a:rPr>
-              <a:t>各項目は稼働率 1% = 年間約1,046万円（94床ベース）から算出。実データの蓄積で、精度の高い試算に進化します。</a:t>
+              <a:t>各項目は実データ蓄積後に精緻化。コストゼロの「見える化」が改善の第一歩です。</a:t>
             </a:r>
             <a:endParaRPr lang="en-US" sz="1400" dirty="0"/>
           </a:p>
@@ -10206,7 +10246,7 @@
                 </a:solidFill>
                 <a:latin typeface="Calibri"/>
               </a:rPr>
-              <a:t>（94床・月150件ベースの概算）</a:t>
+              <a:t>（94床・月150件での控えめな試算）</a:t>
             </a:r>
           </a:p>
         </p:txBody>
@@ -10241,7 +10281,7 @@
                 </a:solidFill>
                 <a:latin typeface="Calibri"/>
               </a:rPr>
-              <a:t>各改善策の稼働率寄与を控えめに見積もった概算値。導入コストゼロで改善機会を可視化します。</a:t>
+              <a:t>1%=343ベッド日=約1,046万円（94床ベース）</a:t>
             </a:r>
           </a:p>
         </p:txBody>

--- a/docs/admin/bed_control_evolution_presentation.pptx
+++ b/docs/admin/bed_control_evolution_presentation.pptx
@@ -5,7 +5,7 @@
     <p:sldMasterId id="2147483648" r:id="rId1"/>
   </p:sldMasterIdLst>
   <p:notesMasterIdLst>
-    <p:notesMasterId r:id="rId13"/>
+    <p:notesMasterId r:id="rId14"/>
   </p:notesMasterIdLst>
   <p:sldIdLst>
     <p:sldId id="256" r:id="rId2"/>
@@ -17,9 +17,9 @@
     <p:sldId id="262" r:id="rId8"/>
     <p:sldId id="263" r:id="rId9"/>
     <p:sldId id="264" r:id="rId10"/>
-    <p:sldId id="267" r:id="rId18"/>
-    <p:sldId id="265" r:id="rId11"/>
-    <p:sldId id="266" r:id="rId12"/>
+    <p:sldId id="267" r:id="rId11"/>
+    <p:sldId id="265" r:id="rId12"/>
+    <p:sldId id="266" r:id="rId13"/>
   </p:sldIdLst>
   <p:sldSz cx="9144000" cy="5143500" type="screen16x9"/>
   <p:notesSz cx="5143500" cy="9144000"/>
@@ -251,20 +251,6 @@
           </c:extLst>
         </c:ser>
         <c:dLbls>
-          <c:numFmt formatCode="#,##0&quot;日&quot;" sourceLinked="0"/>
-          <c:txPr>
-            <a:bodyPr/>
-            <a:lstStyle/>
-            <a:p>
-              <a:pPr>
-                <a:defRPr sz="1100" b="1">
-                  <a:solidFill>
-                    <a:srgbClr val="FFFFFF"/>
-                  </a:solidFill>
-                </a:defRPr>
-              </a:pPr>
-            </a:p>
-          </c:txPr>
           <c:showLegendKey val="0"/>
           <c:showVal val="1"/>
           <c:showCatName val="0"/>
@@ -350,12 +336,20 @@
                   </a:defRPr>
                 </a:pPr>
                 <a:r>
-                  <a:t>回収ベッド日/年</a:t>
+                  <a:rPr lang="ja-JP" altLang="en-US"/>
+                  <a:t>回収ベッド日</a:t>
+                </a:r>
+                <a:r>
+                  <a:rPr lang="en-US" altLang="ja-JP"/>
+                  <a:t>/</a:t>
+                </a:r>
+                <a:r>
+                  <a:rPr lang="ja-JP" altLang="en-US"/>
+                  <a:t>年</a:t>
                 </a:r>
               </a:p>
             </c:rich>
           </c:tx>
-          <c:layout/>
           <c:overlay val="0"/>
         </c:title>
         <c:numFmt formatCode="General" sourceLinked="0"/>
@@ -691,7 +685,7 @@
           <a:p>
             <a:fld id="{F7021451-1387-4CA6-816F-3879F97B5CBC}" type="slidenum">
               <a:rPr lang="en-US"/>
-              <a:t>10</a:t>
+              <a:t>11</a:t>
             </a:fld>
             <a:endParaRPr lang="en-US"/>
           </a:p>
@@ -775,7 +769,7 @@
           <a:p>
             <a:fld id="{F7021451-1387-4CA6-816F-3879F97B5CBC}" type="slidenum">
               <a:rPr lang="en-US"/>
-              <a:t>11</a:t>
+              <a:t>12</a:t>
             </a:fld>
             <a:endParaRPr lang="en-US"/>
           </a:p>
@@ -2006,7 +2000,7 @@
 </file>
 
 <file path=ppt/slides/slide10.xml><?xml version="1.0" encoding="utf-8"?>
-<p:sld xmlns:a="http://schemas.openxmlformats.org/drawingml/2006/main" xmlns:p="http://schemas.openxmlformats.org/presentationml/2006/main" xmlns:r="http://schemas.openxmlformats.org/officeDocument/2006/relationships">
+<p:sld xmlns:a="http://schemas.openxmlformats.org/drawingml/2006/main" xmlns:r="http://schemas.openxmlformats.org/officeDocument/2006/relationships" xmlns:p="http://schemas.openxmlformats.org/presentationml/2006/main">
   <p:cSld>
     <p:spTree>
       <p:nvGrpSpPr>
@@ -2014,7 +2008,14 @@
         <p:cNvGrpSpPr/>
         <p:nvPr/>
       </p:nvGrpSpPr>
-      <p:grpSpPr/>
+      <p:grpSpPr>
+        <a:xfrm>
+          <a:off x="0" y="0"/>
+          <a:ext cx="0" cy="0"/>
+          <a:chOff x="0" y="0"/>
+          <a:chExt cx="0" cy="0"/>
+        </a:xfrm>
+      </p:grpSpPr>
       <p:sp>
         <p:nvSpPr>
           <p:cNvPr id="2" name="TextBox 1"/>
@@ -2186,36 +2187,72 @@
               </a:defRPr>
             </a:pPr>
             <a:r>
+              <a:rPr dirty="0"/>
               <a:t>【病床管理】4/5</a:t>
             </a:r>
-            <a:br/>
-            <a:r>
+            <a:br>
+              <a:rPr dirty="0"/>
+            </a:br>
+            <a:r>
+              <a:rPr dirty="0"/>
               <a:t>全体88/94床(93.6%)</a:t>
             </a:r>
-            <a:br/>
-            <a:r>
+            <a:br>
+              <a:rPr dirty="0"/>
+            </a:br>
+            <a:r>
+              <a:rPr dirty="0"/>
               <a:t>5F:40/47床(85.1%) 空7床</a:t>
             </a:r>
-            <a:br/>
-            <a:r>
+            <a:br>
+              <a:rPr dirty="0"/>
+            </a:br>
+            <a:r>
+              <a:rPr dirty="0"/>
               <a:t>6F:46/47床(97.9%) 残1床⚠</a:t>
             </a:r>
-            <a:br/>
-            <a:r>
-              <a:t>本日 入院5 退院4 純増+1</a:t>
-            </a:r>
-            <a:br/>
-            <a:br/>
-            <a:r>
+            <a:br>
+              <a:rPr dirty="0"/>
+            </a:br>
+            <a:r>
+              <a:rPr dirty="0" err="1"/>
+              <a:t>本日</a:t>
+            </a:r>
+            <a:r>
+              <a:rPr dirty="0"/>
+              <a:t> 入院5 退院4 純増+1</a:t>
+            </a:r>
+            <a:br>
+              <a:rPr dirty="0"/>
+            </a:br>
+            <a:br>
+              <a:rPr dirty="0"/>
+            </a:br>
+            <a:r>
+              <a:rPr dirty="0"/>
               <a:t>6F満床近く入院制限中</a:t>
             </a:r>
-            <a:br/>
-            <a:r>
+            <a:br>
+              <a:rPr dirty="0"/>
+            </a:br>
+            <a:r>
+              <a:rPr dirty="0"/>
               <a:t>5Fは受入余力あり</a:t>
             </a:r>
-            <a:br/>
-            <a:r>
-              <a:t>（病床管理室）</a:t>
+            <a:br>
+              <a:rPr dirty="0"/>
+            </a:br>
+            <a:r>
+              <a:rPr dirty="0"/>
+              <a:t>（</a:t>
+            </a:r>
+            <a:r>
+              <a:rPr dirty="0" err="1"/>
+              <a:t>病床管理室</a:t>
+            </a:r>
+            <a:r>
+              <a:rPr dirty="0"/>
+              <a:t>）</a:t>
             </a:r>
           </a:p>
         </p:txBody>
@@ -2264,7 +2301,7 @@
         <p:spPr>
           <a:xfrm>
             <a:off x="4754880" y="2743200"/>
-            <a:ext cx="3931920" cy="2286000"/>
+            <a:ext cx="3931920" cy="2092881"/>
           </a:xfrm>
           <a:prstGeom prst="rect">
             <a:avLst/>
@@ -2286,46 +2323,104 @@
               </a:defRPr>
             </a:pPr>
             <a:r>
+              <a:rPr dirty="0"/>
               <a:t>【退院調整のご相談】4/5</a:t>
             </a:r>
-            <a:br/>
-            <a:r>
-              <a:t>○○先生</a:t>
-            </a:r>
-            <a:br/>
-            <a:br/>
-            <a:r>
+            <a:br>
+              <a:rPr dirty="0"/>
+            </a:br>
+            <a:r>
+              <a:rPr dirty="0"/>
+              <a:t>○○</a:t>
+            </a:r>
+            <a:r>
+              <a:rPr dirty="0" err="1"/>
+              <a:t>先生</a:t>
+            </a:r>
+            <a:br>
+              <a:rPr dirty="0"/>
+            </a:br>
+            <a:br>
+              <a:rPr dirty="0"/>
+            </a:br>
+            <a:r>
+              <a:rPr dirty="0"/>
               <a:t>担当患者で在院21日以上の方:</a:t>
             </a:r>
-            <a:br/>
-            <a:r>
+            <a:br>
+              <a:rPr dirty="0"/>
+            </a:br>
+            <a:r>
+              <a:rPr dirty="0"/>
               <a:t>・6F 入院3/15 在院21日目</a:t>
             </a:r>
-            <a:br/>
-            <a:r>
+            <a:br>
+              <a:rPr dirty="0"/>
+            </a:br>
+            <a:r>
+              <a:rPr dirty="0"/>
               <a:t>・6F 入院3/10 在院26日目</a:t>
             </a:r>
-            <a:br/>
-            <a:br/>
-            <a:r>
-              <a:t>現在6F稼働率97.9%(残1床)で</a:t>
-            </a:r>
-            <a:br/>
-            <a:r>
-              <a:t>新規入院の受入が困難な状況です。</a:t>
-            </a:r>
-            <a:br/>
-            <a:br/>
-            <a:r>
+            <a:br>
+              <a:rPr dirty="0"/>
+            </a:br>
+            <a:br>
+              <a:rPr dirty="0"/>
+            </a:br>
+            <a:r>
+              <a:rPr dirty="0"/>
+              <a:t>現在6F稼働率97.9%(残1床)</a:t>
+            </a:r>
+            <a:r>
+              <a:rPr dirty="0" err="1"/>
+              <a:t>で</a:t>
+            </a:r>
+            <a:br>
+              <a:rPr dirty="0"/>
+            </a:br>
+            <a:r>
+              <a:rPr dirty="0" err="1"/>
+              <a:t>新規入院の受入が困難な状況です</a:t>
+            </a:r>
+            <a:r>
+              <a:rPr dirty="0"/>
+              <a:t>。</a:t>
+            </a:r>
+            <a:br>
+              <a:rPr dirty="0"/>
+            </a:br>
+            <a:br>
+              <a:rPr dirty="0"/>
+            </a:br>
+            <a:r>
+              <a:rPr dirty="0" err="1"/>
               <a:t>退院・転院の見通しをお知らせ</a:t>
             </a:r>
-            <a:br/>
-            <a:r>
-              <a:t>ください。</a:t>
-            </a:r>
-            <a:br/>
-            <a:r>
-              <a:t>（病床管理室）</a:t>
+            <a:br>
+              <a:rPr dirty="0"/>
+            </a:br>
+            <a:r>
+              <a:rPr dirty="0" err="1"/>
+              <a:t>ください</a:t>
+            </a:r>
+            <a:r>
+              <a:rPr dirty="0"/>
+              <a:t>。</a:t>
+            </a:r>
+            <a:br>
+              <a:rPr dirty="0"/>
+            </a:br>
+            <a:r>
+              <a:rPr dirty="0"/>
+              <a:t>（</a:t>
+            </a:r>
+            <a:r>
+              <a:rPr dirty="0" err="1"/>
+              <a:t>病床管理室</a:t>
+            </a:r>
+            <a:r>
+              <a:rPr dirty="0"/>
+              <a:t>）</a:t>
             </a:r>
           </a:p>
         </p:txBody>
@@ -2596,8 +2691,8 @@
         </p:nvSpPr>
         <p:spPr>
           <a:xfrm>
-            <a:off x="822960" y="1737360"/>
-            <a:ext cx="3383280" cy="1097280"/>
+            <a:off x="822959" y="1737360"/>
+            <a:ext cx="3488845" cy="1097280"/>
           </a:xfrm>
           <a:prstGeom prst="rect">
             <a:avLst/>
@@ -2673,13 +2768,22 @@
           </a:p>
           <a:p>
             <a:r>
-              <a:rPr sz="1000" i="1">
+              <a:rPr sz="1000" i="1" dirty="0" err="1">
                 <a:solidFill>
                   <a:srgbClr val="F59E0B"/>
                 </a:solidFill>
                 <a:latin typeface="Calibri"/>
               </a:rPr>
-              <a:t>例: 『金曜退院を20%削減したら？』『救急受入を月5件増やしたら？』</a:t>
+              <a:t>例</a:t>
+            </a:r>
+            <a:r>
+              <a:rPr sz="1000" i="1" dirty="0">
+                <a:solidFill>
+                  <a:srgbClr val="F59E0B"/>
+                </a:solidFill>
+                <a:latin typeface="Calibri"/>
+              </a:rPr>
+              <a:t>: 『金曜退院を20%削減したら？』『救急受入を月5件増やしたら？』</a:t>
             </a:r>
           </a:p>
         </p:txBody>
@@ -3635,8 +3739,8 @@
         </p:nvSpPr>
         <p:spPr>
           <a:xfrm>
-            <a:off x="731520" y="731520"/>
-            <a:ext cx="7680960" cy="731520"/>
+            <a:off x="460918" y="508952"/>
+            <a:ext cx="8445190" cy="731520"/>
           </a:xfrm>
           <a:prstGeom prst="rect">
             <a:avLst/>
@@ -3652,7 +3756,7 @@
               <a:buNone/>
             </a:pPr>
             <a:r>
-              <a:rPr lang="en-US" sz="3600" dirty="0">
+              <a:rPr lang="en-US" sz="3600" dirty="0" err="1">
                 <a:solidFill>
                   <a:srgbClr val="F59E0B"/>
                 </a:solidFill>
@@ -3660,7 +3764,18 @@
                 <a:ea typeface="Arial Black" pitchFamily="34" charset="-122"/>
                 <a:cs typeface="Arial Black" pitchFamily="34" charset="-120"/>
               </a:rPr>
-              <a:t>数字が見えれば、現場が変わる。</a:t>
+              <a:t>数字が見えれば、現場が変わる、かも</a:t>
+            </a:r>
+            <a:r>
+              <a:rPr lang="en-US" sz="3600" dirty="0">
+                <a:solidFill>
+                  <a:srgbClr val="F59E0B"/>
+                </a:solidFill>
+                <a:latin typeface="Arial Black" pitchFamily="34" charset="0"/>
+                <a:ea typeface="Arial Black" pitchFamily="34" charset="-122"/>
+                <a:cs typeface="Arial Black" pitchFamily="34" charset="-120"/>
+              </a:rPr>
+              <a:t>。</a:t>
             </a:r>
             <a:endParaRPr lang="en-US" sz="3600" dirty="0"/>
           </a:p>
@@ -4159,7 +4274,7 @@
               <a:buNone/>
             </a:pPr>
             <a:r>
-              <a:rPr lang="en-US" sz="3200" dirty="0">
+              <a:rPr lang="en-US" sz="3200" dirty="0" err="1">
                 <a:solidFill>
                   <a:srgbClr val="1A2744"/>
                 </a:solidFill>
@@ -4167,7 +4282,7 @@
                 <a:ea typeface="Arial Black" pitchFamily="34" charset="-122"/>
                 <a:cs typeface="Arial Black" pitchFamily="34" charset="-120"/>
               </a:rPr>
-              <a:t>なぜ今、見える化なのか</a:t>
+              <a:t>なぜ、見える化なのか</a:t>
             </a:r>
             <a:endParaRPr lang="en-US" sz="3200" dirty="0"/>
           </a:p>
@@ -4898,7 +5013,7 @@
               <a:buNone/>
             </a:pPr>
             <a:r>
-              <a:rPr lang="en-US" sz="1400" i="1" dirty="0">
+              <a:rPr lang="en-US" sz="1400" i="1" dirty="0" err="1">
                 <a:solidFill>
                   <a:srgbClr val="1A2744"/>
                 </a:solidFill>
@@ -4906,7 +5021,18 @@
                 <a:ea typeface="Georgia" pitchFamily="34" charset="-122"/>
                 <a:cs typeface="Georgia" pitchFamily="34" charset="-120"/>
               </a:rPr>
-              <a:t>今、データで見える仕組みが整った。ここから、数字で語る経営が始まる。</a:t>
+              <a:t>データで見える仕組みが整った。ここからは、さらに数字で語る経営が始まる</a:t>
+            </a:r>
+            <a:r>
+              <a:rPr lang="en-US" sz="1400" i="1" dirty="0">
+                <a:solidFill>
+                  <a:srgbClr val="1A2744"/>
+                </a:solidFill>
+                <a:latin typeface="Georgia" pitchFamily="34" charset="0"/>
+                <a:ea typeface="Georgia" pitchFamily="34" charset="-122"/>
+                <a:cs typeface="Georgia" pitchFamily="34" charset="-120"/>
+              </a:rPr>
+              <a:t>。</a:t>
             </a:r>
             <a:endParaRPr lang="en-US" sz="1400" dirty="0"/>
           </a:p>
@@ -4978,7 +5104,29 @@
                 <a:ea typeface="Arial Black" pitchFamily="34" charset="-122"/>
                 <a:cs typeface="Arial Black" pitchFamily="34" charset="-120"/>
               </a:rPr>
-              <a:t>稼働率 1% の価値を知っていますか？</a:t>
+              <a:t>稼働率 1% </a:t>
+            </a:r>
+            <a:r>
+              <a:rPr lang="en-US" sz="2800" dirty="0" err="1">
+                <a:solidFill>
+                  <a:srgbClr val="FFFFFF"/>
+                </a:solidFill>
+                <a:latin typeface="Arial Black" pitchFamily="34" charset="0"/>
+                <a:ea typeface="Arial Black" pitchFamily="34" charset="-122"/>
+                <a:cs typeface="Arial Black" pitchFamily="34" charset="-120"/>
+              </a:rPr>
+              <a:t>の価値を明確に知っていますか</a:t>
+            </a:r>
+            <a:r>
+              <a:rPr lang="en-US" sz="2800" dirty="0">
+                <a:solidFill>
+                  <a:srgbClr val="FFFFFF"/>
+                </a:solidFill>
+                <a:latin typeface="Arial Black" pitchFamily="34" charset="0"/>
+                <a:ea typeface="Arial Black" pitchFamily="34" charset="-122"/>
+                <a:cs typeface="Arial Black" pitchFamily="34" charset="-120"/>
+              </a:rPr>
+              <a:t>？</a:t>
             </a:r>
             <a:endParaRPr lang="en-US" sz="2800" dirty="0"/>
           </a:p>
@@ -5672,7 +5820,29 @@
                 <a:ea typeface="Arial Black" pitchFamily="34" charset="-122"/>
                 <a:cs typeface="Arial Black" pitchFamily="34" charset="-120"/>
               </a:rPr>
-              <a:t>令和7年度 経営実績</a:t>
+              <a:t>令和7年度 </a:t>
+            </a:r>
+            <a:r>
+              <a:rPr lang="en-US" sz="3200" dirty="0" err="1">
+                <a:solidFill>
+                  <a:srgbClr val="1A2744"/>
+                </a:solidFill>
+                <a:latin typeface="Arial Black" pitchFamily="34" charset="0"/>
+                <a:ea typeface="Arial Black" pitchFamily="34" charset="-122"/>
+                <a:cs typeface="Arial Black" pitchFamily="34" charset="-120"/>
+              </a:rPr>
+              <a:t>経営実績はこうでした</a:t>
+            </a:r>
+            <a:r>
+              <a:rPr lang="en-US" sz="3200" dirty="0">
+                <a:solidFill>
+                  <a:srgbClr val="1A2744"/>
+                </a:solidFill>
+                <a:latin typeface="Arial Black" pitchFamily="34" charset="0"/>
+                <a:ea typeface="Arial Black" pitchFamily="34" charset="-122"/>
+                <a:cs typeface="Arial Black" pitchFamily="34" charset="-120"/>
+              </a:rPr>
+              <a:t>。</a:t>
             </a:r>
             <a:endParaRPr lang="en-US" sz="3200" dirty="0"/>
           </a:p>
@@ -10224,7 +10394,7 @@
         </p:nvSpPr>
         <p:spPr>
           <a:xfrm>
-            <a:off x="5943600" y="3108960"/>
+            <a:off x="5943600" y="3200400"/>
             <a:ext cx="2926080" cy="274320"/>
           </a:xfrm>
           <a:prstGeom prst="rect">
@@ -10240,7 +10410,7 @@
           <a:p>
             <a:pPr algn="ctr"/>
             <a:r>
-              <a:rPr sz="1000" i="1">
+              <a:rPr sz="1000" i="1" dirty="0">
                 <a:solidFill>
                   <a:srgbClr val="94A3B8"/>
                 </a:solidFill>

--- a/docs/admin/bed_control_evolution_presentation.pptx
+++ b/docs/admin/bed_control_evolution_presentation.pptx
@@ -146,7 +146,7 @@
               <c:strCache>
                 <c:ptCount val="1"/>
                 <c:pt idx="0">
-                  <c:v>回収ベッド日</c:v>
+                  <c:v>改善効果（万円/年）</c:v>
                 </c:pt>
               </c:strCache>
             </c:strRef>
@@ -202,23 +202,19 @@
                 <c:ptCount val="4"/>
                 <c:pt idx="0">
                   <c:v>退院曜日
-平準化
-(+0.3%)</c:v>
+平準化</c:v>
                 </c:pt>
                 <c:pt idx="1">
                   <c:v>空床ラグ
-短縮
-(+0.2%)</c:v>
+短縮</c:v>
                 </c:pt>
                 <c:pt idx="2">
-                  <c:v>入院経路
-可視化
-(+0.3%)</c:v>
+                  <c:v>入院創出
+強化</c:v>
                 </c:pt>
                 <c:pt idx="3">
                   <c:v>在院日数
-可視化
-(+0.2%)</c:v>
+適正化</c:v>
                 </c:pt>
               </c:strCache>
             </c:strRef>
@@ -230,16 +226,16 @@
                 <c:formatCode>General</c:formatCode>
                 <c:ptCount val="4"/>
                 <c:pt idx="0">
-                  <c:v>100</c:v>
+                  <c:v>576</c:v>
                 </c:pt>
                 <c:pt idx="1">
-                  <c:v>70</c:v>
+                  <c:v>334</c:v>
                 </c:pt>
                 <c:pt idx="2">
-                  <c:v>100</c:v>
+                  <c:v>890</c:v>
                 </c:pt>
                 <c:pt idx="3">
-                  <c:v>70</c:v>
+                  <c:v>445</c:v>
                 </c:pt>
               </c:numCache>
             </c:numRef>
@@ -322,36 +318,6 @@
             </a:ln>
           </c:spPr>
         </c:majorGridlines>
-        <c:title>
-          <c:tx>
-            <c:rich>
-              <a:bodyPr/>
-              <a:lstStyle/>
-              <a:p>
-                <a:pPr>
-                  <a:defRPr sz="900">
-                    <a:solidFill>
-                      <a:srgbClr val="94A3B8"/>
-                    </a:solidFill>
-                  </a:defRPr>
-                </a:pPr>
-                <a:r>
-                  <a:rPr lang="ja-JP" altLang="en-US"/>
-                  <a:t>回収ベッド日</a:t>
-                </a:r>
-                <a:r>
-                  <a:rPr lang="en-US" altLang="ja-JP"/>
-                  <a:t>/</a:t>
-                </a:r>
-                <a:r>
-                  <a:rPr lang="ja-JP" altLang="en-US"/>
-                  <a:t>年</a:t>
-                </a:r>
-              </a:p>
-            </c:rich>
-          </c:tx>
-          <c:overlay val="0"/>
-        </c:title>
         <c:numFmt formatCode="General" sourceLinked="0"/>
         <c:majorTickMark val="out"/>
         <c:minorTickMark val="none"/>
@@ -2024,7 +1990,7 @@
         </p:nvSpPr>
         <p:spPr>
           <a:xfrm>
-            <a:off x="731520" y="365760"/>
+            <a:off x="914400" y="55199"/>
             <a:ext cx="2743200" cy="457200"/>
           </a:xfrm>
           <a:prstGeom prst="rect">
@@ -2046,7 +2012,12 @@
               </a:defRPr>
             </a:pPr>
             <a:r>
-              <a:t>新機能 4</a:t>
+              <a:rPr dirty="0" err="1"/>
+              <a:t>新機能</a:t>
+            </a:r>
+            <a:r>
+              <a:rPr dirty="0"/>
+              <a:t> 4</a:t>
             </a:r>
           </a:p>
         </p:txBody>
@@ -2059,7 +2030,7 @@
         </p:nvSpPr>
         <p:spPr>
           <a:xfrm>
-            <a:off x="731520" y="777240"/>
+            <a:off x="914400" y="398099"/>
             <a:ext cx="7315200" cy="548640"/>
           </a:xfrm>
           <a:prstGeom prst="rect">
@@ -2094,7 +2065,7 @@
         </p:nvSpPr>
         <p:spPr>
           <a:xfrm>
-            <a:off x="731520" y="1554480"/>
+            <a:off x="914400" y="1175339"/>
             <a:ext cx="7680960" cy="457200"/>
           </a:xfrm>
           <a:prstGeom prst="rect">
@@ -2129,7 +2100,7 @@
         </p:nvSpPr>
         <p:spPr>
           <a:xfrm>
-            <a:off x="457200" y="2286000"/>
+            <a:off x="640080" y="1906859"/>
             <a:ext cx="3931920" cy="365760"/>
           </a:xfrm>
           <a:prstGeom prst="rect">
@@ -2164,7 +2135,7 @@
         </p:nvSpPr>
         <p:spPr>
           <a:xfrm>
-            <a:off x="457200" y="2743200"/>
+            <a:off x="640080" y="2364059"/>
             <a:ext cx="3931920" cy="2286000"/>
           </a:xfrm>
           <a:prstGeom prst="rect">
@@ -2187,40 +2158,119 @@
               </a:defRPr>
             </a:pPr>
             <a:r>
+              <a:t>【病床管理】4/5</a:t>
+            </a:r>
+            <a:br/>
+            <a:r>
+              <a:t>全体88/94床(93.6%)</a:t>
+            </a:r>
+            <a:br/>
+            <a:r>
+              <a:t>5F:40/47床(85.1%) 空7床</a:t>
+            </a:r>
+            <a:br/>
+            <a:r>
+              <a:t>6F:46/47床(97.9%) 残1床⚠</a:t>
+            </a:r>
+            <a:br/>
+            <a:r>
+              <a:t>本日 入院5 退院4 純増+1</a:t>
+            </a:r>
+            <a:br/>
+            <a:br/>
+            <a:r>
+              <a:t>6F満床近く入院制限中</a:t>
+            </a:r>
+            <a:br/>
+            <a:r>
+              <a:t>5Fは受入余力あり</a:t>
+            </a:r>
+            <a:br/>
+            <a:r>
+              <a:t>（病床管理室）</a:t>
+            </a:r>
+          </a:p>
+        </p:txBody>
+      </p:sp>
+      <p:sp>
+        <p:nvSpPr>
+          <p:cNvPr id="7" name="TextBox 6"/>
+          <p:cNvSpPr txBox="1"/>
+          <p:nvPr/>
+        </p:nvSpPr>
+        <p:spPr>
+          <a:xfrm>
+            <a:off x="4937760" y="1906859"/>
+            <a:ext cx="3931920" cy="365760"/>
+          </a:xfrm>
+          <a:prstGeom prst="rect">
+            <a:avLst/>
+          </a:prstGeom>
+          <a:noFill/>
+        </p:spPr>
+        <p:txBody>
+          <a:bodyPr wrap="square">
+            <a:spAutoFit/>
+          </a:bodyPr>
+          <a:lstStyle/>
+          <a:p>
+            <a:pPr>
+              <a:defRPr sz="1500" b="1">
+                <a:solidFill>
+                  <a:srgbClr val="A02D2D"/>
+                </a:solidFill>
+              </a:defRPr>
+            </a:pPr>
+            <a:r>
+              <a:t>② 医師別 退院調整依頼</a:t>
+            </a:r>
+          </a:p>
+        </p:txBody>
+      </p:sp>
+      <p:sp>
+        <p:nvSpPr>
+          <p:cNvPr id="8" name="TextBox 7"/>
+          <p:cNvSpPr txBox="1"/>
+          <p:nvPr/>
+        </p:nvSpPr>
+        <p:spPr>
+          <a:xfrm>
+            <a:off x="4937760" y="2364059"/>
+            <a:ext cx="3931920" cy="2286000"/>
+          </a:xfrm>
+          <a:prstGeom prst="rect">
+            <a:avLst/>
+          </a:prstGeom>
+          <a:noFill/>
+        </p:spPr>
+        <p:txBody>
+          <a:bodyPr wrap="square">
+            <a:spAutoFit/>
+          </a:bodyPr>
+          <a:lstStyle/>
+          <a:p>
+            <a:pPr>
+              <a:defRPr sz="1000">
+                <a:solidFill>
+                  <a:srgbClr val="333333"/>
+                </a:solidFill>
+                <a:latin typeface="Courier New"/>
+              </a:defRPr>
+            </a:pPr>
+            <a:r>
               <a:rPr dirty="0"/>
-              <a:t>【病床管理】4/5</a:t>
+              <a:t>【退院調整のご相談】4/5</a:t>
             </a:r>
             <a:br>
               <a:rPr dirty="0"/>
             </a:br>
             <a:r>
               <a:rPr dirty="0"/>
-              <a:t>全体88/94床(93.6%)</a:t>
-            </a:r>
-            <a:br>
-              <a:rPr dirty="0"/>
-            </a:br>
-            <a:r>
-              <a:rPr dirty="0"/>
-              <a:t>5F:40/47床(85.1%) 空7床</a:t>
-            </a:r>
-            <a:br>
-              <a:rPr dirty="0"/>
-            </a:br>
-            <a:r>
-              <a:rPr dirty="0"/>
-              <a:t>6F:46/47床(97.9%) 残1床⚠</a:t>
-            </a:r>
-            <a:br>
-              <a:rPr dirty="0"/>
-            </a:br>
+              <a:t>○○</a:t>
+            </a:r>
             <a:r>
               <a:rPr dirty="0" err="1"/>
-              <a:t>本日</a:t>
-            </a:r>
-            <a:r>
-              <a:rPr dirty="0"/>
-              <a:t> 入院5 退院4 純増+1</a:t>
+              <a:t>先生</a:t>
             </a:r>
             <a:br>
               <a:rPr dirty="0"/>
@@ -2230,112 +2280,21 @@
             </a:br>
             <a:r>
               <a:rPr dirty="0"/>
-              <a:t>6F満床近く入院制限中</a:t>
+              <a:t>担当患者で在院21日以上の方:</a:t>
             </a:r>
             <a:br>
               <a:rPr dirty="0"/>
             </a:br>
             <a:r>
               <a:rPr dirty="0"/>
-              <a:t>5Fは受入余力あり</a:t>
+              <a:t>・6F 入院3/15 在院21日目</a:t>
             </a:r>
             <a:br>
               <a:rPr dirty="0"/>
             </a:br>
             <a:r>
               <a:rPr dirty="0"/>
-              <a:t>（</a:t>
-            </a:r>
-            <a:r>
-              <a:rPr dirty="0" err="1"/>
-              <a:t>病床管理室</a:t>
-            </a:r>
-            <a:r>
-              <a:rPr dirty="0"/>
-              <a:t>）</a:t>
-            </a:r>
-          </a:p>
-        </p:txBody>
-      </p:sp>
-      <p:sp>
-        <p:nvSpPr>
-          <p:cNvPr id="7" name="TextBox 6"/>
-          <p:cNvSpPr txBox="1"/>
-          <p:nvPr/>
-        </p:nvSpPr>
-        <p:spPr>
-          <a:xfrm>
-            <a:off x="4754880" y="2286000"/>
-            <a:ext cx="3931920" cy="365760"/>
-          </a:xfrm>
-          <a:prstGeom prst="rect">
-            <a:avLst/>
-          </a:prstGeom>
-          <a:noFill/>
-        </p:spPr>
-        <p:txBody>
-          <a:bodyPr wrap="square">
-            <a:spAutoFit/>
-          </a:bodyPr>
-          <a:lstStyle/>
-          <a:p>
-            <a:pPr>
-              <a:defRPr sz="1500" b="1">
-                <a:solidFill>
-                  <a:srgbClr val="A02D2D"/>
-                </a:solidFill>
-              </a:defRPr>
-            </a:pPr>
-            <a:r>
-              <a:t>② 医師別 退院調整依頼</a:t>
-            </a:r>
-          </a:p>
-        </p:txBody>
-      </p:sp>
-      <p:sp>
-        <p:nvSpPr>
-          <p:cNvPr id="8" name="TextBox 7"/>
-          <p:cNvSpPr txBox="1"/>
-          <p:nvPr/>
-        </p:nvSpPr>
-        <p:spPr>
-          <a:xfrm>
-            <a:off x="4754880" y="2743200"/>
-            <a:ext cx="3931920" cy="2092881"/>
-          </a:xfrm>
-          <a:prstGeom prst="rect">
-            <a:avLst/>
-          </a:prstGeom>
-          <a:noFill/>
-        </p:spPr>
-        <p:txBody>
-          <a:bodyPr wrap="square">
-            <a:spAutoFit/>
-          </a:bodyPr>
-          <a:lstStyle/>
-          <a:p>
-            <a:pPr>
-              <a:defRPr sz="1000">
-                <a:solidFill>
-                  <a:srgbClr val="333333"/>
-                </a:solidFill>
-                <a:latin typeface="Courier New"/>
-              </a:defRPr>
-            </a:pPr>
-            <a:r>
-              <a:rPr dirty="0"/>
-              <a:t>【退院調整のご相談】4/5</a:t>
-            </a:r>
-            <a:br>
-              <a:rPr dirty="0"/>
-            </a:br>
-            <a:r>
-              <a:rPr dirty="0"/>
-              <a:t>○○</a:t>
-            </a:r>
-            <a:r>
-              <a:rPr dirty="0" err="1"/>
-              <a:t>先生</a:t>
+              <a:t>・6F 入院3/10 在院26日目</a:t>
             </a:r>
             <a:br>
               <a:rPr dirty="0"/>
@@ -2345,21 +2304,22 @@
             </a:br>
             <a:r>
               <a:rPr dirty="0"/>
-              <a:t>担当患者で在院21日以上の方:</a:t>
+              <a:t>現在6F稼働率97.9%(残1床)</a:t>
+            </a:r>
+            <a:r>
+              <a:rPr dirty="0" err="1"/>
+              <a:t>で</a:t>
             </a:r>
             <a:br>
               <a:rPr dirty="0"/>
             </a:br>
             <a:r>
+              <a:rPr dirty="0" err="1"/>
+              <a:t>新規入院の受入が困難な状況です</a:t>
+            </a:r>
+            <a:r>
               <a:rPr dirty="0"/>
-              <a:t>・6F 入院3/15 在院21日目</a:t>
-            </a:r>
-            <a:br>
-              <a:rPr dirty="0"/>
-            </a:br>
-            <a:r>
-              <a:rPr dirty="0"/>
-              <a:t>・6F 入院3/10 在院26日目</a:t>
+              <a:t>。</a:t>
             </a:r>
             <a:br>
               <a:rPr dirty="0"/>
@@ -2368,19 +2328,15 @@
               <a:rPr dirty="0"/>
             </a:br>
             <a:r>
-              <a:rPr dirty="0"/>
-              <a:t>現在6F稼働率97.9%(残1床)</a:t>
-            </a:r>
-            <a:r>
               <a:rPr dirty="0" err="1"/>
-              <a:t>で</a:t>
+              <a:t>退院・転院の見通しをお知らせ</a:t>
             </a:r>
             <a:br>
               <a:rPr dirty="0"/>
             </a:br>
             <a:r>
               <a:rPr dirty="0" err="1"/>
-              <a:t>新規入院の受入が困難な状況です</a:t>
+              <a:t>ください</a:t>
             </a:r>
             <a:r>
               <a:rPr dirty="0"/>
@@ -2389,27 +2345,6 @@
             <a:br>
               <a:rPr dirty="0"/>
             </a:br>
-            <a:br>
-              <a:rPr dirty="0"/>
-            </a:br>
-            <a:r>
-              <a:rPr dirty="0" err="1"/>
-              <a:t>退院・転院の見通しをお知らせ</a:t>
-            </a:r>
-            <a:br>
-              <a:rPr dirty="0"/>
-            </a:br>
-            <a:r>
-              <a:rPr dirty="0" err="1"/>
-              <a:t>ください</a:t>
-            </a:r>
-            <a:r>
-              <a:rPr dirty="0"/>
-              <a:t>。</a:t>
-            </a:r>
-            <a:br>
-              <a:rPr dirty="0"/>
-            </a:br>
             <a:r>
               <a:rPr dirty="0"/>
               <a:t>（</a:t>
@@ -2433,7 +2368,7 @@
         </p:nvSpPr>
         <p:spPr>
           <a:xfrm>
-            <a:off x="731520" y="5120640"/>
+            <a:off x="914400" y="4432053"/>
             <a:ext cx="7680960" cy="914400"/>
           </a:xfrm>
           <a:prstGeom prst="rect">
@@ -2455,8 +2390,22 @@
               </a:defRPr>
             </a:pPr>
             <a:r>
-              <a:t>✓  400文字以内で自動生成 → コピーボタンでワンクリックコピー → HOPEに貼り付けて送信</a:t>
-            </a:r>
+              <a:rPr dirty="0"/>
+              <a:t>✓  400文字以内で自動生成 → </a:t>
+            </a:r>
+            <a:r>
+              <a:rPr dirty="0" err="1"/>
+              <a:t>コピーボタンでワンクリックコピ</a:t>
+            </a:r>
+            <a:r>
+              <a:rPr dirty="0"/>
+              <a:t>ー → </a:t>
+            </a:r>
+            <a:r>
+              <a:rPr dirty="0" err="1"/>
+              <a:t>HOPEに貼り付けて送信</a:t>
+            </a:r>
+            <a:endParaRPr dirty="0"/>
           </a:p>
           <a:p>
             <a:pPr>
@@ -2467,7 +2416,16 @@
               </a:defRPr>
             </a:pPr>
             <a:r>
-              <a:t>✓  患者個人情報は一切含まない（入院日と在院日数のみ）</a:t>
+              <a:rPr dirty="0"/>
+              <a:t>✓  </a:t>
+            </a:r>
+            <a:r>
+              <a:rPr dirty="0" err="1"/>
+              <a:t>患者個人情報は一切含まない（入院日と在院日数のみ</a:t>
+            </a:r>
+            <a:r>
+              <a:rPr dirty="0"/>
+              <a:t>）</a:t>
             </a:r>
           </a:p>
           <a:p>
@@ -2479,8 +2437,22 @@
               </a:defRPr>
             </a:pPr>
             <a:r>
-              <a:t>✓  院内LAN完結 — インターネット接続不要</a:t>
-            </a:r>
+              <a:rPr dirty="0"/>
+              <a:t>✓  </a:t>
+            </a:r>
+            <a:r>
+              <a:rPr dirty="0" err="1"/>
+              <a:t>院内LAN完結</a:t>
+            </a:r>
+            <a:r>
+              <a:rPr dirty="0"/>
+              <a:t> — </a:t>
+            </a:r>
+            <a:r>
+              <a:rPr dirty="0" err="1"/>
+              <a:t>インターネット接続不要</a:t>
+            </a:r>
+            <a:endParaRPr dirty="0"/>
           </a:p>
         </p:txBody>
       </p:sp>
@@ -2691,8 +2663,8 @@
         </p:nvSpPr>
         <p:spPr>
           <a:xfrm>
-            <a:off x="822959" y="1737360"/>
-            <a:ext cx="3488845" cy="1097280"/>
+            <a:off x="822960" y="1737360"/>
+            <a:ext cx="3383280" cy="1097280"/>
           </a:xfrm>
           <a:prstGeom prst="rect">
             <a:avLst/>
@@ -2768,22 +2740,13 @@
           </a:p>
           <a:p>
             <a:r>
-              <a:rPr sz="1000" i="1" dirty="0" err="1">
+              <a:rPr sz="1000" i="1">
                 <a:solidFill>
                   <a:srgbClr val="F59E0B"/>
                 </a:solidFill>
                 <a:latin typeface="Calibri"/>
               </a:rPr>
-              <a:t>例</a:t>
-            </a:r>
-            <a:r>
-              <a:rPr sz="1000" i="1" dirty="0">
-                <a:solidFill>
-                  <a:srgbClr val="F59E0B"/>
-                </a:solidFill>
-                <a:latin typeface="Calibri"/>
-              </a:rPr>
-              <a:t>: 『金曜退院を20%削減したら？』『救急受入を月5件増やしたら？』</a:t>
+              <a:t>例: 『金曜退院を20%削減したら？』『救急受入を月5件増やしたら？』</a:t>
             </a:r>
           </a:p>
         </p:txBody>
@@ -3739,8 +3702,8 @@
         </p:nvSpPr>
         <p:spPr>
           <a:xfrm>
-            <a:off x="460918" y="508952"/>
-            <a:ext cx="8445190" cy="731520"/>
+            <a:off x="731520" y="731520"/>
+            <a:ext cx="7680960" cy="731520"/>
           </a:xfrm>
           <a:prstGeom prst="rect">
             <a:avLst/>
@@ -3756,7 +3719,7 @@
               <a:buNone/>
             </a:pPr>
             <a:r>
-              <a:rPr lang="en-US" sz="3600" dirty="0" err="1">
+              <a:rPr lang="en-US" sz="3600" dirty="0">
                 <a:solidFill>
                   <a:srgbClr val="F59E0B"/>
                 </a:solidFill>
@@ -3764,18 +3727,7 @@
                 <a:ea typeface="Arial Black" pitchFamily="34" charset="-122"/>
                 <a:cs typeface="Arial Black" pitchFamily="34" charset="-120"/>
               </a:rPr>
-              <a:t>数字が見えれば、現場が変わる、かも</a:t>
-            </a:r>
-            <a:r>
-              <a:rPr lang="en-US" sz="3600" dirty="0">
-                <a:solidFill>
-                  <a:srgbClr val="F59E0B"/>
-                </a:solidFill>
-                <a:latin typeface="Arial Black" pitchFamily="34" charset="0"/>
-                <a:ea typeface="Arial Black" pitchFamily="34" charset="-122"/>
-                <a:cs typeface="Arial Black" pitchFamily="34" charset="-120"/>
-              </a:rPr>
-              <a:t>。</a:t>
+              <a:t>数字が見えれば、現場が変わる。</a:t>
             </a:r>
             <a:endParaRPr lang="en-US" sz="3600" dirty="0"/>
           </a:p>
@@ -4274,7 +4226,7 @@
               <a:buNone/>
             </a:pPr>
             <a:r>
-              <a:rPr lang="en-US" sz="3200" dirty="0" err="1">
+              <a:rPr lang="en-US" sz="3200" dirty="0">
                 <a:solidFill>
                   <a:srgbClr val="1A2744"/>
                 </a:solidFill>
@@ -4282,7 +4234,7 @@
                 <a:ea typeface="Arial Black" pitchFamily="34" charset="-122"/>
                 <a:cs typeface="Arial Black" pitchFamily="34" charset="-120"/>
               </a:rPr>
-              <a:t>なぜ、見える化なのか</a:t>
+              <a:t>なぜ今、見える化なのか</a:t>
             </a:r>
             <a:endParaRPr lang="en-US" sz="3200" dirty="0"/>
           </a:p>
@@ -5013,7 +4965,7 @@
               <a:buNone/>
             </a:pPr>
             <a:r>
-              <a:rPr lang="en-US" sz="1400" i="1" dirty="0" err="1">
+              <a:rPr lang="en-US" sz="1400" i="1" dirty="0">
                 <a:solidFill>
                   <a:srgbClr val="1A2744"/>
                 </a:solidFill>
@@ -5021,18 +4973,7 @@
                 <a:ea typeface="Georgia" pitchFamily="34" charset="-122"/>
                 <a:cs typeface="Georgia" pitchFamily="34" charset="-120"/>
               </a:rPr>
-              <a:t>データで見える仕組みが整った。ここからは、さらに数字で語る経営が始まる</a:t>
-            </a:r>
-            <a:r>
-              <a:rPr lang="en-US" sz="1400" i="1" dirty="0">
-                <a:solidFill>
-                  <a:srgbClr val="1A2744"/>
-                </a:solidFill>
-                <a:latin typeface="Georgia" pitchFamily="34" charset="0"/>
-                <a:ea typeface="Georgia" pitchFamily="34" charset="-122"/>
-                <a:cs typeface="Georgia" pitchFamily="34" charset="-120"/>
-              </a:rPr>
-              <a:t>。</a:t>
+              <a:t>今、データで見える仕組みが整った。ここから、数字で語る経営が始まる。</a:t>
             </a:r>
             <a:endParaRPr lang="en-US" sz="1400" dirty="0"/>
           </a:p>
@@ -5104,29 +5045,7 @@
                 <a:ea typeface="Arial Black" pitchFamily="34" charset="-122"/>
                 <a:cs typeface="Arial Black" pitchFamily="34" charset="-120"/>
               </a:rPr>
-              <a:t>稼働率 1% </a:t>
-            </a:r>
-            <a:r>
-              <a:rPr lang="en-US" sz="2800" dirty="0" err="1">
-                <a:solidFill>
-                  <a:srgbClr val="FFFFFF"/>
-                </a:solidFill>
-                <a:latin typeface="Arial Black" pitchFamily="34" charset="0"/>
-                <a:ea typeface="Arial Black" pitchFamily="34" charset="-122"/>
-                <a:cs typeface="Arial Black" pitchFamily="34" charset="-120"/>
-              </a:rPr>
-              <a:t>の価値を明確に知っていますか</a:t>
-            </a:r>
-            <a:r>
-              <a:rPr lang="en-US" sz="2800" dirty="0">
-                <a:solidFill>
-                  <a:srgbClr val="FFFFFF"/>
-                </a:solidFill>
-                <a:latin typeface="Arial Black" pitchFamily="34" charset="0"/>
-                <a:ea typeface="Arial Black" pitchFamily="34" charset="-122"/>
-                <a:cs typeface="Arial Black" pitchFamily="34" charset="-120"/>
-              </a:rPr>
-              <a:t>？</a:t>
+              <a:t>稼働率 1% の価値を知っていますか？</a:t>
             </a:r>
             <a:endParaRPr lang="en-US" sz="2800" dirty="0"/>
           </a:p>
@@ -5820,29 +5739,7 @@
                 <a:ea typeface="Arial Black" pitchFamily="34" charset="-122"/>
                 <a:cs typeface="Arial Black" pitchFamily="34" charset="-120"/>
               </a:rPr>
-              <a:t>令和7年度 </a:t>
-            </a:r>
-            <a:r>
-              <a:rPr lang="en-US" sz="3200" dirty="0" err="1">
-                <a:solidFill>
-                  <a:srgbClr val="1A2744"/>
-                </a:solidFill>
-                <a:latin typeface="Arial Black" pitchFamily="34" charset="0"/>
-                <a:ea typeface="Arial Black" pitchFamily="34" charset="-122"/>
-                <a:cs typeface="Arial Black" pitchFamily="34" charset="-120"/>
-              </a:rPr>
-              <a:t>経営実績はこうでした</a:t>
-            </a:r>
-            <a:r>
-              <a:rPr lang="en-US" sz="3200" dirty="0">
-                <a:solidFill>
-                  <a:srgbClr val="1A2744"/>
-                </a:solidFill>
-                <a:latin typeface="Arial Black" pitchFamily="34" charset="0"/>
-                <a:ea typeface="Arial Black" pitchFamily="34" charset="-122"/>
-                <a:cs typeface="Arial Black" pitchFamily="34" charset="-120"/>
-              </a:rPr>
-              <a:t>。</a:t>
+              <a:t>令和7年度 経営実績</a:t>
             </a:r>
             <a:endParaRPr lang="en-US" sz="3200" dirty="0"/>
           </a:p>
@@ -10224,7 +10121,7 @@
                 <a:ea typeface="Calibri" pitchFamily="34" charset="-122"/>
                 <a:cs typeface="Calibri" pitchFamily="34" charset="-120"/>
               </a:rPr>
-              <a:t>合計 約340ベッド日/年の回収</a:t>
+              <a:t>合計改善ポテンシャル</a:t>
             </a:r>
             <a:endParaRPr lang="en-US" sz="1300" dirty="0"/>
           </a:p>
@@ -10263,7 +10160,7 @@
                 <a:ea typeface="Arial Black" pitchFamily="34" charset="-122"/>
                 <a:cs typeface="Arial Black" pitchFamily="34" charset="-120"/>
               </a:rPr>
-              <a:t>約1,000</a:t>
+              <a:t>2,245</a:t>
             </a:r>
             <a:endParaRPr lang="en-US" sz="5200" dirty="0"/>
           </a:p>
@@ -10341,7 +10238,7 @@
                 <a:ea typeface="Calibri" pitchFamily="34" charset="-122"/>
                 <a:cs typeface="Calibri" pitchFamily="34" charset="-120"/>
               </a:rPr>
-              <a:t>稼働率 +1.0% ≒ 年間約1,000万円</a:t>
+              <a:t>稼働率換算: 約+2%</a:t>
             </a:r>
             <a:endParaRPr lang="en-US" sz="1400" dirty="0"/>
           </a:p>
@@ -10380,7 +10277,7 @@
                 <a:ea typeface="Georgia" pitchFamily="34" charset="-122"/>
                 <a:cs typeface="Georgia" pitchFamily="34" charset="-120"/>
               </a:rPr>
-              <a:t>各項目は実データ蓄積後に精緻化。コストゼロの「見える化」が改善の第一歩です。</a:t>
+              <a:t>個別は小さくても、積み重ねれば大きな改善になる。実データの蓄積により、より精緻な試算が可能に。</a:t>
             </a:r>
             <a:endParaRPr lang="en-US" sz="1400" dirty="0"/>
           </a:p>
@@ -10394,7 +10291,7 @@
         </p:nvSpPr>
         <p:spPr>
           <a:xfrm>
-            <a:off x="5943600" y="3200400"/>
+            <a:off x="5943600" y="3108960"/>
             <a:ext cx="2926080" cy="274320"/>
           </a:xfrm>
           <a:prstGeom prst="rect">
@@ -10410,13 +10307,13 @@
           <a:p>
             <a:pPr algn="ctr"/>
             <a:r>
-              <a:rPr sz="1000" i="1" dirty="0">
+              <a:rPr sz="1000" i="1">
                 <a:solidFill>
                   <a:srgbClr val="94A3B8"/>
                 </a:solidFill>
                 <a:latin typeface="Calibri"/>
               </a:rPr>
-              <a:t>（94床・月150件での控えめな試算）</a:t>
+              <a:t>（デモデータによる試算例）</a:t>
             </a:r>
           </a:p>
         </p:txBody>
@@ -10451,7 +10348,7 @@
                 </a:solidFill>
                 <a:latin typeface="Calibri"/>
               </a:rPr>
-              <a:t>1%=343ベッド日=約1,046万円（94床ベース）</a:t>
+              <a:t>金曜退院の平準化・空床ラグの短縮・入院経路の拡大など、個別改善策の効果を積み上げた試算値</a:t>
             </a:r>
           </a:p>
         </p:txBody>
